--- a/analysis/slides/3比較_複合評価.pptx
+++ b/analysis/slides/3比較_複合評価.pptx
@@ -9,9 +9,10 @@
     <p:sldId id="257" r:id="rId3"/>
     <p:sldId id="258" r:id="rId4"/>
     <p:sldId id="259" r:id="rId5"/>
+    <p:sldId id="260" r:id="rId6"/>
   </p:sldIdLst>
   <p:notesMasterIdLst>
-    <p:notesMasterId r:id="rId6"/>
+    <p:notesMasterId r:id="rId7"/>
   </p:notesMasterIdLst>
   <p:sldSz cx="12192000" cy="6858000"/>
   <p:notesSz cx="6858000" cy="12192000"/>
@@ -793,6 +794,94 @@
             <a:fld id="{F7021451-1387-4CA6-816F-3879F97B5CBC}" type="slidenum">
               <a:rPr lang="en-US"/>
               <a:t>4</a:t>
+            </a:fld>
+            <a:endParaRPr lang="en-US"/>
+          </a:p>
+        </p:txBody>
+      </p:sp>
+    </p:spTree>
+    <p:extLst>
+      <p:ext uri="{BB962C8B-B14F-4D97-AF65-F5344CB8AC3E}">
+        <p14:creationId xmlns:p14="http://schemas.microsoft.com/office/powerpoint/2010/main" val="1024086991"/>
+      </p:ext>
+    </p:extLst>
+  </p:cSld>
+  <p:clrMapOvr>
+    <a:masterClrMapping/>
+  </p:clrMapOvr>
+</p:notes>
+</file>
+
+<file path=ppt/notesSlides/notesSlide5.xml><?xml version="1.0" encoding="utf-8"?>
+<p:notes xmlns:a="http://schemas.openxmlformats.org/drawingml/2006/main" xmlns:r="http://schemas.openxmlformats.org/officeDocument/2006/relationships" xmlns:p="http://schemas.openxmlformats.org/presentationml/2006/main">
+  <p:cSld>
+    <p:spTree>
+      <p:nvGrpSpPr>
+        <p:cNvPr id="1" name=""/>
+        <p:cNvGrpSpPr/>
+        <p:nvPr/>
+      </p:nvGrpSpPr>
+      <p:grpSpPr>
+        <a:xfrm>
+          <a:off x="0" y="0"/>
+          <a:ext cx="0" cy="0"/>
+          <a:chOff x="0" y="0"/>
+          <a:chExt cx="0" cy="0"/>
+        </a:xfrm>
+      </p:grpSpPr>
+      <p:sp>
+        <p:nvSpPr>
+          <p:cNvPr id="2" name="Slide Image Placeholder 1"/>
+          <p:cNvSpPr>
+            <a:spLocks noGrp="1" noRot="1" noChangeAspect="1"/>
+          </p:cNvSpPr>
+          <p:nvPr>
+            <p:ph type="sldImg"/>
+          </p:nvPr>
+        </p:nvSpPr>
+        <p:spPr/>
+      </p:sp>
+      <p:sp>
+        <p:nvSpPr>
+          <p:cNvPr id="3" name="Notes Placeholder 2"/>
+          <p:cNvSpPr>
+            <a:spLocks noGrp="1"/>
+          </p:cNvSpPr>
+          <p:nvPr>
+            <p:ph type="body" idx="1"/>
+          </p:nvPr>
+        </p:nvSpPr>
+        <p:spPr/>
+        <p:txBody>
+          <a:bodyPr/>
+          <a:lstStyle/>
+          <a:p>
+            <a:r>
+              <a:rPr lang="en-US" dirty="0"/>
+              <a:t/>
+            </a:r>
+            <a:endParaRPr lang="en-US" dirty="0"/>
+          </a:p>
+        </p:txBody>
+      </p:sp>
+      <p:sp>
+        <p:nvSpPr>
+          <p:cNvPr id="4" name="Slide Number Placeholder 3"/>
+          <p:cNvSpPr>
+            <a:spLocks noGrp="1"/>
+          </p:cNvSpPr>
+          <p:nvPr>
+            <p:ph type="sldNum" sz="quarter" idx="10"/>
+          </p:nvPr>
+        </p:nvSpPr>
+        <p:spPr/>
+        <p:txBody>
+          <a:bodyPr/>
+          <a:lstStyle/>
+          <a:p>
+            <a:fld id="{F7021451-1387-4CA6-816F-3879F97B5CBC}" type="slidenum">
+              <a:rPr lang="en-US"/>
+              <a:t>5</a:t>
             </a:fld>
             <a:endParaRPr lang="en-US"/>
           </a:p>
@@ -1405,7 +1494,7 @@
                 <a:ea typeface="Calibri" pitchFamily="34" charset="-122"/>
                 <a:cs typeface="Calibri" pitchFamily="34" charset="-120"/>
               </a:rPr>
-              <a:t>COMPARISON ①</a:t>
+              <a:t>NEW FINDING</a:t>
             </a:r>
             <a:endParaRPr lang="en-US" sz="1250" dirty="0"/>
           </a:p>
@@ -1444,7 +1533,7 @@
                 <a:ea typeface="Cambria" pitchFamily="34" charset="-122"/>
                 <a:cs typeface="Cambria" pitchFamily="34" charset="-120"/>
               </a:rPr>
-              <a:t>スムージー vs 固形</a:t>
+              <a:t>新知見：血糖ベースラインの持続的シフト</a:t>
             </a:r>
             <a:endParaRPr lang="en-US" sz="2500" dirty="0"/>
           </a:p>
@@ -1452,34 +1541,14 @@
       </p:sp>
       <p:sp>
         <p:nvSpPr>
-          <p:cNvPr id="4" name="Shape 2"/>
-          <p:cNvSpPr/>
-          <p:nvPr/>
-        </p:nvSpPr>
-        <p:spPr>
-          <a:xfrm>
-            <a:off x="548640" y="1399032"/>
-            <a:ext cx="146304" cy="146304"/>
-          </a:xfrm>
-          <a:prstGeom prst="rect">
-            <a:avLst/>
-          </a:prstGeom>
-          <a:solidFill>
-            <a:srgbClr val="EB6834"/>
-          </a:solidFill>
-          <a:ln/>
-        </p:spPr>
-      </p:sp>
-      <p:sp>
-        <p:nvSpPr>
-          <p:cNvPr id="5" name="Text 3"/>
+          <p:cNvPr id="4" name="Text 2"/>
           <p:cNvSpPr txBox="1"/>
           <p:nvPr/>
         </p:nvSpPr>
         <p:spPr>
           <a:xfrm>
-            <a:off x="749808" y="1335024"/>
-            <a:ext cx="2743200" cy="274320"/>
+            <a:off x="548640" y="1554480"/>
+            <a:ext cx="11091672" cy="1005840"/>
           </a:xfrm>
           <a:prstGeom prst="rect">
             <a:avLst/>
@@ -1495,7 +1564,7 @@
               <a:buNone/>
             </a:pPr>
             <a:r>
-              <a:rPr lang="en-US" sz="1150" b="1" dirty="0">
+              <a:rPr lang="en-US" sz="1300" dirty="0">
                 <a:solidFill>
                   <a:srgbClr val="1A1A1A"/>
                 </a:solidFill>
@@ -1503,1157 +1572,9 @@
                 <a:ea typeface="Calibri" pitchFamily="34" charset="-122"/>
                 <a:cs typeface="Calibri" pitchFamily="34" charset="-120"/>
               </a:rPr>
-              <a:t>スムージー摂取</a:t>
+              <a:t>14日間の連続CGMデータで、DAY5（8/29）14:50頃から血糖が持続的に上昇し、以後一度も元の水準に戻っていないことが判明しました。夜間平均血糖：DAY1〜4は93〜107 mg/dL→DAY6以降は130〜177 mg/dL。低血糖（70mg/dL未満）は14日間通じて一度も検出されていません。</a:t>
             </a:r>
-            <a:endParaRPr lang="en-US" sz="1150" dirty="0"/>
-          </a:p>
-        </p:txBody>
-      </p:sp>
-      <p:sp>
-        <p:nvSpPr>
-          <p:cNvPr id="6" name="Shape 4"/>
-          <p:cNvSpPr/>
-          <p:nvPr/>
-        </p:nvSpPr>
-        <p:spPr>
-          <a:xfrm>
-            <a:off x="4389120" y="1399032"/>
-            <a:ext cx="146304" cy="146304"/>
-          </a:xfrm>
-          <a:prstGeom prst="rect">
-            <a:avLst/>
-          </a:prstGeom>
-          <a:solidFill>
-            <a:srgbClr val="2A78D6"/>
-          </a:solidFill>
-          <a:ln/>
-        </p:spPr>
-      </p:sp>
-      <p:sp>
-        <p:nvSpPr>
-          <p:cNvPr id="7" name="Text 5"/>
-          <p:cNvSpPr txBox="1"/>
-          <p:nvPr/>
-        </p:nvSpPr>
-        <p:spPr>
-          <a:xfrm>
-            <a:off x="4590288" y="1335024"/>
-            <a:ext cx="2743200" cy="274320"/>
-          </a:xfrm>
-          <a:prstGeom prst="rect">
-            <a:avLst/>
-          </a:prstGeom>
-          <a:noFill/>
-          <a:ln/>
-        </p:spPr>
-        <p:txBody>
-          <a:bodyPr wrap="square" lIns="0" tIns="0" rIns="0" bIns="0" rtlCol="0" anchor="ctr"/>
-          <a:lstStyle/>
-          <a:p>
-            <a:pPr indent="0" marL="0">
-              <a:buNone/>
-            </a:pPr>
-            <a:r>
-              <a:rPr lang="en-US" sz="1150" b="1" dirty="0">
-                <a:solidFill>
-                  <a:srgbClr val="1A1A1A"/>
-                </a:solidFill>
-                <a:latin typeface="Calibri" pitchFamily="34" charset="0"/>
-                <a:ea typeface="Calibri" pitchFamily="34" charset="-122"/>
-                <a:cs typeface="Calibri" pitchFamily="34" charset="-120"/>
-              </a:rPr>
-              <a:t>固形摂取</a:t>
-            </a:r>
-            <a:endParaRPr lang="en-US" sz="1150" dirty="0"/>
-          </a:p>
-        </p:txBody>
-      </p:sp>
-      <p:sp>
-        <p:nvSpPr>
-          <p:cNvPr id="8" name="Shape 6"/>
-          <p:cNvSpPr/>
-          <p:nvPr/>
-        </p:nvSpPr>
-        <p:spPr>
-          <a:xfrm>
-            <a:off x="548640" y="1719072"/>
-            <a:ext cx="91440" cy="146304"/>
-          </a:xfrm>
-          <a:prstGeom prst="rect">
-            <a:avLst/>
-          </a:prstGeom>
-          <a:solidFill>
-            <a:srgbClr val="065A82"/>
-          </a:solidFill>
-          <a:ln/>
-        </p:spPr>
-      </p:sp>
-      <p:sp>
-        <p:nvSpPr>
-          <p:cNvPr id="9" name="Text 7"/>
-          <p:cNvSpPr txBox="1"/>
-          <p:nvPr/>
-        </p:nvSpPr>
-        <p:spPr>
-          <a:xfrm>
-            <a:off x="731520" y="1655064"/>
-            <a:ext cx="5486400" cy="274320"/>
-          </a:xfrm>
-          <a:prstGeom prst="rect">
-            <a:avLst/>
-          </a:prstGeom>
-          <a:noFill/>
-          <a:ln/>
-        </p:spPr>
-        <p:txBody>
-          <a:bodyPr wrap="square" lIns="0" tIns="0" rIns="0" bIns="0" rtlCol="0" anchor="ctr"/>
-          <a:lstStyle/>
-          <a:p>
-            <a:pPr indent="0" marL="0">
-              <a:buNone/>
-            </a:pPr>
-            <a:r>
-              <a:rPr lang="en-US" sz="1250" b="1" dirty="0">
-                <a:solidFill>
-                  <a:srgbClr val="21295C"/>
-                </a:solidFill>
-                <a:latin typeface="Calibri" pitchFamily="34" charset="0"/>
-                <a:ea typeface="Calibri" pitchFamily="34" charset="-122"/>
-                <a:cs typeface="Calibri" pitchFamily="34" charset="-120"/>
-              </a:rPr>
-              <a:t>血糖値</a:t>
-            </a:r>
-            <a:endParaRPr lang="en-US" sz="1250" dirty="0"/>
-          </a:p>
-        </p:txBody>
-      </p:sp>
-      <p:sp>
-        <p:nvSpPr>
-          <p:cNvPr id="10" name="Shape 8"/>
-          <p:cNvSpPr/>
-          <p:nvPr/>
-        </p:nvSpPr>
-        <p:spPr>
-          <a:xfrm>
-            <a:off x="548640" y="1947672"/>
-            <a:ext cx="3514344" cy="868680"/>
-          </a:xfrm>
-          <a:prstGeom prst="roundRect">
-            <a:avLst>
-              <a:gd name="adj" fmla="val 8421"/>
-            </a:avLst>
-          </a:prstGeom>
-          <a:solidFill>
-            <a:srgbClr val="F4F7F9"/>
-          </a:solidFill>
-          <a:ln/>
-        </p:spPr>
-      </p:sp>
-      <p:sp>
-        <p:nvSpPr>
-          <p:cNvPr id="11" name="Text 9"/>
-          <p:cNvSpPr txBox="1"/>
-          <p:nvPr/>
-        </p:nvSpPr>
-        <p:spPr>
-          <a:xfrm>
-            <a:off x="685800" y="2002536"/>
-            <a:ext cx="3240024" cy="237744"/>
-          </a:xfrm>
-          <a:prstGeom prst="rect">
-            <a:avLst/>
-          </a:prstGeom>
-          <a:noFill/>
-          <a:ln/>
-        </p:spPr>
-        <p:txBody>
-          <a:bodyPr wrap="square" lIns="0" tIns="0" rIns="0" bIns="0" rtlCol="0" anchor="ctr"/>
-          <a:lstStyle/>
-          <a:p>
-            <a:pPr indent="0" marL="0">
-              <a:buNone/>
-            </a:pPr>
-            <a:r>
-              <a:rPr lang="en-US" sz="1050" b="1" dirty="0">
-                <a:solidFill>
-                  <a:srgbClr val="21295C"/>
-                </a:solidFill>
-                <a:latin typeface="Calibri" pitchFamily="34" charset="0"/>
-                <a:ea typeface="Calibri" pitchFamily="34" charset="-122"/>
-                <a:cs typeface="Calibri" pitchFamily="34" charset="-120"/>
-              </a:rPr>
-              <a:t>Δピーク血糖値 (mg/dL)</a:t>
-            </a:r>
-            <a:endParaRPr lang="en-US" sz="1050" dirty="0"/>
-          </a:p>
-        </p:txBody>
-      </p:sp>
-      <p:sp>
-        <p:nvSpPr>
-          <p:cNvPr id="12" name="Text 10"/>
-          <p:cNvSpPr txBox="1"/>
-          <p:nvPr/>
-        </p:nvSpPr>
-        <p:spPr>
-          <a:xfrm>
-            <a:off x="685800" y="2258568"/>
-            <a:ext cx="1620012" cy="457200"/>
-          </a:xfrm>
-          <a:prstGeom prst="rect">
-            <a:avLst/>
-          </a:prstGeom>
-          <a:noFill/>
-          <a:ln/>
-        </p:spPr>
-        <p:txBody>
-          <a:bodyPr wrap="square" lIns="0" tIns="0" rIns="0" bIns="0" rtlCol="0" anchor="ctr"/>
-          <a:lstStyle/>
-          <a:p>
-            <a:pPr indent="0" marL="0">
-              <a:buNone/>
-            </a:pPr>
-            <a:r>
-              <a:rPr lang="en-US" sz="1900" b="1" dirty="0">
-                <a:solidFill>
-                  <a:srgbClr val="EB6834"/>
-                </a:solidFill>
-                <a:latin typeface="Cambria" pitchFamily="34" charset="0"/>
-                <a:ea typeface="Cambria" pitchFamily="34" charset="-122"/>
-                <a:cs typeface="Cambria" pitchFamily="34" charset="-120"/>
-              </a:rPr>
-              <a:t>85.0</a:t>
-            </a:r>
-            <a:endParaRPr lang="en-US" sz="1900" dirty="0"/>
-          </a:p>
-        </p:txBody>
-      </p:sp>
-      <p:sp>
-        <p:nvSpPr>
-          <p:cNvPr id="13" name="Text 11"/>
-          <p:cNvSpPr txBox="1"/>
-          <p:nvPr/>
-        </p:nvSpPr>
-        <p:spPr>
-          <a:xfrm>
-            <a:off x="2305812" y="2258568"/>
-            <a:ext cx="1620012" cy="457200"/>
-          </a:xfrm>
-          <a:prstGeom prst="rect">
-            <a:avLst/>
-          </a:prstGeom>
-          <a:noFill/>
-          <a:ln/>
-        </p:spPr>
-        <p:txBody>
-          <a:bodyPr wrap="square" lIns="0" tIns="0" rIns="0" bIns="0" rtlCol="0" anchor="ctr"/>
-          <a:lstStyle/>
-          <a:p>
-            <a:pPr algn="r" indent="0" marL="0">
-              <a:buNone/>
-            </a:pPr>
-            <a:r>
-              <a:rPr lang="en-US" sz="1900" b="1" dirty="0">
-                <a:solidFill>
-                  <a:srgbClr val="2A78D6"/>
-                </a:solidFill>
-                <a:latin typeface="Cambria" pitchFamily="34" charset="0"/>
-                <a:ea typeface="Cambria" pitchFamily="34" charset="-122"/>
-                <a:cs typeface="Cambria" pitchFamily="34" charset="-120"/>
-              </a:rPr>
-              <a:t>53.7</a:t>
-            </a:r>
-            <a:endParaRPr lang="en-US" sz="1900" dirty="0"/>
-          </a:p>
-        </p:txBody>
-      </p:sp>
-      <p:sp>
-        <p:nvSpPr>
-          <p:cNvPr id="14" name="Shape 12"/>
-          <p:cNvSpPr/>
-          <p:nvPr/>
-        </p:nvSpPr>
-        <p:spPr>
-          <a:xfrm>
-            <a:off x="4337304" y="1947672"/>
-            <a:ext cx="3514344" cy="868680"/>
-          </a:xfrm>
-          <a:prstGeom prst="roundRect">
-            <a:avLst>
-              <a:gd name="adj" fmla="val 8421"/>
-            </a:avLst>
-          </a:prstGeom>
-          <a:solidFill>
-            <a:srgbClr val="F4F7F9"/>
-          </a:solidFill>
-          <a:ln/>
-        </p:spPr>
-      </p:sp>
-      <p:sp>
-        <p:nvSpPr>
-          <p:cNvPr id="15" name="Text 13"/>
-          <p:cNvSpPr txBox="1"/>
-          <p:nvPr/>
-        </p:nvSpPr>
-        <p:spPr>
-          <a:xfrm>
-            <a:off x="4474464" y="2002536"/>
-            <a:ext cx="3240024" cy="237744"/>
-          </a:xfrm>
-          <a:prstGeom prst="rect">
-            <a:avLst/>
-          </a:prstGeom>
-          <a:noFill/>
-          <a:ln/>
-        </p:spPr>
-        <p:txBody>
-          <a:bodyPr wrap="square" lIns="0" tIns="0" rIns="0" bIns="0" rtlCol="0" anchor="ctr"/>
-          <a:lstStyle/>
-          <a:p>
-            <a:pPr indent="0" marL="0">
-              <a:buNone/>
-            </a:pPr>
-            <a:r>
-              <a:rPr lang="en-US" sz="1050" b="1" dirty="0">
-                <a:solidFill>
-                  <a:srgbClr val="21295C"/>
-                </a:solidFill>
-                <a:latin typeface="Calibri" pitchFamily="34" charset="0"/>
-                <a:ea typeface="Calibri" pitchFamily="34" charset="-122"/>
-                <a:cs typeface="Calibri" pitchFamily="34" charset="-120"/>
-              </a:rPr>
-              <a:t>変動係数 CV</a:t>
-            </a:r>
-            <a:endParaRPr lang="en-US" sz="1050" dirty="0"/>
-          </a:p>
-        </p:txBody>
-      </p:sp>
-      <p:sp>
-        <p:nvSpPr>
-          <p:cNvPr id="16" name="Text 14"/>
-          <p:cNvSpPr txBox="1"/>
-          <p:nvPr/>
-        </p:nvSpPr>
-        <p:spPr>
-          <a:xfrm>
-            <a:off x="4474464" y="2258568"/>
-            <a:ext cx="1620012" cy="457200"/>
-          </a:xfrm>
-          <a:prstGeom prst="rect">
-            <a:avLst/>
-          </a:prstGeom>
-          <a:noFill/>
-          <a:ln/>
-        </p:spPr>
-        <p:txBody>
-          <a:bodyPr wrap="square" lIns="0" tIns="0" rIns="0" bIns="0" rtlCol="0" anchor="ctr"/>
-          <a:lstStyle/>
-          <a:p>
-            <a:pPr indent="0" marL="0">
-              <a:buNone/>
-            </a:pPr>
-            <a:r>
-              <a:rPr lang="en-US" sz="1900" b="1" dirty="0">
-                <a:solidFill>
-                  <a:srgbClr val="EB6834"/>
-                </a:solidFill>
-                <a:latin typeface="Cambria" pitchFamily="34" charset="0"/>
-                <a:ea typeface="Cambria" pitchFamily="34" charset="-122"/>
-                <a:cs typeface="Cambria" pitchFamily="34" charset="-120"/>
-              </a:rPr>
-              <a:t>14.7%</a:t>
-            </a:r>
-            <a:endParaRPr lang="en-US" sz="1900" dirty="0"/>
-          </a:p>
-        </p:txBody>
-      </p:sp>
-      <p:sp>
-        <p:nvSpPr>
-          <p:cNvPr id="17" name="Text 15"/>
-          <p:cNvSpPr txBox="1"/>
-          <p:nvPr/>
-        </p:nvSpPr>
-        <p:spPr>
-          <a:xfrm>
-            <a:off x="6094476" y="2258568"/>
-            <a:ext cx="1620012" cy="457200"/>
-          </a:xfrm>
-          <a:prstGeom prst="rect">
-            <a:avLst/>
-          </a:prstGeom>
-          <a:noFill/>
-          <a:ln/>
-        </p:spPr>
-        <p:txBody>
-          <a:bodyPr wrap="square" lIns="0" tIns="0" rIns="0" bIns="0" rtlCol="0" anchor="ctr"/>
-          <a:lstStyle/>
-          <a:p>
-            <a:pPr algn="r" indent="0" marL="0">
-              <a:buNone/>
-            </a:pPr>
-            <a:r>
-              <a:rPr lang="en-US" sz="1900" b="1" dirty="0">
-                <a:solidFill>
-                  <a:srgbClr val="2A78D6"/>
-                </a:solidFill>
-                <a:latin typeface="Cambria" pitchFamily="34" charset="0"/>
-                <a:ea typeface="Cambria" pitchFamily="34" charset="-122"/>
-                <a:cs typeface="Cambria" pitchFamily="34" charset="-120"/>
-              </a:rPr>
-              <a:t>11.2%</a:t>
-            </a:r>
-            <a:endParaRPr lang="en-US" sz="1900" dirty="0"/>
-          </a:p>
-        </p:txBody>
-      </p:sp>
-      <p:sp>
-        <p:nvSpPr>
-          <p:cNvPr id="18" name="Shape 16"/>
-          <p:cNvSpPr/>
-          <p:nvPr/>
-        </p:nvSpPr>
-        <p:spPr>
-          <a:xfrm>
-            <a:off x="8125968" y="1947672"/>
-            <a:ext cx="3514344" cy="868680"/>
-          </a:xfrm>
-          <a:prstGeom prst="roundRect">
-            <a:avLst>
-              <a:gd name="adj" fmla="val 8421"/>
-            </a:avLst>
-          </a:prstGeom>
-          <a:solidFill>
-            <a:srgbClr val="F4F7F9"/>
-          </a:solidFill>
-          <a:ln/>
-        </p:spPr>
-      </p:sp>
-      <p:sp>
-        <p:nvSpPr>
-          <p:cNvPr id="19" name="Text 17"/>
-          <p:cNvSpPr txBox="1"/>
-          <p:nvPr/>
-        </p:nvSpPr>
-        <p:spPr>
-          <a:xfrm>
-            <a:off x="8263128" y="2002536"/>
-            <a:ext cx="3240024" cy="237744"/>
-          </a:xfrm>
-          <a:prstGeom prst="rect">
-            <a:avLst/>
-          </a:prstGeom>
-          <a:noFill/>
-          <a:ln/>
-        </p:spPr>
-        <p:txBody>
-          <a:bodyPr wrap="square" lIns="0" tIns="0" rIns="0" bIns="0" rtlCol="0" anchor="ctr"/>
-          <a:lstStyle/>
-          <a:p>
-            <a:pPr indent="0" marL="0">
-              <a:buNone/>
-            </a:pPr>
-            <a:r>
-              <a:rPr lang="en-US" sz="1050" b="1" dirty="0">
-                <a:solidFill>
-                  <a:srgbClr val="21295C"/>
-                </a:solidFill>
-                <a:latin typeface="Calibri" pitchFamily="34" charset="0"/>
-                <a:ea typeface="Calibri" pitchFamily="34" charset="-122"/>
-                <a:cs typeface="Calibri" pitchFamily="34" charset="-120"/>
-              </a:rPr>
-              <a:t>練習中(11-14h)平均血糖</a:t>
-            </a:r>
-            <a:endParaRPr lang="en-US" sz="1050" dirty="0"/>
-          </a:p>
-        </p:txBody>
-      </p:sp>
-      <p:sp>
-        <p:nvSpPr>
-          <p:cNvPr id="20" name="Text 18"/>
-          <p:cNvSpPr txBox="1"/>
-          <p:nvPr/>
-        </p:nvSpPr>
-        <p:spPr>
-          <a:xfrm>
-            <a:off x="8263128" y="2258568"/>
-            <a:ext cx="1620012" cy="457200"/>
-          </a:xfrm>
-          <a:prstGeom prst="rect">
-            <a:avLst/>
-          </a:prstGeom>
-          <a:noFill/>
-          <a:ln/>
-        </p:spPr>
-        <p:txBody>
-          <a:bodyPr wrap="square" lIns="0" tIns="0" rIns="0" bIns="0" rtlCol="0" anchor="ctr"/>
-          <a:lstStyle/>
-          <a:p>
-            <a:pPr indent="0" marL="0">
-              <a:buNone/>
-            </a:pPr>
-            <a:r>
-              <a:rPr lang="en-US" sz="1900" b="1" dirty="0">
-                <a:solidFill>
-                  <a:srgbClr val="EB6834"/>
-                </a:solidFill>
-                <a:latin typeface="Cambria" pitchFamily="34" charset="0"/>
-                <a:ea typeface="Cambria" pitchFamily="34" charset="-122"/>
-                <a:cs typeface="Cambria" pitchFamily="34" charset="-120"/>
-              </a:rPr>
-              <a:t>222.1</a:t>
-            </a:r>
-            <a:endParaRPr lang="en-US" sz="1900" dirty="0"/>
-          </a:p>
-        </p:txBody>
-      </p:sp>
-      <p:sp>
-        <p:nvSpPr>
-          <p:cNvPr id="21" name="Text 19"/>
-          <p:cNvSpPr txBox="1"/>
-          <p:nvPr/>
-        </p:nvSpPr>
-        <p:spPr>
-          <a:xfrm>
-            <a:off x="9883140" y="2258568"/>
-            <a:ext cx="1620012" cy="457200"/>
-          </a:xfrm>
-          <a:prstGeom prst="rect">
-            <a:avLst/>
-          </a:prstGeom>
-          <a:noFill/>
-          <a:ln/>
-        </p:spPr>
-        <p:txBody>
-          <a:bodyPr wrap="square" lIns="0" tIns="0" rIns="0" bIns="0" rtlCol="0" anchor="ctr"/>
-          <a:lstStyle/>
-          <a:p>
-            <a:pPr algn="r" indent="0" marL="0">
-              <a:buNone/>
-            </a:pPr>
-            <a:r>
-              <a:rPr lang="en-US" sz="1900" b="1" dirty="0">
-                <a:solidFill>
-                  <a:srgbClr val="2A78D6"/>
-                </a:solidFill>
-                <a:latin typeface="Cambria" pitchFamily="34" charset="0"/>
-                <a:ea typeface="Cambria" pitchFamily="34" charset="-122"/>
-                <a:cs typeface="Cambria" pitchFamily="34" charset="-120"/>
-              </a:rPr>
-              <a:t>135.1</a:t>
-            </a:r>
-            <a:endParaRPr lang="en-US" sz="1900" dirty="0"/>
-          </a:p>
-        </p:txBody>
-      </p:sp>
-      <p:sp>
-        <p:nvSpPr>
-          <p:cNvPr id="22" name="Text 20"/>
-          <p:cNvSpPr txBox="1"/>
-          <p:nvPr/>
-        </p:nvSpPr>
-        <p:spPr>
-          <a:xfrm>
-            <a:off x="8263128" y="2606040"/>
-            <a:ext cx="3240024" cy="182880"/>
-          </a:xfrm>
-          <a:prstGeom prst="rect">
-            <a:avLst/>
-          </a:prstGeom>
-          <a:noFill/>
-          <a:ln/>
-        </p:spPr>
-        <p:txBody>
-          <a:bodyPr wrap="square" lIns="0" tIns="0" rIns="0" bIns="0" rtlCol="0" anchor="ctr"/>
-          <a:lstStyle/>
-          <a:p>
-            <a:pPr indent="0" marL="0">
-              <a:buNone/>
-            </a:pPr>
-            <a:r>
-              <a:rPr lang="en-US" sz="850" dirty="0">
-                <a:solidFill>
-                  <a:srgbClr val="5C6570"/>
-                </a:solidFill>
-                <a:latin typeface="Calibri" pitchFamily="34" charset="0"/>
-                <a:ea typeface="Calibri" pitchFamily="34" charset="-122"/>
-                <a:cs typeface="Calibri" pitchFamily="34" charset="-120"/>
-              </a:rPr>
-              <a:t>mg/dL＝燃料供給の目安</a:t>
-            </a:r>
-            <a:endParaRPr lang="en-US" sz="850" dirty="0"/>
-          </a:p>
-        </p:txBody>
-      </p:sp>
-      <p:sp>
-        <p:nvSpPr>
-          <p:cNvPr id="23" name="Shape 21"/>
-          <p:cNvSpPr/>
-          <p:nvPr/>
-        </p:nvSpPr>
-        <p:spPr>
-          <a:xfrm>
-            <a:off x="548640" y="2999232"/>
-            <a:ext cx="91440" cy="146304"/>
-          </a:xfrm>
-          <a:prstGeom prst="rect">
-            <a:avLst/>
-          </a:prstGeom>
-          <a:solidFill>
-            <a:srgbClr val="1C7293"/>
-          </a:solidFill>
-          <a:ln/>
-        </p:spPr>
-      </p:sp>
-      <p:sp>
-        <p:nvSpPr>
-          <p:cNvPr id="24" name="Text 22"/>
-          <p:cNvSpPr txBox="1"/>
-          <p:nvPr/>
-        </p:nvSpPr>
-        <p:spPr>
-          <a:xfrm>
-            <a:off x="731520" y="2935224"/>
-            <a:ext cx="5486400" cy="274320"/>
-          </a:xfrm>
-          <a:prstGeom prst="rect">
-            <a:avLst/>
-          </a:prstGeom>
-          <a:noFill/>
-          <a:ln/>
-        </p:spPr>
-        <p:txBody>
-          <a:bodyPr wrap="square" lIns="0" tIns="0" rIns="0" bIns="0" rtlCol="0" anchor="ctr"/>
-          <a:lstStyle/>
-          <a:p>
-            <a:pPr indent="0" marL="0">
-              <a:buNone/>
-            </a:pPr>
-            <a:r>
-              <a:rPr lang="en-US" sz="1250" b="1" dirty="0">
-                <a:solidFill>
-                  <a:srgbClr val="21295C"/>
-                </a:solidFill>
-                <a:latin typeface="Calibri" pitchFamily="34" charset="0"/>
-                <a:ea typeface="Calibri" pitchFamily="34" charset="-122"/>
-                <a:cs typeface="Calibri" pitchFamily="34" charset="-120"/>
-              </a:rPr>
-              <a:t>自覚コンディション（食後アンケート）</a:t>
-            </a:r>
-            <a:endParaRPr lang="en-US" sz="1250" dirty="0"/>
-          </a:p>
-        </p:txBody>
-      </p:sp>
-      <p:sp>
-        <p:nvSpPr>
-          <p:cNvPr id="25" name="Shape 23"/>
-          <p:cNvSpPr/>
-          <p:nvPr/>
-        </p:nvSpPr>
-        <p:spPr>
-          <a:xfrm>
-            <a:off x="548640" y="3227832"/>
-            <a:ext cx="3514344" cy="868680"/>
-          </a:xfrm>
-          <a:prstGeom prst="roundRect">
-            <a:avLst>
-              <a:gd name="adj" fmla="val 8421"/>
-            </a:avLst>
-          </a:prstGeom>
-          <a:solidFill>
-            <a:srgbClr val="F4F7F9"/>
-          </a:solidFill>
-          <a:ln/>
-        </p:spPr>
-      </p:sp>
-      <p:sp>
-        <p:nvSpPr>
-          <p:cNvPr id="26" name="Text 24"/>
-          <p:cNvSpPr txBox="1"/>
-          <p:nvPr/>
-        </p:nvSpPr>
-        <p:spPr>
-          <a:xfrm>
-            <a:off x="685800" y="3282696"/>
-            <a:ext cx="3240024" cy="237744"/>
-          </a:xfrm>
-          <a:prstGeom prst="rect">
-            <a:avLst/>
-          </a:prstGeom>
-          <a:noFill/>
-          <a:ln/>
-        </p:spPr>
-        <p:txBody>
-          <a:bodyPr wrap="square" lIns="0" tIns="0" rIns="0" bIns="0" rtlCol="0" anchor="ctr"/>
-          <a:lstStyle/>
-          <a:p>
-            <a:pPr indent="0" marL="0">
-              <a:buNone/>
-            </a:pPr>
-            <a:r>
-              <a:rPr lang="en-US" sz="1050" b="1" dirty="0">
-                <a:solidFill>
-                  <a:srgbClr val="21295C"/>
-                </a:solidFill>
-                <a:latin typeface="Calibri" pitchFamily="34" charset="0"/>
-                <a:ea typeface="Calibri" pitchFamily="34" charset="-122"/>
-                <a:cs typeface="Calibri" pitchFamily="34" charset="-120"/>
-              </a:rPr>
-              <a:t>満腹感ピーク(8:30)</a:t>
-            </a:r>
-            <a:endParaRPr lang="en-US" sz="1050" dirty="0"/>
-          </a:p>
-        </p:txBody>
-      </p:sp>
-      <p:sp>
-        <p:nvSpPr>
-          <p:cNvPr id="27" name="Text 25"/>
-          <p:cNvSpPr txBox="1"/>
-          <p:nvPr/>
-        </p:nvSpPr>
-        <p:spPr>
-          <a:xfrm>
-            <a:off x="685800" y="3538728"/>
-            <a:ext cx="1620012" cy="457200"/>
-          </a:xfrm>
-          <a:prstGeom prst="rect">
-            <a:avLst/>
-          </a:prstGeom>
-          <a:noFill/>
-          <a:ln/>
-        </p:spPr>
-        <p:txBody>
-          <a:bodyPr wrap="square" lIns="0" tIns="0" rIns="0" bIns="0" rtlCol="0" anchor="ctr"/>
-          <a:lstStyle/>
-          <a:p>
-            <a:pPr indent="0" marL="0">
-              <a:buNone/>
-            </a:pPr>
-            <a:r>
-              <a:rPr lang="en-US" sz="1900" b="1" dirty="0">
-                <a:solidFill>
-                  <a:srgbClr val="EB6834"/>
-                </a:solidFill>
-                <a:latin typeface="Cambria" pitchFamily="34" charset="0"/>
-                <a:ea typeface="Cambria" pitchFamily="34" charset="-122"/>
-                <a:cs typeface="Cambria" pitchFamily="34" charset="-120"/>
-              </a:rPr>
-              <a:t>3.67</a:t>
-            </a:r>
-            <a:endParaRPr lang="en-US" sz="1900" dirty="0"/>
-          </a:p>
-        </p:txBody>
-      </p:sp>
-      <p:sp>
-        <p:nvSpPr>
-          <p:cNvPr id="28" name="Text 26"/>
-          <p:cNvSpPr txBox="1"/>
-          <p:nvPr/>
-        </p:nvSpPr>
-        <p:spPr>
-          <a:xfrm>
-            <a:off x="2305812" y="3538728"/>
-            <a:ext cx="1620012" cy="457200"/>
-          </a:xfrm>
-          <a:prstGeom prst="rect">
-            <a:avLst/>
-          </a:prstGeom>
-          <a:noFill/>
-          <a:ln/>
-        </p:spPr>
-        <p:txBody>
-          <a:bodyPr wrap="square" lIns="0" tIns="0" rIns="0" bIns="0" rtlCol="0" anchor="ctr"/>
-          <a:lstStyle/>
-          <a:p>
-            <a:pPr algn="r" indent="0" marL="0">
-              <a:buNone/>
-            </a:pPr>
-            <a:r>
-              <a:rPr lang="en-US" sz="1900" b="1" dirty="0">
-                <a:solidFill>
-                  <a:srgbClr val="2A78D6"/>
-                </a:solidFill>
-                <a:latin typeface="Cambria" pitchFamily="34" charset="0"/>
-                <a:ea typeface="Cambria" pitchFamily="34" charset="-122"/>
-                <a:cs typeface="Cambria" pitchFamily="34" charset="-120"/>
-              </a:rPr>
-              <a:t>4.00</a:t>
-            </a:r>
-            <a:endParaRPr lang="en-US" sz="1900" dirty="0"/>
-          </a:p>
-        </p:txBody>
-      </p:sp>
-      <p:sp>
-        <p:nvSpPr>
-          <p:cNvPr id="29" name="Shape 27"/>
-          <p:cNvSpPr/>
-          <p:nvPr/>
-        </p:nvSpPr>
-        <p:spPr>
-          <a:xfrm>
-            <a:off x="4337304" y="3227832"/>
-            <a:ext cx="3514344" cy="868680"/>
-          </a:xfrm>
-          <a:prstGeom prst="roundRect">
-            <a:avLst>
-              <a:gd name="adj" fmla="val 8421"/>
-            </a:avLst>
-          </a:prstGeom>
-          <a:solidFill>
-            <a:srgbClr val="F4F7F9"/>
-          </a:solidFill>
-          <a:ln/>
-        </p:spPr>
-      </p:sp>
-      <p:sp>
-        <p:nvSpPr>
-          <p:cNvPr id="30" name="Text 28"/>
-          <p:cNvSpPr txBox="1"/>
-          <p:nvPr/>
-        </p:nvSpPr>
-        <p:spPr>
-          <a:xfrm>
-            <a:off x="4474464" y="3282696"/>
-            <a:ext cx="3240024" cy="237744"/>
-          </a:xfrm>
-          <a:prstGeom prst="rect">
-            <a:avLst/>
-          </a:prstGeom>
-          <a:noFill/>
-          <a:ln/>
-        </p:spPr>
-        <p:txBody>
-          <a:bodyPr wrap="square" lIns="0" tIns="0" rIns="0" bIns="0" rtlCol="0" anchor="ctr"/>
-          <a:lstStyle/>
-          <a:p>
-            <a:pPr indent="0" marL="0">
-              <a:buNone/>
-            </a:pPr>
-            <a:r>
-              <a:rPr lang="en-US" sz="1050" b="1" dirty="0">
-                <a:solidFill>
-                  <a:srgbClr val="21295C"/>
-                </a:solidFill>
-                <a:latin typeface="Calibri" pitchFamily="34" charset="0"/>
-                <a:ea typeface="Calibri" pitchFamily="34" charset="-122"/>
-                <a:cs typeface="Calibri" pitchFamily="34" charset="-120"/>
-              </a:rPr>
-              <a:t>食欲(10:00)</a:t>
-            </a:r>
-            <a:endParaRPr lang="en-US" sz="1050" dirty="0"/>
-          </a:p>
-        </p:txBody>
-      </p:sp>
-      <p:sp>
-        <p:nvSpPr>
-          <p:cNvPr id="31" name="Text 29"/>
-          <p:cNvSpPr txBox="1"/>
-          <p:nvPr/>
-        </p:nvSpPr>
-        <p:spPr>
-          <a:xfrm>
-            <a:off x="4474464" y="3538728"/>
-            <a:ext cx="1620012" cy="457200"/>
-          </a:xfrm>
-          <a:prstGeom prst="rect">
-            <a:avLst/>
-          </a:prstGeom>
-          <a:noFill/>
-          <a:ln/>
-        </p:spPr>
-        <p:txBody>
-          <a:bodyPr wrap="square" lIns="0" tIns="0" rIns="0" bIns="0" rtlCol="0" anchor="ctr"/>
-          <a:lstStyle/>
-          <a:p>
-            <a:pPr indent="0" marL="0">
-              <a:buNone/>
-            </a:pPr>
-            <a:r>
-              <a:rPr lang="en-US" sz="1900" b="1" dirty="0">
-                <a:solidFill>
-                  <a:srgbClr val="EB6834"/>
-                </a:solidFill>
-                <a:latin typeface="Cambria" pitchFamily="34" charset="0"/>
-                <a:ea typeface="Cambria" pitchFamily="34" charset="-122"/>
-                <a:cs typeface="Cambria" pitchFamily="34" charset="-120"/>
-              </a:rPr>
-              <a:t>8.67</a:t>
-            </a:r>
-            <a:endParaRPr lang="en-US" sz="1900" dirty="0"/>
-          </a:p>
-        </p:txBody>
-      </p:sp>
-      <p:sp>
-        <p:nvSpPr>
-          <p:cNvPr id="32" name="Text 30"/>
-          <p:cNvSpPr txBox="1"/>
-          <p:nvPr/>
-        </p:nvSpPr>
-        <p:spPr>
-          <a:xfrm>
-            <a:off x="6094476" y="3538728"/>
-            <a:ext cx="1620012" cy="457200"/>
-          </a:xfrm>
-          <a:prstGeom prst="rect">
-            <a:avLst/>
-          </a:prstGeom>
-          <a:noFill/>
-          <a:ln/>
-        </p:spPr>
-        <p:txBody>
-          <a:bodyPr wrap="square" lIns="0" tIns="0" rIns="0" bIns="0" rtlCol="0" anchor="ctr"/>
-          <a:lstStyle/>
-          <a:p>
-            <a:pPr algn="r" indent="0" marL="0">
-              <a:buNone/>
-            </a:pPr>
-            <a:r>
-              <a:rPr lang="en-US" sz="1900" b="1" dirty="0">
-                <a:solidFill>
-                  <a:srgbClr val="2A78D6"/>
-                </a:solidFill>
-                <a:latin typeface="Cambria" pitchFamily="34" charset="0"/>
-                <a:ea typeface="Cambria" pitchFamily="34" charset="-122"/>
-                <a:cs typeface="Cambria" pitchFamily="34" charset="-120"/>
-              </a:rPr>
-              <a:t>7.67</a:t>
-            </a:r>
-            <a:endParaRPr lang="en-US" sz="1900" dirty="0"/>
-          </a:p>
-        </p:txBody>
-      </p:sp>
-      <p:sp>
-        <p:nvSpPr>
-          <p:cNvPr id="33" name="Shape 31"/>
-          <p:cNvSpPr/>
-          <p:nvPr/>
-        </p:nvSpPr>
-        <p:spPr>
-          <a:xfrm>
-            <a:off x="8125968" y="3227832"/>
-            <a:ext cx="3514344" cy="868680"/>
-          </a:xfrm>
-          <a:prstGeom prst="roundRect">
-            <a:avLst>
-              <a:gd name="adj" fmla="val 8421"/>
-            </a:avLst>
-          </a:prstGeom>
-          <a:solidFill>
-            <a:srgbClr val="F4F7F9"/>
-          </a:solidFill>
-          <a:ln/>
-        </p:spPr>
-      </p:sp>
-      <p:sp>
-        <p:nvSpPr>
-          <p:cNvPr id="34" name="Text 32"/>
-          <p:cNvSpPr txBox="1"/>
-          <p:nvPr/>
-        </p:nvSpPr>
-        <p:spPr>
-          <a:xfrm>
-            <a:off x="8263128" y="3282696"/>
-            <a:ext cx="3240024" cy="237744"/>
-          </a:xfrm>
-          <a:prstGeom prst="rect">
-            <a:avLst/>
-          </a:prstGeom>
-          <a:noFill/>
-          <a:ln/>
-        </p:spPr>
-        <p:txBody>
-          <a:bodyPr wrap="square" lIns="0" tIns="0" rIns="0" bIns="0" rtlCol="0" anchor="ctr"/>
-          <a:lstStyle/>
-          <a:p>
-            <a:pPr indent="0" marL="0">
-              <a:buNone/>
-            </a:pPr>
-            <a:r>
-              <a:rPr lang="en-US" sz="1050" b="1" dirty="0">
-                <a:solidFill>
-                  <a:srgbClr val="21295C"/>
-                </a:solidFill>
-                <a:latin typeface="Calibri" pitchFamily="34" charset="0"/>
-                <a:ea typeface="Calibri" pitchFamily="34" charset="-122"/>
-                <a:cs typeface="Calibri" pitchFamily="34" charset="-120"/>
-              </a:rPr>
-              <a:t>頭痛・吐き気</a:t>
-            </a:r>
-            <a:endParaRPr lang="en-US" sz="1050" dirty="0"/>
-          </a:p>
-        </p:txBody>
-      </p:sp>
-      <p:sp>
-        <p:nvSpPr>
-          <p:cNvPr id="35" name="Text 33"/>
-          <p:cNvSpPr txBox="1"/>
-          <p:nvPr/>
-        </p:nvSpPr>
-        <p:spPr>
-          <a:xfrm>
-            <a:off x="8263128" y="3538728"/>
-            <a:ext cx="1620012" cy="457200"/>
-          </a:xfrm>
-          <a:prstGeom prst="rect">
-            <a:avLst/>
-          </a:prstGeom>
-          <a:noFill/>
-          <a:ln/>
-        </p:spPr>
-        <p:txBody>
-          <a:bodyPr wrap="square" lIns="0" tIns="0" rIns="0" bIns="0" rtlCol="0" anchor="ctr"/>
-          <a:lstStyle/>
-          <a:p>
-            <a:pPr indent="0" marL="0">
-              <a:buNone/>
-            </a:pPr>
-            <a:r>
-              <a:rPr lang="en-US" sz="1900" b="1" dirty="0">
-                <a:solidFill>
-                  <a:srgbClr val="EB6834"/>
-                </a:solidFill>
-                <a:latin typeface="Cambria" pitchFamily="34" charset="0"/>
-                <a:ea typeface="Cambria" pitchFamily="34" charset="-122"/>
-                <a:cs typeface="Cambria" pitchFamily="34" charset="-120"/>
-              </a:rPr>
-              <a:t>1・1</a:t>
-            </a:r>
-            <a:endParaRPr lang="en-US" sz="1900" dirty="0"/>
-          </a:p>
-        </p:txBody>
-      </p:sp>
-      <p:sp>
-        <p:nvSpPr>
-          <p:cNvPr id="36" name="Text 34"/>
-          <p:cNvSpPr txBox="1"/>
-          <p:nvPr/>
-        </p:nvSpPr>
-        <p:spPr>
-          <a:xfrm>
-            <a:off x="9883140" y="3538728"/>
-            <a:ext cx="1620012" cy="457200"/>
-          </a:xfrm>
-          <a:prstGeom prst="rect">
-            <a:avLst/>
-          </a:prstGeom>
-          <a:noFill/>
-          <a:ln/>
-        </p:spPr>
-        <p:txBody>
-          <a:bodyPr wrap="square" lIns="0" tIns="0" rIns="0" bIns="0" rtlCol="0" anchor="ctr"/>
-          <a:lstStyle/>
-          <a:p>
-            <a:pPr algn="r" indent="0" marL="0">
-              <a:buNone/>
-            </a:pPr>
-            <a:r>
-              <a:rPr lang="en-US" sz="1900" b="1" dirty="0">
-                <a:solidFill>
-                  <a:srgbClr val="2A78D6"/>
-                </a:solidFill>
-                <a:latin typeface="Cambria" pitchFamily="34" charset="0"/>
-                <a:ea typeface="Cambria" pitchFamily="34" charset="-122"/>
-                <a:cs typeface="Cambria" pitchFamily="34" charset="-120"/>
-              </a:rPr>
-              <a:t>1・1</a:t>
-            </a:r>
-            <a:endParaRPr lang="en-US" sz="1900" dirty="0"/>
-          </a:p>
-        </p:txBody>
-      </p:sp>
-      <p:sp>
-        <p:nvSpPr>
-          <p:cNvPr id="37" name="Text 35"/>
-          <p:cNvSpPr txBox="1"/>
-          <p:nvPr/>
-        </p:nvSpPr>
-        <p:spPr>
-          <a:xfrm>
-            <a:off x="8263128" y="3886200"/>
-            <a:ext cx="3240024" cy="182880"/>
-          </a:xfrm>
-          <a:prstGeom prst="rect">
-            <a:avLst/>
-          </a:prstGeom>
-          <a:noFill/>
-          <a:ln/>
-        </p:spPr>
-        <p:txBody>
-          <a:bodyPr wrap="square" lIns="0" tIns="0" rIns="0" bIns="0" rtlCol="0" anchor="ctr"/>
-          <a:lstStyle/>
-          <a:p>
-            <a:pPr indent="0" marL="0">
-              <a:buNone/>
-            </a:pPr>
-            <a:r>
-              <a:rPr lang="en-US" sz="850" dirty="0">
-                <a:solidFill>
-                  <a:srgbClr val="5C6570"/>
-                </a:solidFill>
-                <a:latin typeface="Calibri" pitchFamily="34" charset="0"/>
-                <a:ea typeface="Calibri" pitchFamily="34" charset="-122"/>
-                <a:cs typeface="Calibri" pitchFamily="34" charset="-120"/>
-              </a:rPr>
-              <a:t>両条件とも症状なし</a:t>
-            </a:r>
-            <a:endParaRPr lang="en-US" sz="850" dirty="0"/>
-          </a:p>
-        </p:txBody>
-      </p:sp>
-      <p:sp>
-        <p:nvSpPr>
-          <p:cNvPr id="38" name="Shape 36"/>
-          <p:cNvSpPr/>
-          <p:nvPr/>
-        </p:nvSpPr>
-        <p:spPr>
-          <a:xfrm>
-            <a:off x="548640" y="4279392"/>
-            <a:ext cx="91440" cy="146304"/>
-          </a:xfrm>
-          <a:prstGeom prst="rect">
-            <a:avLst/>
-          </a:prstGeom>
-          <a:solidFill>
-            <a:srgbClr val="EDA100"/>
-          </a:solidFill>
-          <a:ln/>
-        </p:spPr>
-      </p:sp>
-      <p:sp>
-        <p:nvSpPr>
-          <p:cNvPr id="39" name="Text 37"/>
-          <p:cNvSpPr txBox="1"/>
-          <p:nvPr/>
-        </p:nvSpPr>
-        <p:spPr>
-          <a:xfrm>
-            <a:off x="731520" y="4215384"/>
-            <a:ext cx="5486400" cy="274320"/>
-          </a:xfrm>
-          <a:prstGeom prst="rect">
-            <a:avLst/>
-          </a:prstGeom>
-          <a:noFill/>
-          <a:ln/>
-        </p:spPr>
-        <p:txBody>
-          <a:bodyPr wrap="square" lIns="0" tIns="0" rIns="0" bIns="0" rtlCol="0" anchor="ctr"/>
-          <a:lstStyle/>
-          <a:p>
-            <a:pPr indent="0" marL="0">
-              <a:buNone/>
-            </a:pPr>
-            <a:r>
-              <a:rPr lang="en-US" sz="1250" b="1" dirty="0">
-                <a:solidFill>
-                  <a:srgbClr val="21295C"/>
-                </a:solidFill>
-                <a:latin typeface="Calibri" pitchFamily="34" charset="0"/>
-                <a:ea typeface="Calibri" pitchFamily="34" charset="-122"/>
-                <a:cs typeface="Calibri" pitchFamily="34" charset="-120"/>
-              </a:rPr>
-              <a:t>毎日のコンディション（夜のアプリ記録）</a:t>
-            </a:r>
-            <a:endParaRPr lang="en-US" sz="1250" dirty="0"/>
+            <a:endParaRPr lang="en-US" sz="1300" dirty="0"/>
           </a:p>
         </p:txBody>
       </p:sp>
@@ -2672,19 +1593,19 @@
           </p:nvPr>
         </p:nvGraphicFramePr>
         <p:xfrm>
-          <a:off x="548640" y="4507992"/>
-          <a:ext cx="6949440" cy="1188720"/>
+          <a:off x="548640" y="2743200"/>
+          <a:ext cx="11091672" cy="2194560"/>
         </p:xfrm>
         <a:graphic>
           <a:graphicData uri="http://schemas.openxmlformats.org/drawingml/2006/table">
             <a:tbl>
               <a:tblPr/>
               <a:tblGrid>
-                <a:gridCol w="2377440"/>
-                <a:gridCol w="2286000"/>
-                <a:gridCol w="2286000"/>
+                <a:gridCol w="3017520"/>
+                <a:gridCol w="5971032"/>
+                <a:gridCol w="2103120"/>
               </a:tblGrid>
-              <a:tr h="169164">
+              <a:tr h="548640">
                 <a:tc>
                   <a:txBody>
                     <a:bodyPr/>
@@ -2693,7 +1614,18 @@
                       <a:pPr indent="0" marL="0">
                         <a:buNone/>
                       </a:pPr>
-                      <a:endParaRPr lang="en-US" sz="1050" dirty="0">
+                      <a:r>
+                        <a:rPr lang="en-US" sz="1200" b="1" dirty="0">
+                          <a:solidFill>
+                            <a:srgbClr val="FFFFFF"/>
+                          </a:solidFill>
+                          <a:latin typeface="Calibri" pitchFamily="34" charset="0"/>
+                          <a:ea typeface="Calibri" pitchFamily="34" charset="-122"/>
+                          <a:cs typeface="Calibri" pitchFamily="34" charset="-120"/>
+                        </a:rPr>
+                        <a:t>比較</a:t>
+                      </a:r>
+                      <a:endParaRPr lang="en-US" sz="1200" dirty="0">
                         <a:latin typeface="Calibri" charset="0"/>
                         <a:ea typeface="Calibri" charset="0"/>
                         <a:cs typeface="Calibri" charset="0"/>
@@ -2701,7 +1633,7 @@
                     </a:p>
                   </a:txBody>
                   <a:tcPr marL="91440" marR="91440" marT="45720" marB="45720" anchor="ctr">
-                    <a:lnL w="6350" cap="flat" cmpd="sng" algn="ctr">
+                    <a:lnL w="9525" cap="flat" cmpd="sng" algn="ctr">
                       <a:solidFill>
                         <a:srgbClr val="E3E1DB"/>
                       </a:solidFill>
@@ -2710,7 +1642,7 @@
                       <a:headEnd type="none" w="med" len="med"/>
                       <a:tailEnd type="none" w="med" len="med"/>
                     </a:lnL>
-                    <a:lnR w="6350" cap="flat" cmpd="sng" algn="ctr">
+                    <a:lnR w="9525" cap="flat" cmpd="sng" algn="ctr">
                       <a:solidFill>
                         <a:srgbClr val="E3E1DB"/>
                       </a:solidFill>
@@ -2719,7 +1651,7 @@
                       <a:headEnd type="none" w="med" len="med"/>
                       <a:tailEnd type="none" w="med" len="med"/>
                     </a:lnR>
-                    <a:lnT w="6350" cap="flat" cmpd="sng" algn="ctr">
+                    <a:lnT w="9525" cap="flat" cmpd="sng" algn="ctr">
                       <a:solidFill>
                         <a:srgbClr val="E3E1DB"/>
                       </a:solidFill>
@@ -2728,7 +1660,7 @@
                       <a:headEnd type="none" w="med" len="med"/>
                       <a:tailEnd type="none" w="med" len="med"/>
                     </a:lnT>
-                    <a:lnB w="6350" cap="flat" cmpd="sng" algn="ctr">
+                    <a:lnB w="9525" cap="flat" cmpd="sng" algn="ctr">
                       <a:solidFill>
                         <a:srgbClr val="E3E1DB"/>
                       </a:solidFill>
@@ -2751,7 +1683,7 @@
                         <a:buNone/>
                       </a:pPr>
                       <a:r>
-                        <a:rPr lang="en-US" sz="1050" b="1" dirty="0">
+                        <a:rPr lang="en-US" sz="1200" b="1" dirty="0">
                           <a:solidFill>
                             <a:srgbClr val="FFFFFF"/>
                           </a:solidFill>
@@ -2759,9 +1691,9 @@
                           <a:ea typeface="Calibri" pitchFamily="34" charset="-122"/>
                           <a:cs typeface="Calibri" pitchFamily="34" charset="-120"/>
                         </a:rPr>
-                        <a:t>スムージー摂取</a:t>
+                        <a:t>シフトとの関係</a:t>
                       </a:r>
-                      <a:endParaRPr lang="en-US" sz="1050" dirty="0">
+                      <a:endParaRPr lang="en-US" sz="1200" dirty="0">
                         <a:latin typeface="Calibri" charset="0"/>
                         <a:ea typeface="Calibri" charset="0"/>
                         <a:cs typeface="Calibri" charset="0"/>
@@ -2769,7 +1701,7 @@
                     </a:p>
                   </a:txBody>
                   <a:tcPr marL="91440" marR="91440" marT="45720" marB="45720" anchor="ctr">
-                    <a:lnL w="6350" cap="flat" cmpd="sng" algn="ctr">
+                    <a:lnL w="9525" cap="flat" cmpd="sng" algn="ctr">
                       <a:solidFill>
                         <a:srgbClr val="E3E1DB"/>
                       </a:solidFill>
@@ -2778,7 +1710,7 @@
                       <a:headEnd type="none" w="med" len="med"/>
                       <a:tailEnd type="none" w="med" len="med"/>
                     </a:lnL>
-                    <a:lnR w="6350" cap="flat" cmpd="sng" algn="ctr">
+                    <a:lnR w="9525" cap="flat" cmpd="sng" algn="ctr">
                       <a:solidFill>
                         <a:srgbClr val="E3E1DB"/>
                       </a:solidFill>
@@ -2787,7 +1719,7 @@
                       <a:headEnd type="none" w="med" len="med"/>
                       <a:tailEnd type="none" w="med" len="med"/>
                     </a:lnR>
-                    <a:lnT w="6350" cap="flat" cmpd="sng" algn="ctr">
+                    <a:lnT w="9525" cap="flat" cmpd="sng" algn="ctr">
                       <a:solidFill>
                         <a:srgbClr val="E3E1DB"/>
                       </a:solidFill>
@@ -2796,7 +1728,7 @@
                       <a:headEnd type="none" w="med" len="med"/>
                       <a:tailEnd type="none" w="med" len="med"/>
                     </a:lnT>
-                    <a:lnB w="6350" cap="flat" cmpd="sng" algn="ctr">
+                    <a:lnB w="9525" cap="flat" cmpd="sng" algn="ctr">
                       <a:solidFill>
                         <a:srgbClr val="E3E1DB"/>
                       </a:solidFill>
@@ -2819,7 +1751,7 @@
                         <a:buNone/>
                       </a:pPr>
                       <a:r>
-                        <a:rPr lang="en-US" sz="1050" b="1" dirty="0">
+                        <a:rPr lang="en-US" sz="1200" b="1" dirty="0">
                           <a:solidFill>
                             <a:srgbClr val="FFFFFF"/>
                           </a:solidFill>
@@ -2827,9 +1759,9 @@
                           <a:ea typeface="Calibri" pitchFamily="34" charset="-122"/>
                           <a:cs typeface="Calibri" pitchFamily="34" charset="-120"/>
                         </a:rPr>
-                        <a:t>固形摂取</a:t>
+                        <a:t>信頼度</a:t>
                       </a:r>
-                      <a:endParaRPr lang="en-US" sz="1050" dirty="0">
+                      <a:endParaRPr lang="en-US" sz="1200" dirty="0">
                         <a:latin typeface="Calibri" charset="0"/>
                         <a:ea typeface="Calibri" charset="0"/>
                         <a:cs typeface="Calibri" charset="0"/>
@@ -2837,7 +1769,7 @@
                     </a:p>
                   </a:txBody>
                   <a:tcPr marL="91440" marR="91440" marT="45720" marB="45720" anchor="ctr">
-                    <a:lnL w="6350" cap="flat" cmpd="sng" algn="ctr">
+                    <a:lnL w="9525" cap="flat" cmpd="sng" algn="ctr">
                       <a:solidFill>
                         <a:srgbClr val="E3E1DB"/>
                       </a:solidFill>
@@ -2846,7 +1778,7 @@
                       <a:headEnd type="none" w="med" len="med"/>
                       <a:tailEnd type="none" w="med" len="med"/>
                     </a:lnL>
-                    <a:lnR w="6350" cap="flat" cmpd="sng" algn="ctr">
+                    <a:lnR w="9525" cap="flat" cmpd="sng" algn="ctr">
                       <a:solidFill>
                         <a:srgbClr val="E3E1DB"/>
                       </a:solidFill>
@@ -2855,7 +1787,7 @@
                       <a:headEnd type="none" w="med" len="med"/>
                       <a:tailEnd type="none" w="med" len="med"/>
                     </a:lnR>
-                    <a:lnT w="6350" cap="flat" cmpd="sng" algn="ctr">
+                    <a:lnT w="9525" cap="flat" cmpd="sng" algn="ctr">
                       <a:solidFill>
                         <a:srgbClr val="E3E1DB"/>
                       </a:solidFill>
@@ -2864,7 +1796,7 @@
                       <a:headEnd type="none" w="med" len="med"/>
                       <a:tailEnd type="none" w="med" len="med"/>
                     </a:lnT>
-                    <a:lnB w="6350" cap="flat" cmpd="sng" algn="ctr">
+                    <a:lnB w="9525" cap="flat" cmpd="sng" algn="ctr">
                       <a:solidFill>
                         <a:srgbClr val="E3E1DB"/>
                       </a:solidFill>
@@ -2879,7 +1811,7 @@
                   </a:tcPr>
                 </a:tc>
               </a:tr>
-              <a:tr h="169164">
+              <a:tr h="548640">
                 <a:tc>
                   <a:txBody>
                     <a:bodyPr/>
@@ -2889,7 +1821,7 @@
                         <a:buNone/>
                       </a:pPr>
                       <a:r>
-                        <a:rPr lang="en-US" sz="1050" b="1" dirty="0">
+                        <a:rPr lang="en-US" sz="1200" b="1" dirty="0">
                           <a:solidFill>
                             <a:srgbClr val="21295C"/>
                           </a:solidFill>
@@ -2897,9 +1829,9 @@
                           <a:ea typeface="Calibri" pitchFamily="34" charset="-122"/>
                           <a:cs typeface="Calibri" pitchFamily="34" charset="-120"/>
                         </a:rPr>
-                        <a:t>起床時コンディション</a:t>
+                        <a:t>① スムージー vs 固形</a:t>
                       </a:r>
-                      <a:endParaRPr lang="en-US" sz="1050" dirty="0">
+                      <a:endParaRPr lang="en-US" sz="1200" dirty="0">
                         <a:latin typeface="Calibri" charset="0"/>
                         <a:ea typeface="Calibri" charset="0"/>
                         <a:cs typeface="Calibri" charset="0"/>
@@ -2907,7 +1839,7 @@
                     </a:p>
                   </a:txBody>
                   <a:tcPr marL="91440" marR="91440" marT="45720" marB="45720" anchor="ctr">
-                    <a:lnL w="6350" cap="flat" cmpd="sng" algn="ctr">
+                    <a:lnL w="9525" cap="flat" cmpd="sng" algn="ctr">
                       <a:solidFill>
                         <a:srgbClr val="E3E1DB"/>
                       </a:solidFill>
@@ -2916,7 +1848,7 @@
                       <a:headEnd type="none" w="med" len="med"/>
                       <a:tailEnd type="none" w="med" len="med"/>
                     </a:lnL>
-                    <a:lnR w="6350" cap="flat" cmpd="sng" algn="ctr">
+                    <a:lnR w="9525" cap="flat" cmpd="sng" algn="ctr">
                       <a:solidFill>
                         <a:srgbClr val="E3E1DB"/>
                       </a:solidFill>
@@ -2925,7 +1857,7 @@
                       <a:headEnd type="none" w="med" len="med"/>
                       <a:tailEnd type="none" w="med" len="med"/>
                     </a:lnR>
-                    <a:lnT w="6350" cap="flat" cmpd="sng" algn="ctr">
+                    <a:lnT w="9525" cap="flat" cmpd="sng" algn="ctr">
                       <a:solidFill>
                         <a:srgbClr val="E3E1DB"/>
                       </a:solidFill>
@@ -2934,7 +1866,213 @@
                       <a:headEnd type="none" w="med" len="med"/>
                       <a:tailEnd type="none" w="med" len="med"/>
                     </a:lnT>
-                    <a:lnB w="6350" cap="flat" cmpd="sng" algn="ctr">
+                    <a:lnB w="9525" cap="flat" cmpd="sng" algn="ctr">
+                      <a:solidFill>
+                        <a:srgbClr val="E3E1DB"/>
+                      </a:solidFill>
+                      <a:prstDash val="solid"/>
+                      <a:round/>
+                      <a:headEnd type="none" w="med" len="med"/>
+                      <a:tailEnd type="none" w="med" len="med"/>
+                    </a:lnB>
+                    <a:solidFill>
+                      <a:srgbClr val="FFFFFF"/>
+                    </a:solidFill>
+                  </a:tcPr>
+                </a:tc>
+                <a:tc>
+                  <a:txBody>
+                    <a:bodyPr/>
+                    <a:lstStyle/>
+                    <a:p>
+                      <a:pPr indent="0" marL="0">
+                        <a:buNone/>
+                      </a:pPr>
+                      <a:r>
+                        <a:rPr lang="en-US" sz="1200" dirty="0">
+                          <a:solidFill>
+                            <a:srgbClr val="1A1A1A"/>
+                          </a:solidFill>
+                          <a:latin typeface="Calibri" pitchFamily="34" charset="0"/>
+                          <a:ea typeface="Calibri" pitchFamily="34" charset="-122"/>
+                          <a:cs typeface="Calibri" pitchFamily="34" charset="-120"/>
+                        </a:rPr>
+                        <a:t>スムージー(DAY4〜6)はDAY4・5がシフト前、DAY6のみシフト後。3日平均がDAY6の異常値に引っ張られている可能性</a:t>
+                      </a:r>
+                      <a:endParaRPr lang="en-US" sz="1200" dirty="0">
+                        <a:latin typeface="Calibri" charset="0"/>
+                        <a:ea typeface="Calibri" charset="0"/>
+                        <a:cs typeface="Calibri" charset="0"/>
+                      </a:endParaRPr>
+                    </a:p>
+                  </a:txBody>
+                  <a:tcPr marL="91440" marR="91440" marT="45720" marB="45720" anchor="ctr">
+                    <a:lnL w="9525" cap="flat" cmpd="sng" algn="ctr">
+                      <a:solidFill>
+                        <a:srgbClr val="E3E1DB"/>
+                      </a:solidFill>
+                      <a:prstDash val="solid"/>
+                      <a:round/>
+                      <a:headEnd type="none" w="med" len="med"/>
+                      <a:tailEnd type="none" w="med" len="med"/>
+                    </a:lnL>
+                    <a:lnR w="9525" cap="flat" cmpd="sng" algn="ctr">
+                      <a:solidFill>
+                        <a:srgbClr val="E3E1DB"/>
+                      </a:solidFill>
+                      <a:prstDash val="solid"/>
+                      <a:round/>
+                      <a:headEnd type="none" w="med" len="med"/>
+                      <a:tailEnd type="none" w="med" len="med"/>
+                    </a:lnR>
+                    <a:lnT w="9525" cap="flat" cmpd="sng" algn="ctr">
+                      <a:solidFill>
+                        <a:srgbClr val="E3E1DB"/>
+                      </a:solidFill>
+                      <a:prstDash val="solid"/>
+                      <a:round/>
+                      <a:headEnd type="none" w="med" len="med"/>
+                      <a:tailEnd type="none" w="med" len="med"/>
+                    </a:lnT>
+                    <a:lnB w="9525" cap="flat" cmpd="sng" algn="ctr">
+                      <a:solidFill>
+                        <a:srgbClr val="E3E1DB"/>
+                      </a:solidFill>
+                      <a:prstDash val="solid"/>
+                      <a:round/>
+                      <a:headEnd type="none" w="med" len="med"/>
+                      <a:tailEnd type="none" w="med" len="med"/>
+                    </a:lnB>
+                    <a:solidFill>
+                      <a:srgbClr val="FFFFFF"/>
+                    </a:solidFill>
+                  </a:tcPr>
+                </a:tc>
+                <a:tc>
+                  <a:txBody>
+                    <a:bodyPr/>
+                    <a:lstStyle/>
+                    <a:p>
+                      <a:pPr indent="0" marL="0">
+                        <a:buNone/>
+                      </a:pPr>
+                      <a:r>
+                        <a:rPr lang="en-US" sz="1200" b="1" dirty="0">
+                          <a:solidFill>
+                            <a:srgbClr val="6B4B00"/>
+                          </a:solidFill>
+                          <a:latin typeface="Calibri" pitchFamily="34" charset="0"/>
+                          <a:ea typeface="Calibri" pitchFamily="34" charset="-122"/>
+                          <a:cs typeface="Calibri" pitchFamily="34" charset="-120"/>
+                        </a:rPr>
+                        <a:t>⚠ 要注意</a:t>
+                      </a:r>
+                      <a:endParaRPr lang="en-US" sz="1200" dirty="0">
+                        <a:latin typeface="Calibri" charset="0"/>
+                        <a:ea typeface="Calibri" charset="0"/>
+                        <a:cs typeface="Calibri" charset="0"/>
+                      </a:endParaRPr>
+                    </a:p>
+                  </a:txBody>
+                  <a:tcPr marL="91440" marR="91440" marT="45720" marB="45720" anchor="ctr">
+                    <a:lnL w="9525" cap="flat" cmpd="sng" algn="ctr">
+                      <a:solidFill>
+                        <a:srgbClr val="E3E1DB"/>
+                      </a:solidFill>
+                      <a:prstDash val="solid"/>
+                      <a:round/>
+                      <a:headEnd type="none" w="med" len="med"/>
+                      <a:tailEnd type="none" w="med" len="med"/>
+                    </a:lnL>
+                    <a:lnR w="9525" cap="flat" cmpd="sng" algn="ctr">
+                      <a:solidFill>
+                        <a:srgbClr val="E3E1DB"/>
+                      </a:solidFill>
+                      <a:prstDash val="solid"/>
+                      <a:round/>
+                      <a:headEnd type="none" w="med" len="med"/>
+                      <a:tailEnd type="none" w="med" len="med"/>
+                    </a:lnR>
+                    <a:lnT w="9525" cap="flat" cmpd="sng" algn="ctr">
+                      <a:solidFill>
+                        <a:srgbClr val="E3E1DB"/>
+                      </a:solidFill>
+                      <a:prstDash val="solid"/>
+                      <a:round/>
+                      <a:headEnd type="none" w="med" len="med"/>
+                      <a:tailEnd type="none" w="med" len="med"/>
+                    </a:lnT>
+                    <a:lnB w="9525" cap="flat" cmpd="sng" algn="ctr">
+                      <a:solidFill>
+                        <a:srgbClr val="E3E1DB"/>
+                      </a:solidFill>
+                      <a:prstDash val="solid"/>
+                      <a:round/>
+                      <a:headEnd type="none" w="med" len="med"/>
+                      <a:tailEnd type="none" w="med" len="med"/>
+                    </a:lnB>
+                    <a:solidFill>
+                      <a:srgbClr val="FFFFFF"/>
+                    </a:solidFill>
+                  </a:tcPr>
+                </a:tc>
+              </a:tr>
+              <a:tr h="548640">
+                <a:tc>
+                  <a:txBody>
+                    <a:bodyPr/>
+                    <a:lstStyle/>
+                    <a:p>
+                      <a:pPr indent="0" marL="0">
+                        <a:buNone/>
+                      </a:pPr>
+                      <a:r>
+                        <a:rPr lang="en-US" sz="1200" b="1" dirty="0">
+                          <a:solidFill>
+                            <a:srgbClr val="21295C"/>
+                          </a:solidFill>
+                          <a:latin typeface="Calibri" pitchFamily="34" charset="0"/>
+                          <a:ea typeface="Calibri" pitchFamily="34" charset="-122"/>
+                          <a:cs typeface="Calibri" pitchFamily="34" charset="-120"/>
+                        </a:rPr>
+                        <a:t>② スムージー vs おにぎり＋スムージー</a:t>
+                      </a:r>
+                      <a:endParaRPr lang="en-US" sz="1200" dirty="0">
+                        <a:latin typeface="Calibri" charset="0"/>
+                        <a:ea typeface="Calibri" charset="0"/>
+                        <a:cs typeface="Calibri" charset="0"/>
+                      </a:endParaRPr>
+                    </a:p>
+                  </a:txBody>
+                  <a:tcPr marL="91440" marR="91440" marT="45720" marB="45720" anchor="ctr">
+                    <a:lnL w="9525" cap="flat" cmpd="sng" algn="ctr">
+                      <a:solidFill>
+                        <a:srgbClr val="E3E1DB"/>
+                      </a:solidFill>
+                      <a:prstDash val="solid"/>
+                      <a:round/>
+                      <a:headEnd type="none" w="med" len="med"/>
+                      <a:tailEnd type="none" w="med" len="med"/>
+                    </a:lnL>
+                    <a:lnR w="9525" cap="flat" cmpd="sng" algn="ctr">
+                      <a:solidFill>
+                        <a:srgbClr val="E3E1DB"/>
+                      </a:solidFill>
+                      <a:prstDash val="solid"/>
+                      <a:round/>
+                      <a:headEnd type="none" w="med" len="med"/>
+                      <a:tailEnd type="none" w="med" len="med"/>
+                    </a:lnR>
+                    <a:lnT w="9525" cap="flat" cmpd="sng" algn="ctr">
+                      <a:solidFill>
+                        <a:srgbClr val="E3E1DB"/>
+                      </a:solidFill>
+                      <a:prstDash val="solid"/>
+                      <a:round/>
+                      <a:headEnd type="none" w="med" len="med"/>
+                      <a:tailEnd type="none" w="med" len="med"/>
+                    </a:lnT>
+                    <a:lnB w="9525" cap="flat" cmpd="sng" algn="ctr">
                       <a:solidFill>
                         <a:srgbClr val="E3E1DB"/>
                       </a:solidFill>
@@ -2957,7 +2095,7 @@
                         <a:buNone/>
                       </a:pPr>
                       <a:r>
-                        <a:rPr lang="en-US" sz="1050" dirty="0">
+                        <a:rPr lang="en-US" sz="1200" dirty="0">
                           <a:solidFill>
                             <a:srgbClr val="1A1A1A"/>
                           </a:solidFill>
@@ -2965,9 +2103,9 @@
                           <a:ea typeface="Calibri" pitchFamily="34" charset="-122"/>
                           <a:cs typeface="Calibri" pitchFamily="34" charset="-120"/>
                         </a:rPr>
-                        <a:t>2.33</a:t>
+                        <a:t>スムージー側はシフト前後が混在。おにぎり＋スムージー(DAY8〜10)は完全にシフト後</a:t>
                       </a:r>
-                      <a:endParaRPr lang="en-US" sz="1050" dirty="0">
+                      <a:endParaRPr lang="en-US" sz="1200" dirty="0">
                         <a:latin typeface="Calibri" charset="0"/>
                         <a:ea typeface="Calibri" charset="0"/>
                         <a:cs typeface="Calibri" charset="0"/>
@@ -2975,7 +2113,7 @@
                     </a:p>
                   </a:txBody>
                   <a:tcPr marL="91440" marR="91440" marT="45720" marB="45720" anchor="ctr">
-                    <a:lnL w="6350" cap="flat" cmpd="sng" algn="ctr">
+                    <a:lnL w="9525" cap="flat" cmpd="sng" algn="ctr">
                       <a:solidFill>
                         <a:srgbClr val="E3E1DB"/>
                       </a:solidFill>
@@ -2984,7 +2122,7 @@
                       <a:headEnd type="none" w="med" len="med"/>
                       <a:tailEnd type="none" w="med" len="med"/>
                     </a:lnL>
-                    <a:lnR w="6350" cap="flat" cmpd="sng" algn="ctr">
+                    <a:lnR w="9525" cap="flat" cmpd="sng" algn="ctr">
                       <a:solidFill>
                         <a:srgbClr val="E3E1DB"/>
                       </a:solidFill>
@@ -2993,7 +2131,7 @@
                       <a:headEnd type="none" w="med" len="med"/>
                       <a:tailEnd type="none" w="med" len="med"/>
                     </a:lnR>
-                    <a:lnT w="6350" cap="flat" cmpd="sng" algn="ctr">
+                    <a:lnT w="9525" cap="flat" cmpd="sng" algn="ctr">
                       <a:solidFill>
                         <a:srgbClr val="E3E1DB"/>
                       </a:solidFill>
@@ -3002,7 +2140,7 @@
                       <a:headEnd type="none" w="med" len="med"/>
                       <a:tailEnd type="none" w="med" len="med"/>
                     </a:lnT>
-                    <a:lnB w="6350" cap="flat" cmpd="sng" algn="ctr">
+                    <a:lnB w="9525" cap="flat" cmpd="sng" algn="ctr">
                       <a:solidFill>
                         <a:srgbClr val="E3E1DB"/>
                       </a:solidFill>
@@ -3025,17 +2163,17 @@
                         <a:buNone/>
                       </a:pPr>
                       <a:r>
-                        <a:rPr lang="en-US" sz="1050" dirty="0">
+                        <a:rPr lang="en-US" sz="1200" b="1" dirty="0">
                           <a:solidFill>
-                            <a:srgbClr val="1A1A1A"/>
+                            <a:srgbClr val="6B4B00"/>
                           </a:solidFill>
                           <a:latin typeface="Calibri" pitchFamily="34" charset="0"/>
                           <a:ea typeface="Calibri" pitchFamily="34" charset="-122"/>
                           <a:cs typeface="Calibri" pitchFamily="34" charset="-120"/>
                         </a:rPr>
-                        <a:t>2.00</a:t>
+                        <a:t>⚠ 要注意</a:t>
                       </a:r>
-                      <a:endParaRPr lang="en-US" sz="1050" dirty="0">
+                      <a:endParaRPr lang="en-US" sz="1200" dirty="0">
                         <a:latin typeface="Calibri" charset="0"/>
                         <a:ea typeface="Calibri" charset="0"/>
                         <a:cs typeface="Calibri" charset="0"/>
@@ -3043,7 +2181,7 @@
                     </a:p>
                   </a:txBody>
                   <a:tcPr marL="91440" marR="91440" marT="45720" marB="45720" anchor="ctr">
-                    <a:lnL w="6350" cap="flat" cmpd="sng" algn="ctr">
+                    <a:lnL w="9525" cap="flat" cmpd="sng" algn="ctr">
                       <a:solidFill>
                         <a:srgbClr val="E3E1DB"/>
                       </a:solidFill>
@@ -3052,7 +2190,7 @@
                       <a:headEnd type="none" w="med" len="med"/>
                       <a:tailEnd type="none" w="med" len="med"/>
                     </a:lnL>
-                    <a:lnR w="6350" cap="flat" cmpd="sng" algn="ctr">
+                    <a:lnR w="9525" cap="flat" cmpd="sng" algn="ctr">
                       <a:solidFill>
                         <a:srgbClr val="E3E1DB"/>
                       </a:solidFill>
@@ -3061,7 +2199,7 @@
                       <a:headEnd type="none" w="med" len="med"/>
                       <a:tailEnd type="none" w="med" len="med"/>
                     </a:lnR>
-                    <a:lnT w="6350" cap="flat" cmpd="sng" algn="ctr">
+                    <a:lnT w="9525" cap="flat" cmpd="sng" algn="ctr">
                       <a:solidFill>
                         <a:srgbClr val="E3E1DB"/>
                       </a:solidFill>
@@ -3070,7 +2208,7 @@
                       <a:headEnd type="none" w="med" len="med"/>
                       <a:tailEnd type="none" w="med" len="med"/>
                     </a:lnT>
-                    <a:lnB w="6350" cap="flat" cmpd="sng" algn="ctr">
+                    <a:lnB w="9525" cap="flat" cmpd="sng" algn="ctr">
                       <a:solidFill>
                         <a:srgbClr val="E3E1DB"/>
                       </a:solidFill>
@@ -3085,7 +2223,7 @@
                   </a:tcPr>
                 </a:tc>
               </a:tr>
-              <a:tr h="169164">
+              <a:tr h="548640">
                 <a:tc>
                   <a:txBody>
                     <a:bodyPr/>
@@ -3095,7 +2233,7 @@
                         <a:buNone/>
                       </a:pPr>
                       <a:r>
-                        <a:rPr lang="en-US" sz="1050" b="1" dirty="0">
+                        <a:rPr lang="en-US" sz="1200" b="1" dirty="0">
                           <a:solidFill>
                             <a:srgbClr val="21295C"/>
                           </a:solidFill>
@@ -3103,9 +2241,9 @@
                           <a:ea typeface="Calibri" pitchFamily="34" charset="-122"/>
                           <a:cs typeface="Calibri" pitchFamily="34" charset="-120"/>
                         </a:rPr>
-                        <a:t>睡眠の質</a:t>
+                        <a:t>③ おにぎり＋スムージー vs 糖質減</a:t>
                       </a:r>
-                      <a:endParaRPr lang="en-US" sz="1050" dirty="0">
+                      <a:endParaRPr lang="en-US" sz="1200" dirty="0">
                         <a:latin typeface="Calibri" charset="0"/>
                         <a:ea typeface="Calibri" charset="0"/>
                         <a:cs typeface="Calibri" charset="0"/>
@@ -3113,7 +2251,7 @@
                     </a:p>
                   </a:txBody>
                   <a:tcPr marL="91440" marR="91440" marT="45720" marB="45720" anchor="ctr">
-                    <a:lnL w="6350" cap="flat" cmpd="sng" algn="ctr">
+                    <a:lnL w="9525" cap="flat" cmpd="sng" algn="ctr">
                       <a:solidFill>
                         <a:srgbClr val="E3E1DB"/>
                       </a:solidFill>
@@ -3122,7 +2260,7 @@
                       <a:headEnd type="none" w="med" len="med"/>
                       <a:tailEnd type="none" w="med" len="med"/>
                     </a:lnL>
-                    <a:lnR w="6350" cap="flat" cmpd="sng" algn="ctr">
+                    <a:lnR w="9525" cap="flat" cmpd="sng" algn="ctr">
                       <a:solidFill>
                         <a:srgbClr val="E3E1DB"/>
                       </a:solidFill>
@@ -3131,7 +2269,7 @@
                       <a:headEnd type="none" w="med" len="med"/>
                       <a:tailEnd type="none" w="med" len="med"/>
                     </a:lnR>
-                    <a:lnT w="6350" cap="flat" cmpd="sng" algn="ctr">
+                    <a:lnT w="9525" cap="flat" cmpd="sng" algn="ctr">
                       <a:solidFill>
                         <a:srgbClr val="E3E1DB"/>
                       </a:solidFill>
@@ -3140,7 +2278,7 @@
                       <a:headEnd type="none" w="med" len="med"/>
                       <a:tailEnd type="none" w="med" len="med"/>
                     </a:lnT>
-                    <a:lnB w="6350" cap="flat" cmpd="sng" algn="ctr">
+                    <a:lnB w="9525" cap="flat" cmpd="sng" algn="ctr">
                       <a:solidFill>
                         <a:srgbClr val="E3E1DB"/>
                       </a:solidFill>
@@ -3163,7 +2301,7 @@
                         <a:buNone/>
                       </a:pPr>
                       <a:r>
-                        <a:rPr lang="en-US" sz="1050" dirty="0">
+                        <a:rPr lang="en-US" sz="1200" dirty="0">
                           <a:solidFill>
                             <a:srgbClr val="1A1A1A"/>
                           </a:solidFill>
@@ -3171,9 +2309,9 @@
                           <a:ea typeface="Calibri" pitchFamily="34" charset="-122"/>
                           <a:cs typeface="Calibri" pitchFamily="34" charset="-120"/>
                         </a:rPr>
-                        <a:t>2.00</a:t>
+                        <a:t>両条件(DAY8〜13)とも完全にシフト後で条件が揃っている</a:t>
                       </a:r>
-                      <a:endParaRPr lang="en-US" sz="1050" dirty="0">
+                      <a:endParaRPr lang="en-US" sz="1200" dirty="0">
                         <a:latin typeface="Calibri" charset="0"/>
                         <a:ea typeface="Calibri" charset="0"/>
                         <a:cs typeface="Calibri" charset="0"/>
@@ -3181,7 +2319,7 @@
                     </a:p>
                   </a:txBody>
                   <a:tcPr marL="91440" marR="91440" marT="45720" marB="45720" anchor="ctr">
-                    <a:lnL w="6350" cap="flat" cmpd="sng" algn="ctr">
+                    <a:lnL w="9525" cap="flat" cmpd="sng" algn="ctr">
                       <a:solidFill>
                         <a:srgbClr val="E3E1DB"/>
                       </a:solidFill>
@@ -3190,7 +2328,7 @@
                       <a:headEnd type="none" w="med" len="med"/>
                       <a:tailEnd type="none" w="med" len="med"/>
                     </a:lnL>
-                    <a:lnR w="6350" cap="flat" cmpd="sng" algn="ctr">
+                    <a:lnR w="9525" cap="flat" cmpd="sng" algn="ctr">
                       <a:solidFill>
                         <a:srgbClr val="E3E1DB"/>
                       </a:solidFill>
@@ -3199,7 +2337,7 @@
                       <a:headEnd type="none" w="med" len="med"/>
                       <a:tailEnd type="none" w="med" len="med"/>
                     </a:lnR>
-                    <a:lnT w="6350" cap="flat" cmpd="sng" algn="ctr">
+                    <a:lnT w="9525" cap="flat" cmpd="sng" algn="ctr">
                       <a:solidFill>
                         <a:srgbClr val="E3E1DB"/>
                       </a:solidFill>
@@ -3208,7 +2346,7 @@
                       <a:headEnd type="none" w="med" len="med"/>
                       <a:tailEnd type="none" w="med" len="med"/>
                     </a:lnT>
-                    <a:lnB w="6350" cap="flat" cmpd="sng" algn="ctr">
+                    <a:lnB w="9525" cap="flat" cmpd="sng" algn="ctr">
                       <a:solidFill>
                         <a:srgbClr val="E3E1DB"/>
                       </a:solidFill>
@@ -3231,17 +2369,17 @@
                         <a:buNone/>
                       </a:pPr>
                       <a:r>
-                        <a:rPr lang="en-US" sz="1050" dirty="0">
+                        <a:rPr lang="en-US" sz="1200" b="1" dirty="0">
                           <a:solidFill>
-                            <a:srgbClr val="1A1A1A"/>
+                            <a:srgbClr val="0F5C3D"/>
                           </a:solidFill>
                           <a:latin typeface="Calibri" pitchFamily="34" charset="0"/>
                           <a:ea typeface="Calibri" pitchFamily="34" charset="-122"/>
                           <a:cs typeface="Calibri" pitchFamily="34" charset="-120"/>
                         </a:rPr>
-                        <a:t>2.00</a:t>
+                        <a:t>✓ 信頼できる</a:t>
                       </a:r>
-                      <a:endParaRPr lang="en-US" sz="1050" dirty="0">
+                      <a:endParaRPr lang="en-US" sz="1200" dirty="0">
                         <a:latin typeface="Calibri" charset="0"/>
                         <a:ea typeface="Calibri" charset="0"/>
                         <a:cs typeface="Calibri" charset="0"/>
@@ -3249,7 +2387,7 @@
                     </a:p>
                   </a:txBody>
                   <a:tcPr marL="91440" marR="91440" marT="45720" marB="45720" anchor="ctr">
-                    <a:lnL w="6350" cap="flat" cmpd="sng" algn="ctr">
+                    <a:lnL w="9525" cap="flat" cmpd="sng" algn="ctr">
                       <a:solidFill>
                         <a:srgbClr val="E3E1DB"/>
                       </a:solidFill>
@@ -3258,7 +2396,7 @@
                       <a:headEnd type="none" w="med" len="med"/>
                       <a:tailEnd type="none" w="med" len="med"/>
                     </a:lnL>
-                    <a:lnR w="6350" cap="flat" cmpd="sng" algn="ctr">
+                    <a:lnR w="9525" cap="flat" cmpd="sng" algn="ctr">
                       <a:solidFill>
                         <a:srgbClr val="E3E1DB"/>
                       </a:solidFill>
@@ -3267,7 +2405,7 @@
                       <a:headEnd type="none" w="med" len="med"/>
                       <a:tailEnd type="none" w="med" len="med"/>
                     </a:lnR>
-                    <a:lnT w="6350" cap="flat" cmpd="sng" algn="ctr">
+                    <a:lnT w="9525" cap="flat" cmpd="sng" algn="ctr">
                       <a:solidFill>
                         <a:srgbClr val="E3E1DB"/>
                       </a:solidFill>
@@ -3276,831 +2414,7 @@
                       <a:headEnd type="none" w="med" len="med"/>
                       <a:tailEnd type="none" w="med" len="med"/>
                     </a:lnT>
-                    <a:lnB w="6350" cap="flat" cmpd="sng" algn="ctr">
-                      <a:solidFill>
-                        <a:srgbClr val="E3E1DB"/>
-                      </a:solidFill>
-                      <a:prstDash val="solid"/>
-                      <a:round/>
-                      <a:headEnd type="none" w="med" len="med"/>
-                      <a:tailEnd type="none" w="med" len="med"/>
-                    </a:lnB>
-                    <a:solidFill>
-                      <a:srgbClr val="FFFFFF"/>
-                    </a:solidFill>
-                  </a:tcPr>
-                </a:tc>
-              </a:tr>
-              <a:tr h="169164">
-                <a:tc>
-                  <a:txBody>
-                    <a:bodyPr/>
-                    <a:lstStyle/>
-                    <a:p>
-                      <a:pPr indent="0" marL="0">
-                        <a:buNone/>
-                      </a:pPr>
-                      <a:r>
-                        <a:rPr lang="en-US" sz="1050" b="1" dirty="0">
-                          <a:solidFill>
-                            <a:srgbClr val="21295C"/>
-                          </a:solidFill>
-                          <a:latin typeface="Calibri" pitchFamily="34" charset="0"/>
-                          <a:ea typeface="Calibri" pitchFamily="34" charset="-122"/>
-                          <a:cs typeface="Calibri" pitchFamily="34" charset="-120"/>
-                        </a:rPr>
-                        <a:t>RPE</a:t>
-                      </a:r>
-                      <a:endParaRPr lang="en-US" sz="1050" dirty="0">
-                        <a:latin typeface="Calibri" charset="0"/>
-                        <a:ea typeface="Calibri" charset="0"/>
-                        <a:cs typeface="Calibri" charset="0"/>
-                      </a:endParaRPr>
-                    </a:p>
-                  </a:txBody>
-                  <a:tcPr marL="91440" marR="91440" marT="45720" marB="45720" anchor="ctr">
-                    <a:lnL w="6350" cap="flat" cmpd="sng" algn="ctr">
-                      <a:solidFill>
-                        <a:srgbClr val="E3E1DB"/>
-                      </a:solidFill>
-                      <a:prstDash val="solid"/>
-                      <a:round/>
-                      <a:headEnd type="none" w="med" len="med"/>
-                      <a:tailEnd type="none" w="med" len="med"/>
-                    </a:lnL>
-                    <a:lnR w="6350" cap="flat" cmpd="sng" algn="ctr">
-                      <a:solidFill>
-                        <a:srgbClr val="E3E1DB"/>
-                      </a:solidFill>
-                      <a:prstDash val="solid"/>
-                      <a:round/>
-                      <a:headEnd type="none" w="med" len="med"/>
-                      <a:tailEnd type="none" w="med" len="med"/>
-                    </a:lnR>
-                    <a:lnT w="6350" cap="flat" cmpd="sng" algn="ctr">
-                      <a:solidFill>
-                        <a:srgbClr val="E3E1DB"/>
-                      </a:solidFill>
-                      <a:prstDash val="solid"/>
-                      <a:round/>
-                      <a:headEnd type="none" w="med" len="med"/>
-                      <a:tailEnd type="none" w="med" len="med"/>
-                    </a:lnT>
-                    <a:lnB w="6350" cap="flat" cmpd="sng" algn="ctr">
-                      <a:solidFill>
-                        <a:srgbClr val="E3E1DB"/>
-                      </a:solidFill>
-                      <a:prstDash val="solid"/>
-                      <a:round/>
-                      <a:headEnd type="none" w="med" len="med"/>
-                      <a:tailEnd type="none" w="med" len="med"/>
-                    </a:lnB>
-                    <a:solidFill>
-                      <a:srgbClr val="F4F7F9"/>
-                    </a:solidFill>
-                  </a:tcPr>
-                </a:tc>
-                <a:tc>
-                  <a:txBody>
-                    <a:bodyPr/>
-                    <a:lstStyle/>
-                    <a:p>
-                      <a:pPr indent="0" marL="0">
-                        <a:buNone/>
-                      </a:pPr>
-                      <a:r>
-                        <a:rPr lang="en-US" sz="1050" dirty="0">
-                          <a:solidFill>
-                            <a:srgbClr val="1A1A1A"/>
-                          </a:solidFill>
-                          <a:latin typeface="Calibri" pitchFamily="34" charset="0"/>
-                          <a:ea typeface="Calibri" pitchFamily="34" charset="-122"/>
-                          <a:cs typeface="Calibri" pitchFamily="34" charset="-120"/>
-                        </a:rPr>
-                        <a:t>5.67</a:t>
-                      </a:r>
-                      <a:endParaRPr lang="en-US" sz="1050" dirty="0">
-                        <a:latin typeface="Calibri" charset="0"/>
-                        <a:ea typeface="Calibri" charset="0"/>
-                        <a:cs typeface="Calibri" charset="0"/>
-                      </a:endParaRPr>
-                    </a:p>
-                  </a:txBody>
-                  <a:tcPr marL="91440" marR="91440" marT="45720" marB="45720" anchor="ctr">
-                    <a:lnL w="6350" cap="flat" cmpd="sng" algn="ctr">
-                      <a:solidFill>
-                        <a:srgbClr val="E3E1DB"/>
-                      </a:solidFill>
-                      <a:prstDash val="solid"/>
-                      <a:round/>
-                      <a:headEnd type="none" w="med" len="med"/>
-                      <a:tailEnd type="none" w="med" len="med"/>
-                    </a:lnL>
-                    <a:lnR w="6350" cap="flat" cmpd="sng" algn="ctr">
-                      <a:solidFill>
-                        <a:srgbClr val="E3E1DB"/>
-                      </a:solidFill>
-                      <a:prstDash val="solid"/>
-                      <a:round/>
-                      <a:headEnd type="none" w="med" len="med"/>
-                      <a:tailEnd type="none" w="med" len="med"/>
-                    </a:lnR>
-                    <a:lnT w="6350" cap="flat" cmpd="sng" algn="ctr">
-                      <a:solidFill>
-                        <a:srgbClr val="E3E1DB"/>
-                      </a:solidFill>
-                      <a:prstDash val="solid"/>
-                      <a:round/>
-                      <a:headEnd type="none" w="med" len="med"/>
-                      <a:tailEnd type="none" w="med" len="med"/>
-                    </a:lnT>
-                    <a:lnB w="6350" cap="flat" cmpd="sng" algn="ctr">
-                      <a:solidFill>
-                        <a:srgbClr val="E3E1DB"/>
-                      </a:solidFill>
-                      <a:prstDash val="solid"/>
-                      <a:round/>
-                      <a:headEnd type="none" w="med" len="med"/>
-                      <a:tailEnd type="none" w="med" len="med"/>
-                    </a:lnB>
-                    <a:solidFill>
-                      <a:srgbClr val="F4F7F9"/>
-                    </a:solidFill>
-                  </a:tcPr>
-                </a:tc>
-                <a:tc>
-                  <a:txBody>
-                    <a:bodyPr/>
-                    <a:lstStyle/>
-                    <a:p>
-                      <a:pPr indent="0" marL="0">
-                        <a:buNone/>
-                      </a:pPr>
-                      <a:r>
-                        <a:rPr lang="en-US" sz="1050" dirty="0">
-                          <a:solidFill>
-                            <a:srgbClr val="1A1A1A"/>
-                          </a:solidFill>
-                          <a:latin typeface="Calibri" pitchFamily="34" charset="0"/>
-                          <a:ea typeface="Calibri" pitchFamily="34" charset="-122"/>
-                          <a:cs typeface="Calibri" pitchFamily="34" charset="-120"/>
-                        </a:rPr>
-                        <a:t>6.67</a:t>
-                      </a:r>
-                      <a:endParaRPr lang="en-US" sz="1050" dirty="0">
-                        <a:latin typeface="Calibri" charset="0"/>
-                        <a:ea typeface="Calibri" charset="0"/>
-                        <a:cs typeface="Calibri" charset="0"/>
-                      </a:endParaRPr>
-                    </a:p>
-                  </a:txBody>
-                  <a:tcPr marL="91440" marR="91440" marT="45720" marB="45720" anchor="ctr">
-                    <a:lnL w="6350" cap="flat" cmpd="sng" algn="ctr">
-                      <a:solidFill>
-                        <a:srgbClr val="E3E1DB"/>
-                      </a:solidFill>
-                      <a:prstDash val="solid"/>
-                      <a:round/>
-                      <a:headEnd type="none" w="med" len="med"/>
-                      <a:tailEnd type="none" w="med" len="med"/>
-                    </a:lnL>
-                    <a:lnR w="6350" cap="flat" cmpd="sng" algn="ctr">
-                      <a:solidFill>
-                        <a:srgbClr val="E3E1DB"/>
-                      </a:solidFill>
-                      <a:prstDash val="solid"/>
-                      <a:round/>
-                      <a:headEnd type="none" w="med" len="med"/>
-                      <a:tailEnd type="none" w="med" len="med"/>
-                    </a:lnR>
-                    <a:lnT w="6350" cap="flat" cmpd="sng" algn="ctr">
-                      <a:solidFill>
-                        <a:srgbClr val="E3E1DB"/>
-                      </a:solidFill>
-                      <a:prstDash val="solid"/>
-                      <a:round/>
-                      <a:headEnd type="none" w="med" len="med"/>
-                      <a:tailEnd type="none" w="med" len="med"/>
-                    </a:lnT>
-                    <a:lnB w="6350" cap="flat" cmpd="sng" algn="ctr">
-                      <a:solidFill>
-                        <a:srgbClr val="E3E1DB"/>
-                      </a:solidFill>
-                      <a:prstDash val="solid"/>
-                      <a:round/>
-                      <a:headEnd type="none" w="med" len="med"/>
-                      <a:tailEnd type="none" w="med" len="med"/>
-                    </a:lnB>
-                    <a:solidFill>
-                      <a:srgbClr val="F4F7F9"/>
-                    </a:solidFill>
-                  </a:tcPr>
-                </a:tc>
-              </a:tr>
-              <a:tr h="169164">
-                <a:tc>
-                  <a:txBody>
-                    <a:bodyPr/>
-                    <a:lstStyle/>
-                    <a:p>
-                      <a:pPr indent="0" marL="0">
-                        <a:buNone/>
-                      </a:pPr>
-                      <a:r>
-                        <a:rPr lang="en-US" sz="1050" b="1" dirty="0">
-                          <a:solidFill>
-                            <a:srgbClr val="21295C"/>
-                          </a:solidFill>
-                          <a:latin typeface="Calibri" pitchFamily="34" charset="0"/>
-                          <a:ea typeface="Calibri" pitchFamily="34" charset="-122"/>
-                          <a:cs typeface="Calibri" pitchFamily="34" charset="-120"/>
-                        </a:rPr>
-                        <a:t>持久力</a:t>
-                      </a:r>
-                      <a:endParaRPr lang="en-US" sz="1050" dirty="0">
-                        <a:latin typeface="Calibri" charset="0"/>
-                        <a:ea typeface="Calibri" charset="0"/>
-                        <a:cs typeface="Calibri" charset="0"/>
-                      </a:endParaRPr>
-                    </a:p>
-                  </a:txBody>
-                  <a:tcPr marL="91440" marR="91440" marT="45720" marB="45720" anchor="ctr">
-                    <a:lnL w="6350" cap="flat" cmpd="sng" algn="ctr">
-                      <a:solidFill>
-                        <a:srgbClr val="E3E1DB"/>
-                      </a:solidFill>
-                      <a:prstDash val="solid"/>
-                      <a:round/>
-                      <a:headEnd type="none" w="med" len="med"/>
-                      <a:tailEnd type="none" w="med" len="med"/>
-                    </a:lnL>
-                    <a:lnR w="6350" cap="flat" cmpd="sng" algn="ctr">
-                      <a:solidFill>
-                        <a:srgbClr val="E3E1DB"/>
-                      </a:solidFill>
-                      <a:prstDash val="solid"/>
-                      <a:round/>
-                      <a:headEnd type="none" w="med" len="med"/>
-                      <a:tailEnd type="none" w="med" len="med"/>
-                    </a:lnR>
-                    <a:lnT w="6350" cap="flat" cmpd="sng" algn="ctr">
-                      <a:solidFill>
-                        <a:srgbClr val="E3E1DB"/>
-                      </a:solidFill>
-                      <a:prstDash val="solid"/>
-                      <a:round/>
-                      <a:headEnd type="none" w="med" len="med"/>
-                      <a:tailEnd type="none" w="med" len="med"/>
-                    </a:lnT>
-                    <a:lnB w="6350" cap="flat" cmpd="sng" algn="ctr">
-                      <a:solidFill>
-                        <a:srgbClr val="E3E1DB"/>
-                      </a:solidFill>
-                      <a:prstDash val="solid"/>
-                      <a:round/>
-                      <a:headEnd type="none" w="med" len="med"/>
-                      <a:tailEnd type="none" w="med" len="med"/>
-                    </a:lnB>
-                    <a:solidFill>
-                      <a:srgbClr val="FFFFFF"/>
-                    </a:solidFill>
-                  </a:tcPr>
-                </a:tc>
-                <a:tc>
-                  <a:txBody>
-                    <a:bodyPr/>
-                    <a:lstStyle/>
-                    <a:p>
-                      <a:pPr indent="0" marL="0">
-                        <a:buNone/>
-                      </a:pPr>
-                      <a:r>
-                        <a:rPr lang="en-US" sz="1050" dirty="0">
-                          <a:solidFill>
-                            <a:srgbClr val="1A1A1A"/>
-                          </a:solidFill>
-                          <a:latin typeface="Calibri" pitchFamily="34" charset="0"/>
-                          <a:ea typeface="Calibri" pitchFamily="34" charset="-122"/>
-                          <a:cs typeface="Calibri" pitchFamily="34" charset="-120"/>
-                        </a:rPr>
-                        <a:t>3.67</a:t>
-                      </a:r>
-                      <a:endParaRPr lang="en-US" sz="1050" dirty="0">
-                        <a:latin typeface="Calibri" charset="0"/>
-                        <a:ea typeface="Calibri" charset="0"/>
-                        <a:cs typeface="Calibri" charset="0"/>
-                      </a:endParaRPr>
-                    </a:p>
-                  </a:txBody>
-                  <a:tcPr marL="91440" marR="91440" marT="45720" marB="45720" anchor="ctr">
-                    <a:lnL w="6350" cap="flat" cmpd="sng" algn="ctr">
-                      <a:solidFill>
-                        <a:srgbClr val="E3E1DB"/>
-                      </a:solidFill>
-                      <a:prstDash val="solid"/>
-                      <a:round/>
-                      <a:headEnd type="none" w="med" len="med"/>
-                      <a:tailEnd type="none" w="med" len="med"/>
-                    </a:lnL>
-                    <a:lnR w="6350" cap="flat" cmpd="sng" algn="ctr">
-                      <a:solidFill>
-                        <a:srgbClr val="E3E1DB"/>
-                      </a:solidFill>
-                      <a:prstDash val="solid"/>
-                      <a:round/>
-                      <a:headEnd type="none" w="med" len="med"/>
-                      <a:tailEnd type="none" w="med" len="med"/>
-                    </a:lnR>
-                    <a:lnT w="6350" cap="flat" cmpd="sng" algn="ctr">
-                      <a:solidFill>
-                        <a:srgbClr val="E3E1DB"/>
-                      </a:solidFill>
-                      <a:prstDash val="solid"/>
-                      <a:round/>
-                      <a:headEnd type="none" w="med" len="med"/>
-                      <a:tailEnd type="none" w="med" len="med"/>
-                    </a:lnT>
-                    <a:lnB w="6350" cap="flat" cmpd="sng" algn="ctr">
-                      <a:solidFill>
-                        <a:srgbClr val="E3E1DB"/>
-                      </a:solidFill>
-                      <a:prstDash val="solid"/>
-                      <a:round/>
-                      <a:headEnd type="none" w="med" len="med"/>
-                      <a:tailEnd type="none" w="med" len="med"/>
-                    </a:lnB>
-                    <a:solidFill>
-                      <a:srgbClr val="FFFFFF"/>
-                    </a:solidFill>
-                  </a:tcPr>
-                </a:tc>
-                <a:tc>
-                  <a:txBody>
-                    <a:bodyPr/>
-                    <a:lstStyle/>
-                    <a:p>
-                      <a:pPr indent="0" marL="0">
-                        <a:buNone/>
-                      </a:pPr>
-                      <a:r>
-                        <a:rPr lang="en-US" sz="1050" dirty="0">
-                          <a:solidFill>
-                            <a:srgbClr val="1A1A1A"/>
-                          </a:solidFill>
-                          <a:latin typeface="Calibri" pitchFamily="34" charset="0"/>
-                          <a:ea typeface="Calibri" pitchFamily="34" charset="-122"/>
-                          <a:cs typeface="Calibri" pitchFamily="34" charset="-120"/>
-                        </a:rPr>
-                        <a:t>3.00</a:t>
-                      </a:r>
-                      <a:endParaRPr lang="en-US" sz="1050" dirty="0">
-                        <a:latin typeface="Calibri" charset="0"/>
-                        <a:ea typeface="Calibri" charset="0"/>
-                        <a:cs typeface="Calibri" charset="0"/>
-                      </a:endParaRPr>
-                    </a:p>
-                  </a:txBody>
-                  <a:tcPr marL="91440" marR="91440" marT="45720" marB="45720" anchor="ctr">
-                    <a:lnL w="6350" cap="flat" cmpd="sng" algn="ctr">
-                      <a:solidFill>
-                        <a:srgbClr val="E3E1DB"/>
-                      </a:solidFill>
-                      <a:prstDash val="solid"/>
-                      <a:round/>
-                      <a:headEnd type="none" w="med" len="med"/>
-                      <a:tailEnd type="none" w="med" len="med"/>
-                    </a:lnL>
-                    <a:lnR w="6350" cap="flat" cmpd="sng" algn="ctr">
-                      <a:solidFill>
-                        <a:srgbClr val="E3E1DB"/>
-                      </a:solidFill>
-                      <a:prstDash val="solid"/>
-                      <a:round/>
-                      <a:headEnd type="none" w="med" len="med"/>
-                      <a:tailEnd type="none" w="med" len="med"/>
-                    </a:lnR>
-                    <a:lnT w="6350" cap="flat" cmpd="sng" algn="ctr">
-                      <a:solidFill>
-                        <a:srgbClr val="E3E1DB"/>
-                      </a:solidFill>
-                      <a:prstDash val="solid"/>
-                      <a:round/>
-                      <a:headEnd type="none" w="med" len="med"/>
-                      <a:tailEnd type="none" w="med" len="med"/>
-                    </a:lnT>
-                    <a:lnB w="6350" cap="flat" cmpd="sng" algn="ctr">
-                      <a:solidFill>
-                        <a:srgbClr val="E3E1DB"/>
-                      </a:solidFill>
-                      <a:prstDash val="solid"/>
-                      <a:round/>
-                      <a:headEnd type="none" w="med" len="med"/>
-                      <a:tailEnd type="none" w="med" len="med"/>
-                    </a:lnB>
-                    <a:solidFill>
-                      <a:srgbClr val="FFFFFF"/>
-                    </a:solidFill>
-                  </a:tcPr>
-                </a:tc>
-              </a:tr>
-              <a:tr h="169164">
-                <a:tc>
-                  <a:txBody>
-                    <a:bodyPr/>
-                    <a:lstStyle/>
-                    <a:p>
-                      <a:pPr indent="0" marL="0">
-                        <a:buNone/>
-                      </a:pPr>
-                      <a:r>
-                        <a:rPr lang="en-US" sz="1050" b="1" dirty="0">
-                          <a:solidFill>
-                            <a:srgbClr val="21295C"/>
-                          </a:solidFill>
-                          <a:latin typeface="Calibri" pitchFamily="34" charset="0"/>
-                          <a:ea typeface="Calibri" pitchFamily="34" charset="-122"/>
-                          <a:cs typeface="Calibri" pitchFamily="34" charset="-120"/>
-                        </a:rPr>
-                        <a:t>爆発力</a:t>
-                      </a:r>
-                      <a:endParaRPr lang="en-US" sz="1050" dirty="0">
-                        <a:latin typeface="Calibri" charset="0"/>
-                        <a:ea typeface="Calibri" charset="0"/>
-                        <a:cs typeface="Calibri" charset="0"/>
-                      </a:endParaRPr>
-                    </a:p>
-                  </a:txBody>
-                  <a:tcPr marL="91440" marR="91440" marT="45720" marB="45720" anchor="ctr">
-                    <a:lnL w="6350" cap="flat" cmpd="sng" algn="ctr">
-                      <a:solidFill>
-                        <a:srgbClr val="E3E1DB"/>
-                      </a:solidFill>
-                      <a:prstDash val="solid"/>
-                      <a:round/>
-                      <a:headEnd type="none" w="med" len="med"/>
-                      <a:tailEnd type="none" w="med" len="med"/>
-                    </a:lnL>
-                    <a:lnR w="6350" cap="flat" cmpd="sng" algn="ctr">
-                      <a:solidFill>
-                        <a:srgbClr val="E3E1DB"/>
-                      </a:solidFill>
-                      <a:prstDash val="solid"/>
-                      <a:round/>
-                      <a:headEnd type="none" w="med" len="med"/>
-                      <a:tailEnd type="none" w="med" len="med"/>
-                    </a:lnR>
-                    <a:lnT w="6350" cap="flat" cmpd="sng" algn="ctr">
-                      <a:solidFill>
-                        <a:srgbClr val="E3E1DB"/>
-                      </a:solidFill>
-                      <a:prstDash val="solid"/>
-                      <a:round/>
-                      <a:headEnd type="none" w="med" len="med"/>
-                      <a:tailEnd type="none" w="med" len="med"/>
-                    </a:lnT>
-                    <a:lnB w="6350" cap="flat" cmpd="sng" algn="ctr">
-                      <a:solidFill>
-                        <a:srgbClr val="E3E1DB"/>
-                      </a:solidFill>
-                      <a:prstDash val="solid"/>
-                      <a:round/>
-                      <a:headEnd type="none" w="med" len="med"/>
-                      <a:tailEnd type="none" w="med" len="med"/>
-                    </a:lnB>
-                    <a:solidFill>
-                      <a:srgbClr val="F4F7F9"/>
-                    </a:solidFill>
-                  </a:tcPr>
-                </a:tc>
-                <a:tc>
-                  <a:txBody>
-                    <a:bodyPr/>
-                    <a:lstStyle/>
-                    <a:p>
-                      <a:pPr indent="0" marL="0">
-                        <a:buNone/>
-                      </a:pPr>
-                      <a:r>
-                        <a:rPr lang="en-US" sz="1050" dirty="0">
-                          <a:solidFill>
-                            <a:srgbClr val="1A1A1A"/>
-                          </a:solidFill>
-                          <a:latin typeface="Calibri" pitchFamily="34" charset="0"/>
-                          <a:ea typeface="Calibri" pitchFamily="34" charset="-122"/>
-                          <a:cs typeface="Calibri" pitchFamily="34" charset="-120"/>
-                        </a:rPr>
-                        <a:t>3.67</a:t>
-                      </a:r>
-                      <a:endParaRPr lang="en-US" sz="1050" dirty="0">
-                        <a:latin typeface="Calibri" charset="0"/>
-                        <a:ea typeface="Calibri" charset="0"/>
-                        <a:cs typeface="Calibri" charset="0"/>
-                      </a:endParaRPr>
-                    </a:p>
-                  </a:txBody>
-                  <a:tcPr marL="91440" marR="91440" marT="45720" marB="45720" anchor="ctr">
-                    <a:lnL w="6350" cap="flat" cmpd="sng" algn="ctr">
-                      <a:solidFill>
-                        <a:srgbClr val="E3E1DB"/>
-                      </a:solidFill>
-                      <a:prstDash val="solid"/>
-                      <a:round/>
-                      <a:headEnd type="none" w="med" len="med"/>
-                      <a:tailEnd type="none" w="med" len="med"/>
-                    </a:lnL>
-                    <a:lnR w="6350" cap="flat" cmpd="sng" algn="ctr">
-                      <a:solidFill>
-                        <a:srgbClr val="E3E1DB"/>
-                      </a:solidFill>
-                      <a:prstDash val="solid"/>
-                      <a:round/>
-                      <a:headEnd type="none" w="med" len="med"/>
-                      <a:tailEnd type="none" w="med" len="med"/>
-                    </a:lnR>
-                    <a:lnT w="6350" cap="flat" cmpd="sng" algn="ctr">
-                      <a:solidFill>
-                        <a:srgbClr val="E3E1DB"/>
-                      </a:solidFill>
-                      <a:prstDash val="solid"/>
-                      <a:round/>
-                      <a:headEnd type="none" w="med" len="med"/>
-                      <a:tailEnd type="none" w="med" len="med"/>
-                    </a:lnT>
-                    <a:lnB w="6350" cap="flat" cmpd="sng" algn="ctr">
-                      <a:solidFill>
-                        <a:srgbClr val="E3E1DB"/>
-                      </a:solidFill>
-                      <a:prstDash val="solid"/>
-                      <a:round/>
-                      <a:headEnd type="none" w="med" len="med"/>
-                      <a:tailEnd type="none" w="med" len="med"/>
-                    </a:lnB>
-                    <a:solidFill>
-                      <a:srgbClr val="F4F7F9"/>
-                    </a:solidFill>
-                  </a:tcPr>
-                </a:tc>
-                <a:tc>
-                  <a:txBody>
-                    <a:bodyPr/>
-                    <a:lstStyle/>
-                    <a:p>
-                      <a:pPr indent="0" marL="0">
-                        <a:buNone/>
-                      </a:pPr>
-                      <a:r>
-                        <a:rPr lang="en-US" sz="1050" dirty="0">
-                          <a:solidFill>
-                            <a:srgbClr val="1A1A1A"/>
-                          </a:solidFill>
-                          <a:latin typeface="Calibri" pitchFamily="34" charset="0"/>
-                          <a:ea typeface="Calibri" pitchFamily="34" charset="-122"/>
-                          <a:cs typeface="Calibri" pitchFamily="34" charset="-120"/>
-                        </a:rPr>
-                        <a:t>4.00</a:t>
-                      </a:r>
-                      <a:endParaRPr lang="en-US" sz="1050" dirty="0">
-                        <a:latin typeface="Calibri" charset="0"/>
-                        <a:ea typeface="Calibri" charset="0"/>
-                        <a:cs typeface="Calibri" charset="0"/>
-                      </a:endParaRPr>
-                    </a:p>
-                  </a:txBody>
-                  <a:tcPr marL="91440" marR="91440" marT="45720" marB="45720" anchor="ctr">
-                    <a:lnL w="6350" cap="flat" cmpd="sng" algn="ctr">
-                      <a:solidFill>
-                        <a:srgbClr val="E3E1DB"/>
-                      </a:solidFill>
-                      <a:prstDash val="solid"/>
-                      <a:round/>
-                      <a:headEnd type="none" w="med" len="med"/>
-                      <a:tailEnd type="none" w="med" len="med"/>
-                    </a:lnL>
-                    <a:lnR w="6350" cap="flat" cmpd="sng" algn="ctr">
-                      <a:solidFill>
-                        <a:srgbClr val="E3E1DB"/>
-                      </a:solidFill>
-                      <a:prstDash val="solid"/>
-                      <a:round/>
-                      <a:headEnd type="none" w="med" len="med"/>
-                      <a:tailEnd type="none" w="med" len="med"/>
-                    </a:lnR>
-                    <a:lnT w="6350" cap="flat" cmpd="sng" algn="ctr">
-                      <a:solidFill>
-                        <a:srgbClr val="E3E1DB"/>
-                      </a:solidFill>
-                      <a:prstDash val="solid"/>
-                      <a:round/>
-                      <a:headEnd type="none" w="med" len="med"/>
-                      <a:tailEnd type="none" w="med" len="med"/>
-                    </a:lnT>
-                    <a:lnB w="6350" cap="flat" cmpd="sng" algn="ctr">
-                      <a:solidFill>
-                        <a:srgbClr val="E3E1DB"/>
-                      </a:solidFill>
-                      <a:prstDash val="solid"/>
-                      <a:round/>
-                      <a:headEnd type="none" w="med" len="med"/>
-                      <a:tailEnd type="none" w="med" len="med"/>
-                    </a:lnB>
-                    <a:solidFill>
-                      <a:srgbClr val="F4F7F9"/>
-                    </a:solidFill>
-                  </a:tcPr>
-                </a:tc>
-              </a:tr>
-              <a:tr h="169164">
-                <a:tc>
-                  <a:txBody>
-                    <a:bodyPr/>
-                    <a:lstStyle/>
-                    <a:p>
-                      <a:pPr indent="0" marL="0">
-                        <a:buNone/>
-                      </a:pPr>
-                      <a:r>
-                        <a:rPr lang="en-US" sz="1050" b="1" dirty="0">
-                          <a:solidFill>
-                            <a:srgbClr val="21295C"/>
-                          </a:solidFill>
-                          <a:latin typeface="Calibri" pitchFamily="34" charset="0"/>
-                          <a:ea typeface="Calibri" pitchFamily="34" charset="-122"/>
-                          <a:cs typeface="Calibri" pitchFamily="34" charset="-120"/>
-                        </a:rPr>
-                        <a:t>運動後疲労</a:t>
-                      </a:r>
-                      <a:endParaRPr lang="en-US" sz="1050" dirty="0">
-                        <a:latin typeface="Calibri" charset="0"/>
-                        <a:ea typeface="Calibri" charset="0"/>
-                        <a:cs typeface="Calibri" charset="0"/>
-                      </a:endParaRPr>
-                    </a:p>
-                  </a:txBody>
-                  <a:tcPr marL="91440" marR="91440" marT="45720" marB="45720" anchor="ctr">
-                    <a:lnL w="6350" cap="flat" cmpd="sng" algn="ctr">
-                      <a:solidFill>
-                        <a:srgbClr val="E3E1DB"/>
-                      </a:solidFill>
-                      <a:prstDash val="solid"/>
-                      <a:round/>
-                      <a:headEnd type="none" w="med" len="med"/>
-                      <a:tailEnd type="none" w="med" len="med"/>
-                    </a:lnL>
-                    <a:lnR w="6350" cap="flat" cmpd="sng" algn="ctr">
-                      <a:solidFill>
-                        <a:srgbClr val="E3E1DB"/>
-                      </a:solidFill>
-                      <a:prstDash val="solid"/>
-                      <a:round/>
-                      <a:headEnd type="none" w="med" len="med"/>
-                      <a:tailEnd type="none" w="med" len="med"/>
-                    </a:lnR>
-                    <a:lnT w="6350" cap="flat" cmpd="sng" algn="ctr">
-                      <a:solidFill>
-                        <a:srgbClr val="E3E1DB"/>
-                      </a:solidFill>
-                      <a:prstDash val="solid"/>
-                      <a:round/>
-                      <a:headEnd type="none" w="med" len="med"/>
-                      <a:tailEnd type="none" w="med" len="med"/>
-                    </a:lnT>
-                    <a:lnB w="6350" cap="flat" cmpd="sng" algn="ctr">
-                      <a:solidFill>
-                        <a:srgbClr val="E3E1DB"/>
-                      </a:solidFill>
-                      <a:prstDash val="solid"/>
-                      <a:round/>
-                      <a:headEnd type="none" w="med" len="med"/>
-                      <a:tailEnd type="none" w="med" len="med"/>
-                    </a:lnB>
-                    <a:solidFill>
-                      <a:srgbClr val="FFFFFF"/>
-                    </a:solidFill>
-                  </a:tcPr>
-                </a:tc>
-                <a:tc>
-                  <a:txBody>
-                    <a:bodyPr/>
-                    <a:lstStyle/>
-                    <a:p>
-                      <a:pPr indent="0" marL="0">
-                        <a:buNone/>
-                      </a:pPr>
-                      <a:r>
-                        <a:rPr lang="en-US" sz="1050" dirty="0">
-                          <a:solidFill>
-                            <a:srgbClr val="1A1A1A"/>
-                          </a:solidFill>
-                          <a:latin typeface="Calibri" pitchFamily="34" charset="0"/>
-                          <a:ea typeface="Calibri" pitchFamily="34" charset="-122"/>
-                          <a:cs typeface="Calibri" pitchFamily="34" charset="-120"/>
-                        </a:rPr>
-                        <a:t>2.67</a:t>
-                      </a:r>
-                      <a:endParaRPr lang="en-US" sz="1050" dirty="0">
-                        <a:latin typeface="Calibri" charset="0"/>
-                        <a:ea typeface="Calibri" charset="0"/>
-                        <a:cs typeface="Calibri" charset="0"/>
-                      </a:endParaRPr>
-                    </a:p>
-                  </a:txBody>
-                  <a:tcPr marL="91440" marR="91440" marT="45720" marB="45720" anchor="ctr">
-                    <a:lnL w="6350" cap="flat" cmpd="sng" algn="ctr">
-                      <a:solidFill>
-                        <a:srgbClr val="E3E1DB"/>
-                      </a:solidFill>
-                      <a:prstDash val="solid"/>
-                      <a:round/>
-                      <a:headEnd type="none" w="med" len="med"/>
-                      <a:tailEnd type="none" w="med" len="med"/>
-                    </a:lnL>
-                    <a:lnR w="6350" cap="flat" cmpd="sng" algn="ctr">
-                      <a:solidFill>
-                        <a:srgbClr val="E3E1DB"/>
-                      </a:solidFill>
-                      <a:prstDash val="solid"/>
-                      <a:round/>
-                      <a:headEnd type="none" w="med" len="med"/>
-                      <a:tailEnd type="none" w="med" len="med"/>
-                    </a:lnR>
-                    <a:lnT w="6350" cap="flat" cmpd="sng" algn="ctr">
-                      <a:solidFill>
-                        <a:srgbClr val="E3E1DB"/>
-                      </a:solidFill>
-                      <a:prstDash val="solid"/>
-                      <a:round/>
-                      <a:headEnd type="none" w="med" len="med"/>
-                      <a:tailEnd type="none" w="med" len="med"/>
-                    </a:lnT>
-                    <a:lnB w="6350" cap="flat" cmpd="sng" algn="ctr">
-                      <a:solidFill>
-                        <a:srgbClr val="E3E1DB"/>
-                      </a:solidFill>
-                      <a:prstDash val="solid"/>
-                      <a:round/>
-                      <a:headEnd type="none" w="med" len="med"/>
-                      <a:tailEnd type="none" w="med" len="med"/>
-                    </a:lnB>
-                    <a:solidFill>
-                      <a:srgbClr val="FFFFFF"/>
-                    </a:solidFill>
-                  </a:tcPr>
-                </a:tc>
-                <a:tc>
-                  <a:txBody>
-                    <a:bodyPr/>
-                    <a:lstStyle/>
-                    <a:p>
-                      <a:pPr indent="0" marL="0">
-                        <a:buNone/>
-                      </a:pPr>
-                      <a:r>
-                        <a:rPr lang="en-US" sz="1050" dirty="0">
-                          <a:solidFill>
-                            <a:srgbClr val="1A1A1A"/>
-                          </a:solidFill>
-                          <a:latin typeface="Calibri" pitchFamily="34" charset="0"/>
-                          <a:ea typeface="Calibri" pitchFamily="34" charset="-122"/>
-                          <a:cs typeface="Calibri" pitchFamily="34" charset="-120"/>
-                        </a:rPr>
-                        <a:t>3.33</a:t>
-                      </a:r>
-                      <a:endParaRPr lang="en-US" sz="1050" dirty="0">
-                        <a:latin typeface="Calibri" charset="0"/>
-                        <a:ea typeface="Calibri" charset="0"/>
-                        <a:cs typeface="Calibri" charset="0"/>
-                      </a:endParaRPr>
-                    </a:p>
-                  </a:txBody>
-                  <a:tcPr marL="91440" marR="91440" marT="45720" marB="45720" anchor="ctr">
-                    <a:lnL w="6350" cap="flat" cmpd="sng" algn="ctr">
-                      <a:solidFill>
-                        <a:srgbClr val="E3E1DB"/>
-                      </a:solidFill>
-                      <a:prstDash val="solid"/>
-                      <a:round/>
-                      <a:headEnd type="none" w="med" len="med"/>
-                      <a:tailEnd type="none" w="med" len="med"/>
-                    </a:lnL>
-                    <a:lnR w="6350" cap="flat" cmpd="sng" algn="ctr">
-                      <a:solidFill>
-                        <a:srgbClr val="E3E1DB"/>
-                      </a:solidFill>
-                      <a:prstDash val="solid"/>
-                      <a:round/>
-                      <a:headEnd type="none" w="med" len="med"/>
-                      <a:tailEnd type="none" w="med" len="med"/>
-                    </a:lnR>
-                    <a:lnT w="6350" cap="flat" cmpd="sng" algn="ctr">
-                      <a:solidFill>
-                        <a:srgbClr val="E3E1DB"/>
-                      </a:solidFill>
-                      <a:prstDash val="solid"/>
-                      <a:round/>
-                      <a:headEnd type="none" w="med" len="med"/>
-                      <a:tailEnd type="none" w="med" len="med"/>
-                    </a:lnT>
-                    <a:lnB w="6350" cap="flat" cmpd="sng" algn="ctr">
+                    <a:lnB w="9525" cap="flat" cmpd="sng" algn="ctr">
                       <a:solidFill>
                         <a:srgbClr val="E3E1DB"/>
                       </a:solidFill>
@@ -4121,14 +2435,36 @@
       </p:graphicFrame>
       <p:sp>
         <p:nvSpPr>
-          <p:cNvPr id="41" name="Text 38"/>
+          <p:cNvPr id="6" name="Shape 3"/>
+          <p:cNvSpPr/>
+          <p:nvPr/>
+        </p:nvSpPr>
+        <p:spPr>
+          <a:xfrm>
+            <a:off x="548640" y="5212080"/>
+            <a:ext cx="11091672" cy="1051560"/>
+          </a:xfrm>
+          <a:prstGeom prst="roundRect">
+            <a:avLst>
+              <a:gd name="adj" fmla="val 8696"/>
+            </a:avLst>
+          </a:prstGeom>
+          <a:solidFill>
+            <a:srgbClr val="EAF7F0"/>
+          </a:solidFill>
+          <a:ln/>
+        </p:spPr>
+      </p:sp>
+      <p:sp>
+        <p:nvSpPr>
+          <p:cNvPr id="7" name="Text 4"/>
           <p:cNvSpPr txBox="1"/>
           <p:nvPr/>
         </p:nvSpPr>
         <p:spPr>
           <a:xfrm>
-            <a:off x="7772400" y="4526280"/>
-            <a:ext cx="4416552" cy="1280160"/>
+            <a:off x="822960" y="5358384"/>
+            <a:ext cx="10543032" cy="777240"/>
           </a:xfrm>
           <a:prstGeom prst="rect">
             <a:avLst/>
@@ -4144,68 +2480,7 @@
               <a:buNone/>
             </a:pPr>
             <a:r>
-              <a:rPr lang="en-US" sz="1000" i="1" dirty="0">
-                <a:solidFill>
-                  <a:srgbClr val="5C6570"/>
-                </a:solidFill>
-                <a:latin typeface="Calibri" pitchFamily="34" charset="0"/>
-                <a:ea typeface="Calibri" pitchFamily="34" charset="-122"/>
-                <a:cs typeface="Calibri" pitchFamily="34" charset="-120"/>
-              </a:rPr>
-              <a:t>⚠ 練習時間がスムージー60分/日・固形140分/日と大きく異なり、夜間指標には練習量の交絡が強く残る。数値差を食事の効果と断定できない。</a:t>
-            </a:r>
-            <a:endParaRPr lang="en-US" sz="1000" dirty="0"/>
-          </a:p>
-        </p:txBody>
-      </p:sp>
-      <p:sp>
-        <p:nvSpPr>
-          <p:cNvPr id="42" name="Shape 39"/>
-          <p:cNvSpPr/>
-          <p:nvPr/>
-        </p:nvSpPr>
-        <p:spPr>
-          <a:xfrm>
-            <a:off x="548640" y="5852160"/>
-            <a:ext cx="11091672" cy="868680"/>
-          </a:xfrm>
-          <a:prstGeom prst="roundRect">
-            <a:avLst>
-              <a:gd name="adj" fmla="val 10526"/>
-            </a:avLst>
-          </a:prstGeom>
-          <a:solidFill>
-            <a:srgbClr val="EAF7F0"/>
-          </a:solidFill>
-          <a:ln/>
-        </p:spPr>
-      </p:sp>
-      <p:sp>
-        <p:nvSpPr>
-          <p:cNvPr id="43" name="Text 40"/>
-          <p:cNvSpPr txBox="1"/>
-          <p:nvPr/>
-        </p:nvSpPr>
-        <p:spPr>
-          <a:xfrm>
-            <a:off x="777240" y="5907024"/>
-            <a:ext cx="10634472" cy="758952"/>
-          </a:xfrm>
-          <a:prstGeom prst="rect">
-            <a:avLst/>
-          </a:prstGeom>
-          <a:noFill/>
-          <a:ln/>
-        </p:spPr>
-        <p:txBody>
-          <a:bodyPr wrap="square" lIns="0" tIns="0" rIns="0" bIns="0" rtlCol="0" anchor="ctr"/>
-          <a:lstStyle/>
-          <a:p>
-            <a:pPr indent="0" marL="0">
-              <a:buNone/>
-            </a:pPr>
-            <a:r>
-              <a:rPr lang="en-US" sz="1100" b="1" dirty="0">
+              <a:rPr lang="en-US" sz="1250" b="1" dirty="0">
                 <a:solidFill>
                   <a:srgbClr val="0F5C3D"/>
                 </a:solidFill>
@@ -4213,9 +2488,9 @@
                 <a:ea typeface="Calibri" pitchFamily="34" charset="-122"/>
                 <a:cs typeface="Calibri" pitchFamily="34" charset="-120"/>
               </a:rPr>
-              <a:t>✓ 総合評価：液状化だけでは血糖の乱高下（Δピーク・CV）が明確に悪化する。自覚的な消化器症状・満腹感には大差なく、夜間コンディションも練習量の交絡下では大きな差と言えない。「液状化の単独効果」は血糖面でむしろマイナス。</a:t>
+              <a:t>✓ ③（糖質量の比較）は結論を維持できる。①・②は選手・スタッフへの確認（8/29 14:30〜15:30頃の状況）後に再評価が必要。</a:t>
             </a:r>
-            <a:endParaRPr lang="en-US" sz="1100" dirty="0"/>
+            <a:endParaRPr lang="en-US" sz="1250" dirty="0"/>
           </a:p>
         </p:txBody>
       </p:sp>
@@ -4284,7 +2559,7 @@
                 <a:ea typeface="Calibri" pitchFamily="34" charset="-122"/>
                 <a:cs typeface="Calibri" pitchFamily="34" charset="-120"/>
               </a:rPr>
-              <a:t>COMPARISON ②</a:t>
+              <a:t>COMPARISON ①</a:t>
             </a:r>
             <a:endParaRPr lang="en-US" sz="1250" dirty="0"/>
           </a:p>
@@ -4323,7 +2598,7 @@
                 <a:ea typeface="Cambria" pitchFamily="34" charset="-122"/>
                 <a:cs typeface="Cambria" pitchFamily="34" charset="-120"/>
               </a:rPr>
-              <a:t>スムージー vs おにぎり＋スムージー</a:t>
+              <a:t>スムージー vs 固形</a:t>
             </a:r>
             <a:endParaRPr lang="en-US" sz="2500" dirty="0"/>
           </a:p>
@@ -4332,6 +2607,72 @@
       <p:sp>
         <p:nvSpPr>
           <p:cNvPr id="4" name="Shape 2"/>
+          <p:cNvSpPr/>
+          <p:nvPr/>
+        </p:nvSpPr>
+        <p:spPr>
+          <a:xfrm>
+            <a:off x="7434072" y="438912"/>
+            <a:ext cx="4206240" cy="365760"/>
+          </a:xfrm>
+          <a:prstGeom prst="roundRect">
+            <a:avLst>
+              <a:gd name="adj" fmla="val 20000"/>
+            </a:avLst>
+          </a:prstGeom>
+          <a:solidFill>
+            <a:srgbClr val="FDF3E2"/>
+          </a:solidFill>
+          <a:ln w="9525">
+            <a:solidFill>
+              <a:srgbClr val="6B4B00"/>
+            </a:solidFill>
+            <a:prstDash val="solid"/>
+          </a:ln>
+        </p:spPr>
+      </p:sp>
+      <p:sp>
+        <p:nvSpPr>
+          <p:cNvPr id="5" name="Text 3"/>
+          <p:cNvSpPr txBox="1"/>
+          <p:nvPr/>
+        </p:nvSpPr>
+        <p:spPr>
+          <a:xfrm>
+            <a:off x="7525512" y="438912"/>
+            <a:ext cx="4023360" cy="365760"/>
+          </a:xfrm>
+          <a:prstGeom prst="rect">
+            <a:avLst/>
+          </a:prstGeom>
+          <a:noFill/>
+          <a:ln/>
+        </p:spPr>
+        <p:txBody>
+          <a:bodyPr wrap="square" lIns="0" tIns="0" rIns="0" bIns="0" rtlCol="0" anchor="ctr"/>
+          <a:lstStyle/>
+          <a:p>
+            <a:pPr algn="ctr" indent="0" marL="0">
+              <a:buNone/>
+            </a:pPr>
+            <a:r>
+              <a:rPr lang="en-US" sz="1050" b="1" dirty="0">
+                <a:solidFill>
+                  <a:srgbClr val="6B4B00"/>
+                </a:solidFill>
+                <a:latin typeface="Calibri" pitchFamily="34" charset="0"/>
+                <a:ea typeface="Calibri" pitchFamily="34" charset="-122"/>
+                <a:cs typeface="Calibri" pitchFamily="34" charset="-120"/>
+              </a:rPr>
+              <a:t>⚠ 血糖シフトの影響を受けている可能性</a:t>
+            </a:r>
+            <a:endParaRPr lang="en-US" sz="1050" dirty="0"/>
+          </a:p>
+        </p:txBody>
+      </p:sp>
+      <p:sp>
+        <p:nvSpPr>
+          <p:cNvPr id="6" name="Shape 4"/>
           <p:cNvSpPr/>
           <p:nvPr/>
         </p:nvSpPr>
@@ -4351,7 +2692,7 @@
       </p:sp>
       <p:sp>
         <p:nvSpPr>
-          <p:cNvPr id="5" name="Text 3"/>
+          <p:cNvPr id="7" name="Text 5"/>
           <p:cNvSpPr txBox="1"/>
           <p:nvPr/>
         </p:nvSpPr>
@@ -4390,7 +2731,7 @@
       </p:sp>
       <p:sp>
         <p:nvSpPr>
-          <p:cNvPr id="6" name="Shape 4"/>
+          <p:cNvPr id="8" name="Shape 6"/>
           <p:cNvSpPr/>
           <p:nvPr/>
         </p:nvSpPr>
@@ -4403,14 +2744,14 @@
             <a:avLst/>
           </a:prstGeom>
           <a:solidFill>
-            <a:srgbClr val="1BAF7A"/>
+            <a:srgbClr val="2A78D6"/>
           </a:solidFill>
           <a:ln/>
         </p:spPr>
       </p:sp>
       <p:sp>
         <p:nvSpPr>
-          <p:cNvPr id="7" name="Text 5"/>
+          <p:cNvPr id="9" name="Text 7"/>
           <p:cNvSpPr txBox="1"/>
           <p:nvPr/>
         </p:nvSpPr>
@@ -4441,7 +2782,7 @@
                 <a:ea typeface="Calibri" pitchFamily="34" charset="-122"/>
                 <a:cs typeface="Calibri" pitchFamily="34" charset="-120"/>
               </a:rPr>
-              <a:t>おにぎり＋スムージー</a:t>
+              <a:t>固形摂取</a:t>
             </a:r>
             <a:endParaRPr lang="en-US" sz="1150" dirty="0"/>
           </a:p>
@@ -4449,7 +2790,7 @@
       </p:sp>
       <p:sp>
         <p:nvSpPr>
-          <p:cNvPr id="8" name="Shape 6"/>
+          <p:cNvPr id="10" name="Shape 8"/>
           <p:cNvSpPr/>
           <p:nvPr/>
         </p:nvSpPr>
@@ -4469,7 +2810,7 @@
       </p:sp>
       <p:sp>
         <p:nvSpPr>
-          <p:cNvPr id="9" name="Text 7"/>
+          <p:cNvPr id="11" name="Text 9"/>
           <p:cNvSpPr txBox="1"/>
           <p:nvPr/>
         </p:nvSpPr>
@@ -4508,7 +2849,7 @@
       </p:sp>
       <p:sp>
         <p:nvSpPr>
-          <p:cNvPr id="10" name="Shape 8"/>
+          <p:cNvPr id="12" name="Shape 10"/>
           <p:cNvSpPr/>
           <p:nvPr/>
         </p:nvSpPr>
@@ -4530,7 +2871,7 @@
       </p:sp>
       <p:sp>
         <p:nvSpPr>
-          <p:cNvPr id="11" name="Text 9"/>
+          <p:cNvPr id="13" name="Text 11"/>
           <p:cNvSpPr txBox="1"/>
           <p:nvPr/>
         </p:nvSpPr>
@@ -4569,7 +2910,7 @@
       </p:sp>
       <p:sp>
         <p:nvSpPr>
-          <p:cNvPr id="12" name="Text 10"/>
+          <p:cNvPr id="14" name="Text 12"/>
           <p:cNvSpPr txBox="1"/>
           <p:nvPr/>
         </p:nvSpPr>
@@ -4608,7 +2949,7 @@
       </p:sp>
       <p:sp>
         <p:nvSpPr>
-          <p:cNvPr id="13" name="Text 11"/>
+          <p:cNvPr id="15" name="Text 13"/>
           <p:cNvSpPr txBox="1"/>
           <p:nvPr/>
         </p:nvSpPr>
@@ -4633,13 +2974,13 @@
             <a:r>
               <a:rPr lang="en-US" sz="1900" b="1" dirty="0">
                 <a:solidFill>
-                  <a:srgbClr val="1BAF7A"/>
+                  <a:srgbClr val="2A78D6"/>
                 </a:solidFill>
                 <a:latin typeface="Cambria" pitchFamily="34" charset="0"/>
                 <a:ea typeface="Cambria" pitchFamily="34" charset="-122"/>
                 <a:cs typeface="Cambria" pitchFamily="34" charset="-120"/>
               </a:rPr>
-              <a:t>78.0</a:t>
+              <a:t>53.7</a:t>
             </a:r>
             <a:endParaRPr lang="en-US" sz="1900" dirty="0"/>
           </a:p>
@@ -4647,7 +2988,7 @@
       </p:sp>
       <p:sp>
         <p:nvSpPr>
-          <p:cNvPr id="14" name="Shape 12"/>
+          <p:cNvPr id="16" name="Shape 14"/>
           <p:cNvSpPr/>
           <p:nvPr/>
         </p:nvSpPr>
@@ -4669,7 +3010,7 @@
       </p:sp>
       <p:sp>
         <p:nvSpPr>
-          <p:cNvPr id="15" name="Text 13"/>
+          <p:cNvPr id="17" name="Text 15"/>
           <p:cNvSpPr txBox="1"/>
           <p:nvPr/>
         </p:nvSpPr>
@@ -4708,7 +3049,7 @@
       </p:sp>
       <p:sp>
         <p:nvSpPr>
-          <p:cNvPr id="16" name="Text 14"/>
+          <p:cNvPr id="18" name="Text 16"/>
           <p:cNvSpPr txBox="1"/>
           <p:nvPr/>
         </p:nvSpPr>
@@ -4747,7 +3088,7 @@
       </p:sp>
       <p:sp>
         <p:nvSpPr>
-          <p:cNvPr id="17" name="Text 15"/>
+          <p:cNvPr id="19" name="Text 17"/>
           <p:cNvSpPr txBox="1"/>
           <p:nvPr/>
         </p:nvSpPr>
@@ -4772,13 +3113,13 @@
             <a:r>
               <a:rPr lang="en-US" sz="1900" b="1" dirty="0">
                 <a:solidFill>
-                  <a:srgbClr val="1BAF7A"/>
+                  <a:srgbClr val="2A78D6"/>
                 </a:solidFill>
                 <a:latin typeface="Cambria" pitchFamily="34" charset="0"/>
                 <a:ea typeface="Cambria" pitchFamily="34" charset="-122"/>
                 <a:cs typeface="Cambria" pitchFamily="34" charset="-120"/>
               </a:rPr>
-              <a:t>10.1%</a:t>
+              <a:t>11.2%</a:t>
             </a:r>
             <a:endParaRPr lang="en-US" sz="1900" dirty="0"/>
           </a:p>
@@ -4786,7 +3127,7 @@
       </p:sp>
       <p:sp>
         <p:nvSpPr>
-          <p:cNvPr id="18" name="Shape 16"/>
+          <p:cNvPr id="20" name="Shape 18"/>
           <p:cNvSpPr/>
           <p:nvPr/>
         </p:nvSpPr>
@@ -4808,7 +3149,7 @@
       </p:sp>
       <p:sp>
         <p:nvSpPr>
-          <p:cNvPr id="19" name="Text 17"/>
+          <p:cNvPr id="21" name="Text 19"/>
           <p:cNvSpPr txBox="1"/>
           <p:nvPr/>
         </p:nvSpPr>
@@ -4847,7 +3188,7 @@
       </p:sp>
       <p:sp>
         <p:nvSpPr>
-          <p:cNvPr id="20" name="Text 18"/>
+          <p:cNvPr id="22" name="Text 20"/>
           <p:cNvSpPr txBox="1"/>
           <p:nvPr/>
         </p:nvSpPr>
@@ -4886,7 +3227,7 @@
       </p:sp>
       <p:sp>
         <p:nvSpPr>
-          <p:cNvPr id="21" name="Text 19"/>
+          <p:cNvPr id="23" name="Text 21"/>
           <p:cNvSpPr txBox="1"/>
           <p:nvPr/>
         </p:nvSpPr>
@@ -4911,13 +3252,13 @@
             <a:r>
               <a:rPr lang="en-US" sz="1900" b="1" dirty="0">
                 <a:solidFill>
-                  <a:srgbClr val="1BAF7A"/>
+                  <a:srgbClr val="2A78D6"/>
                 </a:solidFill>
                 <a:latin typeface="Cambria" pitchFamily="34" charset="0"/>
                 <a:ea typeface="Cambria" pitchFamily="34" charset="-122"/>
                 <a:cs typeface="Cambria" pitchFamily="34" charset="-120"/>
               </a:rPr>
-              <a:t>220.1</a:t>
+              <a:t>135.1</a:t>
             </a:r>
             <a:endParaRPr lang="en-US" sz="1900" dirty="0"/>
           </a:p>
@@ -4925,7 +3266,7 @@
       </p:sp>
       <p:sp>
         <p:nvSpPr>
-          <p:cNvPr id="22" name="Text 20"/>
+          <p:cNvPr id="24" name="Text 22"/>
           <p:cNvSpPr txBox="1"/>
           <p:nvPr/>
         </p:nvSpPr>
@@ -4956,7 +3297,7 @@
                 <a:ea typeface="Calibri" pitchFamily="34" charset="-122"/>
                 <a:cs typeface="Calibri" pitchFamily="34" charset="-120"/>
               </a:rPr>
-              <a:t>ほぼ同水準（燃料供給は同等）</a:t>
+              <a:t>mg/dL＝燃料供給の目安</a:t>
             </a:r>
             <a:endParaRPr lang="en-US" sz="850" dirty="0"/>
           </a:p>
@@ -4964,7 +3305,7 @@
       </p:sp>
       <p:sp>
         <p:nvSpPr>
-          <p:cNvPr id="23" name="Shape 21"/>
+          <p:cNvPr id="25" name="Shape 23"/>
           <p:cNvSpPr/>
           <p:nvPr/>
         </p:nvSpPr>
@@ -4984,7 +3325,7 @@
       </p:sp>
       <p:sp>
         <p:nvSpPr>
-          <p:cNvPr id="24" name="Text 22"/>
+          <p:cNvPr id="26" name="Text 24"/>
           <p:cNvSpPr txBox="1"/>
           <p:nvPr/>
         </p:nvSpPr>
@@ -5023,7 +3364,7 @@
       </p:sp>
       <p:sp>
         <p:nvSpPr>
-          <p:cNvPr id="25" name="Shape 23"/>
+          <p:cNvPr id="27" name="Shape 25"/>
           <p:cNvSpPr/>
           <p:nvPr/>
         </p:nvSpPr>
@@ -5045,7 +3386,7 @@
       </p:sp>
       <p:sp>
         <p:nvSpPr>
-          <p:cNvPr id="26" name="Text 24"/>
+          <p:cNvPr id="28" name="Text 26"/>
           <p:cNvSpPr txBox="1"/>
           <p:nvPr/>
         </p:nvSpPr>
@@ -5084,7 +3425,7 @@
       </p:sp>
       <p:sp>
         <p:nvSpPr>
-          <p:cNvPr id="27" name="Text 25"/>
+          <p:cNvPr id="29" name="Text 27"/>
           <p:cNvSpPr txBox="1"/>
           <p:nvPr/>
         </p:nvSpPr>
@@ -5123,7 +3464,7 @@
       </p:sp>
       <p:sp>
         <p:nvSpPr>
-          <p:cNvPr id="28" name="Text 26"/>
+          <p:cNvPr id="30" name="Text 28"/>
           <p:cNvSpPr txBox="1"/>
           <p:nvPr/>
         </p:nvSpPr>
@@ -5148,13 +3489,13 @@
             <a:r>
               <a:rPr lang="en-US" sz="1900" b="1" dirty="0">
                 <a:solidFill>
-                  <a:srgbClr val="1BAF7A"/>
+                  <a:srgbClr val="2A78D6"/>
                 </a:solidFill>
                 <a:latin typeface="Cambria" pitchFamily="34" charset="0"/>
                 <a:ea typeface="Cambria" pitchFamily="34" charset="-122"/>
                 <a:cs typeface="Cambria" pitchFamily="34" charset="-120"/>
               </a:rPr>
-              <a:t>7.67</a:t>
+              <a:t>4.00</a:t>
             </a:r>
             <a:endParaRPr lang="en-US" sz="1900" dirty="0"/>
           </a:p>
@@ -5162,7 +3503,7 @@
       </p:sp>
       <p:sp>
         <p:nvSpPr>
-          <p:cNvPr id="29" name="Shape 27"/>
+          <p:cNvPr id="31" name="Shape 29"/>
           <p:cNvSpPr/>
           <p:nvPr/>
         </p:nvSpPr>
@@ -5184,7 +3525,7 @@
       </p:sp>
       <p:sp>
         <p:nvSpPr>
-          <p:cNvPr id="30" name="Text 28"/>
+          <p:cNvPr id="32" name="Text 30"/>
           <p:cNvSpPr txBox="1"/>
           <p:nvPr/>
         </p:nvSpPr>
@@ -5223,7 +3564,7 @@
       </p:sp>
       <p:sp>
         <p:nvSpPr>
-          <p:cNvPr id="31" name="Text 29"/>
+          <p:cNvPr id="33" name="Text 31"/>
           <p:cNvSpPr txBox="1"/>
           <p:nvPr/>
         </p:nvSpPr>
@@ -5262,7 +3603,7 @@
       </p:sp>
       <p:sp>
         <p:nvSpPr>
-          <p:cNvPr id="32" name="Text 30"/>
+          <p:cNvPr id="34" name="Text 32"/>
           <p:cNvSpPr txBox="1"/>
           <p:nvPr/>
         </p:nvSpPr>
@@ -5287,13 +3628,13 @@
             <a:r>
               <a:rPr lang="en-US" sz="1900" b="1" dirty="0">
                 <a:solidFill>
-                  <a:srgbClr val="1BAF7A"/>
+                  <a:srgbClr val="2A78D6"/>
                 </a:solidFill>
                 <a:latin typeface="Cambria" pitchFamily="34" charset="0"/>
                 <a:ea typeface="Cambria" pitchFamily="34" charset="-122"/>
                 <a:cs typeface="Cambria" pitchFamily="34" charset="-120"/>
               </a:rPr>
-              <a:t>5.67</a:t>
+              <a:t>7.67</a:t>
             </a:r>
             <a:endParaRPr lang="en-US" sz="1900" dirty="0"/>
           </a:p>
@@ -5301,7 +3642,7 @@
       </p:sp>
       <p:sp>
         <p:nvSpPr>
-          <p:cNvPr id="33" name="Shape 31"/>
+          <p:cNvPr id="35" name="Shape 33"/>
           <p:cNvSpPr/>
           <p:nvPr/>
         </p:nvSpPr>
@@ -5323,7 +3664,7 @@
       </p:sp>
       <p:sp>
         <p:nvSpPr>
-          <p:cNvPr id="34" name="Text 32"/>
+          <p:cNvPr id="36" name="Text 34"/>
           <p:cNvSpPr txBox="1"/>
           <p:nvPr/>
         </p:nvSpPr>
@@ -5362,7 +3703,7 @@
       </p:sp>
       <p:sp>
         <p:nvSpPr>
-          <p:cNvPr id="35" name="Text 33"/>
+          <p:cNvPr id="37" name="Text 35"/>
           <p:cNvSpPr txBox="1"/>
           <p:nvPr/>
         </p:nvSpPr>
@@ -5401,7 +3742,7 @@
       </p:sp>
       <p:sp>
         <p:nvSpPr>
-          <p:cNvPr id="36" name="Text 34"/>
+          <p:cNvPr id="38" name="Text 36"/>
           <p:cNvSpPr txBox="1"/>
           <p:nvPr/>
         </p:nvSpPr>
@@ -5426,13 +3767,13 @@
             <a:r>
               <a:rPr lang="en-US" sz="1900" b="1" dirty="0">
                 <a:solidFill>
-                  <a:srgbClr val="1BAF7A"/>
+                  <a:srgbClr val="2A78D6"/>
                 </a:solidFill>
                 <a:latin typeface="Cambria" pitchFamily="34" charset="0"/>
                 <a:ea typeface="Cambria" pitchFamily="34" charset="-122"/>
                 <a:cs typeface="Cambria" pitchFamily="34" charset="-120"/>
               </a:rPr>
-              <a:t>1・(9:30のみ2)</a:t>
+              <a:t>1・1</a:t>
             </a:r>
             <a:endParaRPr lang="en-US" sz="1900" dirty="0"/>
           </a:p>
@@ -5440,7 +3781,46 @@
       </p:sp>
       <p:sp>
         <p:nvSpPr>
-          <p:cNvPr id="37" name="Shape 35"/>
+          <p:cNvPr id="39" name="Text 37"/>
+          <p:cNvSpPr txBox="1"/>
+          <p:nvPr/>
+        </p:nvSpPr>
+        <p:spPr>
+          <a:xfrm>
+            <a:off x="8263128" y="3886200"/>
+            <a:ext cx="3240024" cy="182880"/>
+          </a:xfrm>
+          <a:prstGeom prst="rect">
+            <a:avLst/>
+          </a:prstGeom>
+          <a:noFill/>
+          <a:ln/>
+        </p:spPr>
+        <p:txBody>
+          <a:bodyPr wrap="square" lIns="0" tIns="0" rIns="0" bIns="0" rtlCol="0" anchor="ctr"/>
+          <a:lstStyle/>
+          <a:p>
+            <a:pPr indent="0" marL="0">
+              <a:buNone/>
+            </a:pPr>
+            <a:r>
+              <a:rPr lang="en-US" sz="850" dirty="0">
+                <a:solidFill>
+                  <a:srgbClr val="5C6570"/>
+                </a:solidFill>
+                <a:latin typeface="Calibri" pitchFamily="34" charset="0"/>
+                <a:ea typeface="Calibri" pitchFamily="34" charset="-122"/>
+                <a:cs typeface="Calibri" pitchFamily="34" charset="-120"/>
+              </a:rPr>
+              <a:t>両条件とも症状なし</a:t>
+            </a:r>
+            <a:endParaRPr lang="en-US" sz="850" dirty="0"/>
+          </a:p>
+        </p:txBody>
+      </p:sp>
+      <p:sp>
+        <p:nvSpPr>
+          <p:cNvPr id="40" name="Shape 38"/>
           <p:cNvSpPr/>
           <p:nvPr/>
         </p:nvSpPr>
@@ -5460,7 +3840,7 @@
       </p:sp>
       <p:sp>
         <p:nvSpPr>
-          <p:cNvPr id="38" name="Text 36"/>
+          <p:cNvPr id="41" name="Text 39"/>
           <p:cNvSpPr txBox="1"/>
           <p:nvPr/>
         </p:nvSpPr>
@@ -5667,7 +4047,7 @@
                           <a:ea typeface="Calibri" pitchFamily="34" charset="-122"/>
                           <a:cs typeface="Calibri" pitchFamily="34" charset="-120"/>
                         </a:rPr>
-                        <a:t>おにぎり＋スムージー</a:t>
+                        <a:t>固形摂取</a:t>
                       </a:r>
                       <a:endParaRPr lang="en-US" sz="1050" dirty="0">
                         <a:latin typeface="Calibri" charset="0"/>
@@ -5873,7 +4253,7 @@
                           <a:ea typeface="Calibri" pitchFamily="34" charset="-122"/>
                           <a:cs typeface="Calibri" pitchFamily="34" charset="-120"/>
                         </a:rPr>
-                        <a:t>2.33</a:t>
+                        <a:t>2.00</a:t>
                       </a:r>
                       <a:endParaRPr lang="en-US" sz="1050" dirty="0">
                         <a:latin typeface="Calibri" charset="0"/>
@@ -6285,7 +4665,7 @@
                           <a:ea typeface="Calibri" pitchFamily="34" charset="-122"/>
                           <a:cs typeface="Calibri" pitchFamily="34" charset="-120"/>
                         </a:rPr>
-                        <a:t>5.50</a:t>
+                        <a:t>6.67</a:t>
                       </a:r>
                       <a:endParaRPr lang="en-US" sz="1050" dirty="0">
                         <a:latin typeface="Calibri" charset="0"/>
@@ -6491,7 +4871,7 @@
                           <a:ea typeface="Calibri" pitchFamily="34" charset="-122"/>
                           <a:cs typeface="Calibri" pitchFamily="34" charset="-120"/>
                         </a:rPr>
-                        <a:t>3.83</a:t>
+                        <a:t>3.00</a:t>
                       </a:r>
                       <a:endParaRPr lang="en-US" sz="1050" dirty="0">
                         <a:latin typeface="Calibri" charset="0"/>
@@ -6697,7 +5077,7 @@
                           <a:ea typeface="Calibri" pitchFamily="34" charset="-122"/>
                           <a:cs typeface="Calibri" pitchFamily="34" charset="-120"/>
                         </a:rPr>
-                        <a:t>3.50</a:t>
+                        <a:t>4.00</a:t>
                       </a:r>
                       <a:endParaRPr lang="en-US" sz="1050" dirty="0">
                         <a:latin typeface="Calibri" charset="0"/>
@@ -6903,7 +5283,7 @@
                           <a:ea typeface="Calibri" pitchFamily="34" charset="-122"/>
                           <a:cs typeface="Calibri" pitchFamily="34" charset="-120"/>
                         </a:rPr>
-                        <a:t>3.17</a:t>
+                        <a:t>3.33</a:t>
                       </a:r>
                       <a:endParaRPr lang="en-US" sz="1050" dirty="0">
                         <a:latin typeface="Calibri" charset="0"/>
@@ -6961,7 +5341,7 @@
       </p:graphicFrame>
       <p:sp>
         <p:nvSpPr>
-          <p:cNvPr id="40" name="Text 37"/>
+          <p:cNvPr id="43" name="Text 40"/>
           <p:cNvSpPr txBox="1"/>
           <p:nvPr/>
         </p:nvSpPr>
@@ -6992,7 +5372,7 @@
                 <a:ea typeface="Calibri" pitchFamily="34" charset="-122"/>
                 <a:cs typeface="Calibri" pitchFamily="34" charset="-120"/>
               </a:rPr>
-              <a:t>練習時間はスムージー60分/日・おにぎり+スムージー80分/日とやや近く、①よりは比較しやすい。起床時コンディション・睡眠の質は同水準。</a:t>
+              <a:t>⚠ 練習時間がスムージー60分/日・固形140分/日と大きく異なり、夜間指標には練習量の交絡が強く残る。数値差を食事の効果と断定できない。</a:t>
             </a:r>
             <a:endParaRPr lang="en-US" sz="1000" dirty="0"/>
           </a:p>
@@ -7000,7 +5380,7 @@
       </p:sp>
       <p:sp>
         <p:nvSpPr>
-          <p:cNvPr id="41" name="Shape 38"/>
+          <p:cNvPr id="44" name="Shape 41"/>
           <p:cNvSpPr/>
           <p:nvPr/>
         </p:nvSpPr>
@@ -7022,7 +5402,7 @@
       </p:sp>
       <p:sp>
         <p:nvSpPr>
-          <p:cNvPr id="42" name="Text 39"/>
+          <p:cNvPr id="45" name="Text 42"/>
           <p:cNvSpPr txBox="1"/>
           <p:nvPr/>
         </p:nvSpPr>
@@ -7053,7 +5433,7 @@
                 <a:ea typeface="Calibri" pitchFamily="34" charset="-122"/>
                 <a:cs typeface="Calibri" pitchFamily="34" charset="-120"/>
               </a:rPr>
-              <a:t>✓ 総合評価：おにぎりを同時摂取すると、同水準の血糖燃料供給を保ったままΔピーク・CVが小さくなり、波形がなだらかになる。満腹感は上がるが消化器症状は軽微。夜間コンディションもわずかに良好な傾向で、単独液状化よりバランスが良い。</a:t>
+              <a:t>✓ 総合評価：液状化だけでは血糖の乱高下（Δピーク・CV）が明確に悪化する。自覚的な消化器症状・満腹感には大差なく、夜間コンディションも練習量の交絡下では大きな差と言えない。「液状化の単独効果」は血糖面でむしろマイナス。</a:t>
             </a:r>
             <a:endParaRPr lang="en-US" sz="1100" dirty="0"/>
           </a:p>
@@ -7124,7 +5504,7 @@
                 <a:ea typeface="Calibri" pitchFamily="34" charset="-122"/>
                 <a:cs typeface="Calibri" pitchFamily="34" charset="-120"/>
               </a:rPr>
-              <a:t>COMPARISON ③</a:t>
+              <a:t>COMPARISON ②</a:t>
             </a:r>
             <a:endParaRPr lang="en-US" sz="1250" dirty="0"/>
           </a:p>
@@ -7163,7 +5543,7 @@
                 <a:ea typeface="Cambria" pitchFamily="34" charset="-122"/>
                 <a:cs typeface="Cambria" pitchFamily="34" charset="-120"/>
               </a:rPr>
-              <a:t>おにぎり＋スムージー vs おにぎり＋糖質減</a:t>
+              <a:t>スムージー vs おにぎり＋スムージー</a:t>
             </a:r>
             <a:endParaRPr lang="en-US" sz="2500" dirty="0"/>
           </a:p>
@@ -7177,7 +5557,132 @@
         </p:nvSpPr>
         <p:spPr>
           <a:xfrm>
+            <a:off x="7434072" y="438912"/>
+            <a:ext cx="4206240" cy="365760"/>
+          </a:xfrm>
+          <a:prstGeom prst="roundRect">
+            <a:avLst>
+              <a:gd name="adj" fmla="val 20000"/>
+            </a:avLst>
+          </a:prstGeom>
+          <a:solidFill>
+            <a:srgbClr val="FDF3E2"/>
+          </a:solidFill>
+          <a:ln w="9525">
+            <a:solidFill>
+              <a:srgbClr val="6B4B00"/>
+            </a:solidFill>
+            <a:prstDash val="solid"/>
+          </a:ln>
+        </p:spPr>
+      </p:sp>
+      <p:sp>
+        <p:nvSpPr>
+          <p:cNvPr id="5" name="Text 3"/>
+          <p:cNvSpPr txBox="1"/>
+          <p:nvPr/>
+        </p:nvSpPr>
+        <p:spPr>
+          <a:xfrm>
+            <a:off x="7525512" y="438912"/>
+            <a:ext cx="4023360" cy="365760"/>
+          </a:xfrm>
+          <a:prstGeom prst="rect">
+            <a:avLst/>
+          </a:prstGeom>
+          <a:noFill/>
+          <a:ln/>
+        </p:spPr>
+        <p:txBody>
+          <a:bodyPr wrap="square" lIns="0" tIns="0" rIns="0" bIns="0" rtlCol="0" anchor="ctr"/>
+          <a:lstStyle/>
+          <a:p>
+            <a:pPr algn="ctr" indent="0" marL="0">
+              <a:buNone/>
+            </a:pPr>
+            <a:r>
+              <a:rPr lang="en-US" sz="1050" b="1" dirty="0">
+                <a:solidFill>
+                  <a:srgbClr val="6B4B00"/>
+                </a:solidFill>
+                <a:latin typeface="Calibri" pitchFamily="34" charset="0"/>
+                <a:ea typeface="Calibri" pitchFamily="34" charset="-122"/>
+                <a:cs typeface="Calibri" pitchFamily="34" charset="-120"/>
+              </a:rPr>
+              <a:t>⚠ 血糖シフトの影響を受けている可能性</a:t>
+            </a:r>
+            <a:endParaRPr lang="en-US" sz="1050" dirty="0"/>
+          </a:p>
+        </p:txBody>
+      </p:sp>
+      <p:sp>
+        <p:nvSpPr>
+          <p:cNvPr id="6" name="Shape 4"/>
+          <p:cNvSpPr/>
+          <p:nvPr/>
+        </p:nvSpPr>
+        <p:spPr>
+          <a:xfrm>
             <a:off x="548640" y="1399032"/>
+            <a:ext cx="146304" cy="146304"/>
+          </a:xfrm>
+          <a:prstGeom prst="rect">
+            <a:avLst/>
+          </a:prstGeom>
+          <a:solidFill>
+            <a:srgbClr val="EB6834"/>
+          </a:solidFill>
+          <a:ln/>
+        </p:spPr>
+      </p:sp>
+      <p:sp>
+        <p:nvSpPr>
+          <p:cNvPr id="7" name="Text 5"/>
+          <p:cNvSpPr txBox="1"/>
+          <p:nvPr/>
+        </p:nvSpPr>
+        <p:spPr>
+          <a:xfrm>
+            <a:off x="749808" y="1335024"/>
+            <a:ext cx="2743200" cy="274320"/>
+          </a:xfrm>
+          <a:prstGeom prst="rect">
+            <a:avLst/>
+          </a:prstGeom>
+          <a:noFill/>
+          <a:ln/>
+        </p:spPr>
+        <p:txBody>
+          <a:bodyPr wrap="square" lIns="0" tIns="0" rIns="0" bIns="0" rtlCol="0" anchor="ctr"/>
+          <a:lstStyle/>
+          <a:p>
+            <a:pPr indent="0" marL="0">
+              <a:buNone/>
+            </a:pPr>
+            <a:r>
+              <a:rPr lang="en-US" sz="1150" b="1" dirty="0">
+                <a:solidFill>
+                  <a:srgbClr val="1A1A1A"/>
+                </a:solidFill>
+                <a:latin typeface="Calibri" pitchFamily="34" charset="0"/>
+                <a:ea typeface="Calibri" pitchFamily="34" charset="-122"/>
+                <a:cs typeface="Calibri" pitchFamily="34" charset="-120"/>
+              </a:rPr>
+              <a:t>スムージー摂取</a:t>
+            </a:r>
+            <a:endParaRPr lang="en-US" sz="1150" dirty="0"/>
+          </a:p>
+        </p:txBody>
+      </p:sp>
+      <p:sp>
+        <p:nvSpPr>
+          <p:cNvPr id="8" name="Shape 6"/>
+          <p:cNvSpPr/>
+          <p:nvPr/>
+        </p:nvSpPr>
+        <p:spPr>
+          <a:xfrm>
+            <a:off x="4389120" y="1399032"/>
             <a:ext cx="146304" cy="146304"/>
           </a:xfrm>
           <a:prstGeom prst="rect">
@@ -7191,13 +5696,13 @@
       </p:sp>
       <p:sp>
         <p:nvSpPr>
-          <p:cNvPr id="5" name="Text 3"/>
+          <p:cNvPr id="9" name="Text 7"/>
           <p:cNvSpPr txBox="1"/>
           <p:nvPr/>
         </p:nvSpPr>
         <p:spPr>
           <a:xfrm>
-            <a:off x="749808" y="1335024"/>
+            <a:off x="4590288" y="1335024"/>
             <a:ext cx="2743200" cy="274320"/>
           </a:xfrm>
           <a:prstGeom prst="rect">
@@ -7230,66 +5735,7 @@
       </p:sp>
       <p:sp>
         <p:nvSpPr>
-          <p:cNvPr id="6" name="Shape 4"/>
-          <p:cNvSpPr/>
-          <p:nvPr/>
-        </p:nvSpPr>
-        <p:spPr>
-          <a:xfrm>
-            <a:off x="4389120" y="1399032"/>
-            <a:ext cx="146304" cy="146304"/>
-          </a:xfrm>
-          <a:prstGeom prst="rect">
-            <a:avLst/>
-          </a:prstGeom>
-          <a:solidFill>
-            <a:srgbClr val="EDA100"/>
-          </a:solidFill>
-          <a:ln/>
-        </p:spPr>
-      </p:sp>
-      <p:sp>
-        <p:nvSpPr>
-          <p:cNvPr id="7" name="Text 5"/>
-          <p:cNvSpPr txBox="1"/>
-          <p:nvPr/>
-        </p:nvSpPr>
-        <p:spPr>
-          <a:xfrm>
-            <a:off x="4590288" y="1335024"/>
-            <a:ext cx="2743200" cy="274320"/>
-          </a:xfrm>
-          <a:prstGeom prst="rect">
-            <a:avLst/>
-          </a:prstGeom>
-          <a:noFill/>
-          <a:ln/>
-        </p:spPr>
-        <p:txBody>
-          <a:bodyPr wrap="square" lIns="0" tIns="0" rIns="0" bIns="0" rtlCol="0" anchor="ctr"/>
-          <a:lstStyle/>
-          <a:p>
-            <a:pPr indent="0" marL="0">
-              <a:buNone/>
-            </a:pPr>
-            <a:r>
-              <a:rPr lang="en-US" sz="1150" b="1" dirty="0">
-                <a:solidFill>
-                  <a:srgbClr val="1A1A1A"/>
-                </a:solidFill>
-                <a:latin typeface="Calibri" pitchFamily="34" charset="0"/>
-                <a:ea typeface="Calibri" pitchFamily="34" charset="-122"/>
-                <a:cs typeface="Calibri" pitchFamily="34" charset="-120"/>
-              </a:rPr>
-              <a:t>おにぎり＋糖質減</a:t>
-            </a:r>
-            <a:endParaRPr lang="en-US" sz="1150" dirty="0"/>
-          </a:p>
-        </p:txBody>
-      </p:sp>
-      <p:sp>
-        <p:nvSpPr>
-          <p:cNvPr id="8" name="Shape 6"/>
+          <p:cNvPr id="10" name="Shape 8"/>
           <p:cNvSpPr/>
           <p:nvPr/>
         </p:nvSpPr>
@@ -7309,7 +5755,7 @@
       </p:sp>
       <p:sp>
         <p:nvSpPr>
-          <p:cNvPr id="9" name="Text 7"/>
+          <p:cNvPr id="11" name="Text 9"/>
           <p:cNvSpPr txBox="1"/>
           <p:nvPr/>
         </p:nvSpPr>
@@ -7348,7 +5794,7 @@
       </p:sp>
       <p:sp>
         <p:nvSpPr>
-          <p:cNvPr id="10" name="Shape 8"/>
+          <p:cNvPr id="12" name="Shape 10"/>
           <p:cNvSpPr/>
           <p:nvPr/>
         </p:nvSpPr>
@@ -7370,7 +5816,7 @@
       </p:sp>
       <p:sp>
         <p:nvSpPr>
-          <p:cNvPr id="11" name="Text 9"/>
+          <p:cNvPr id="13" name="Text 11"/>
           <p:cNvSpPr txBox="1"/>
           <p:nvPr/>
         </p:nvSpPr>
@@ -7401,7 +5847,7 @@
                 <a:ea typeface="Calibri" pitchFamily="34" charset="-122"/>
                 <a:cs typeface="Calibri" pitchFamily="34" charset="-120"/>
               </a:rPr>
-              <a:t>iAUC 2h (mg/dL・分)</a:t>
+              <a:t>Δピーク血糖値 (mg/dL)</a:t>
             </a:r>
             <a:endParaRPr lang="en-US" sz="1050" dirty="0"/>
           </a:p>
@@ -7409,7 +5855,7 @@
       </p:sp>
       <p:sp>
         <p:nvSpPr>
-          <p:cNvPr id="12" name="Text 10"/>
+          <p:cNvPr id="14" name="Text 12"/>
           <p:cNvSpPr txBox="1"/>
           <p:nvPr/>
         </p:nvSpPr>
@@ -7429,6 +5875,45 @@
           <a:lstStyle/>
           <a:p>
             <a:pPr indent="0" marL="0">
+              <a:buNone/>
+            </a:pPr>
+            <a:r>
+              <a:rPr lang="en-US" sz="1900" b="1" dirty="0">
+                <a:solidFill>
+                  <a:srgbClr val="EB6834"/>
+                </a:solidFill>
+                <a:latin typeface="Cambria" pitchFamily="34" charset="0"/>
+                <a:ea typeface="Cambria" pitchFamily="34" charset="-122"/>
+                <a:cs typeface="Cambria" pitchFamily="34" charset="-120"/>
+              </a:rPr>
+              <a:t>85.0</a:t>
+            </a:r>
+            <a:endParaRPr lang="en-US" sz="1900" dirty="0"/>
+          </a:p>
+        </p:txBody>
+      </p:sp>
+      <p:sp>
+        <p:nvSpPr>
+          <p:cNvPr id="15" name="Text 13"/>
+          <p:cNvSpPr txBox="1"/>
+          <p:nvPr/>
+        </p:nvSpPr>
+        <p:spPr>
+          <a:xfrm>
+            <a:off x="2305812" y="2258568"/>
+            <a:ext cx="1620012" cy="457200"/>
+          </a:xfrm>
+          <a:prstGeom prst="rect">
+            <a:avLst/>
+          </a:prstGeom>
+          <a:noFill/>
+          <a:ln/>
+        </p:spPr>
+        <p:txBody>
+          <a:bodyPr wrap="square" lIns="0" tIns="0" rIns="0" bIns="0" rtlCol="0" anchor="ctr"/>
+          <a:lstStyle/>
+          <a:p>
+            <a:pPr algn="r" indent="0" marL="0">
               <a:buNone/>
             </a:pPr>
             <a:r>
@@ -7440,7 +5925,7 @@
                 <a:ea typeface="Cambria" pitchFamily="34" charset="-122"/>
                 <a:cs typeface="Cambria" pitchFamily="34" charset="-120"/>
               </a:rPr>
-              <a:t>5,230</a:t>
+              <a:t>78.0</a:t>
             </a:r>
             <a:endParaRPr lang="en-US" sz="1900" dirty="0"/>
           </a:p>
@@ -7448,85 +5933,7 @@
       </p:sp>
       <p:sp>
         <p:nvSpPr>
-          <p:cNvPr id="13" name="Text 11"/>
-          <p:cNvSpPr txBox="1"/>
-          <p:nvPr/>
-        </p:nvSpPr>
-        <p:spPr>
-          <a:xfrm>
-            <a:off x="2305812" y="2258568"/>
-            <a:ext cx="1620012" cy="457200"/>
-          </a:xfrm>
-          <a:prstGeom prst="rect">
-            <a:avLst/>
-          </a:prstGeom>
-          <a:noFill/>
-          <a:ln/>
-        </p:spPr>
-        <p:txBody>
-          <a:bodyPr wrap="square" lIns="0" tIns="0" rIns="0" bIns="0" rtlCol="0" anchor="ctr"/>
-          <a:lstStyle/>
-          <a:p>
-            <a:pPr algn="r" indent="0" marL="0">
-              <a:buNone/>
-            </a:pPr>
-            <a:r>
-              <a:rPr lang="en-US" sz="1900" b="1" dirty="0">
-                <a:solidFill>
-                  <a:srgbClr val="EDA100"/>
-                </a:solidFill>
-                <a:latin typeface="Cambria" pitchFamily="34" charset="0"/>
-                <a:ea typeface="Cambria" pitchFamily="34" charset="-122"/>
-                <a:cs typeface="Cambria" pitchFamily="34" charset="-120"/>
-              </a:rPr>
-              <a:t>3,168</a:t>
-            </a:r>
-            <a:endParaRPr lang="en-US" sz="1900" dirty="0"/>
-          </a:p>
-        </p:txBody>
-      </p:sp>
-      <p:sp>
-        <p:nvSpPr>
-          <p:cNvPr id="14" name="Text 12"/>
-          <p:cNvSpPr txBox="1"/>
-          <p:nvPr/>
-        </p:nvSpPr>
-        <p:spPr>
-          <a:xfrm>
-            <a:off x="685800" y="2606040"/>
-            <a:ext cx="3240024" cy="182880"/>
-          </a:xfrm>
-          <a:prstGeom prst="rect">
-            <a:avLst/>
-          </a:prstGeom>
-          <a:noFill/>
-          <a:ln/>
-        </p:spPr>
-        <p:txBody>
-          <a:bodyPr wrap="square" lIns="0" tIns="0" rIns="0" bIns="0" rtlCol="0" anchor="ctr"/>
-          <a:lstStyle/>
-          <a:p>
-            <a:pPr indent="0" marL="0">
-              <a:buNone/>
-            </a:pPr>
-            <a:r>
-              <a:rPr lang="en-US" sz="850" dirty="0">
-                <a:solidFill>
-                  <a:srgbClr val="5C6570"/>
-                </a:solidFill>
-                <a:latin typeface="Calibri" pitchFamily="34" charset="0"/>
-                <a:ea typeface="Calibri" pitchFamily="34" charset="-122"/>
-                <a:cs typeface="Calibri" pitchFamily="34" charset="-120"/>
-              </a:rPr>
-              <a:t>糖質減で約39%減</a:t>
-            </a:r>
-            <a:endParaRPr lang="en-US" sz="850" dirty="0"/>
-          </a:p>
-        </p:txBody>
-      </p:sp>
-      <p:sp>
-        <p:nvSpPr>
-          <p:cNvPr id="15" name="Shape 13"/>
+          <p:cNvPr id="16" name="Shape 14"/>
           <p:cNvSpPr/>
           <p:nvPr/>
         </p:nvSpPr>
@@ -7548,7 +5955,7 @@
       </p:sp>
       <p:sp>
         <p:nvSpPr>
-          <p:cNvPr id="16" name="Text 14"/>
+          <p:cNvPr id="17" name="Text 15"/>
           <p:cNvSpPr txBox="1"/>
           <p:nvPr/>
         </p:nvSpPr>
@@ -7587,7 +5994,7 @@
       </p:sp>
       <p:sp>
         <p:nvSpPr>
-          <p:cNvPr id="17" name="Text 15"/>
+          <p:cNvPr id="18" name="Text 16"/>
           <p:cNvSpPr txBox="1"/>
           <p:nvPr/>
         </p:nvSpPr>
@@ -7607,6 +6014,45 @@
           <a:lstStyle/>
           <a:p>
             <a:pPr indent="0" marL="0">
+              <a:buNone/>
+            </a:pPr>
+            <a:r>
+              <a:rPr lang="en-US" sz="1900" b="1" dirty="0">
+                <a:solidFill>
+                  <a:srgbClr val="EB6834"/>
+                </a:solidFill>
+                <a:latin typeface="Cambria" pitchFamily="34" charset="0"/>
+                <a:ea typeface="Cambria" pitchFamily="34" charset="-122"/>
+                <a:cs typeface="Cambria" pitchFamily="34" charset="-120"/>
+              </a:rPr>
+              <a:t>14.7%</a:t>
+            </a:r>
+            <a:endParaRPr lang="en-US" sz="1900" dirty="0"/>
+          </a:p>
+        </p:txBody>
+      </p:sp>
+      <p:sp>
+        <p:nvSpPr>
+          <p:cNvPr id="19" name="Text 17"/>
+          <p:cNvSpPr txBox="1"/>
+          <p:nvPr/>
+        </p:nvSpPr>
+        <p:spPr>
+          <a:xfrm>
+            <a:off x="6094476" y="2258568"/>
+            <a:ext cx="1620012" cy="457200"/>
+          </a:xfrm>
+          <a:prstGeom prst="rect">
+            <a:avLst/>
+          </a:prstGeom>
+          <a:noFill/>
+          <a:ln/>
+        </p:spPr>
+        <p:txBody>
+          <a:bodyPr wrap="square" lIns="0" tIns="0" rIns="0" bIns="0" rtlCol="0" anchor="ctr"/>
+          <a:lstStyle/>
+          <a:p>
+            <a:pPr algn="r" indent="0" marL="0">
               <a:buNone/>
             </a:pPr>
             <a:r>
@@ -7626,46 +6072,7 @@
       </p:sp>
       <p:sp>
         <p:nvSpPr>
-          <p:cNvPr id="18" name="Text 16"/>
-          <p:cNvSpPr txBox="1"/>
-          <p:nvPr/>
-        </p:nvSpPr>
-        <p:spPr>
-          <a:xfrm>
-            <a:off x="6094476" y="2258568"/>
-            <a:ext cx="1620012" cy="457200"/>
-          </a:xfrm>
-          <a:prstGeom prst="rect">
-            <a:avLst/>
-          </a:prstGeom>
-          <a:noFill/>
-          <a:ln/>
-        </p:spPr>
-        <p:txBody>
-          <a:bodyPr wrap="square" lIns="0" tIns="0" rIns="0" bIns="0" rtlCol="0" anchor="ctr"/>
-          <a:lstStyle/>
-          <a:p>
-            <a:pPr algn="r" indent="0" marL="0">
-              <a:buNone/>
-            </a:pPr>
-            <a:r>
-              <a:rPr lang="en-US" sz="1900" b="1" dirty="0">
-                <a:solidFill>
-                  <a:srgbClr val="EDA100"/>
-                </a:solidFill>
-                <a:latin typeface="Cambria" pitchFamily="34" charset="0"/>
-                <a:ea typeface="Cambria" pitchFamily="34" charset="-122"/>
-                <a:cs typeface="Cambria" pitchFamily="34" charset="-120"/>
-              </a:rPr>
-              <a:t>11.8%</a:t>
-            </a:r>
-            <a:endParaRPr lang="en-US" sz="1900" dirty="0"/>
-          </a:p>
-        </p:txBody>
-      </p:sp>
-      <p:sp>
-        <p:nvSpPr>
-          <p:cNvPr id="19" name="Shape 17"/>
+          <p:cNvPr id="20" name="Shape 18"/>
           <p:cNvSpPr/>
           <p:nvPr/>
         </p:nvSpPr>
@@ -7687,7 +6094,7 @@
       </p:sp>
       <p:sp>
         <p:nvSpPr>
-          <p:cNvPr id="20" name="Text 18"/>
+          <p:cNvPr id="21" name="Text 19"/>
           <p:cNvSpPr txBox="1"/>
           <p:nvPr/>
         </p:nvSpPr>
@@ -7726,7 +6133,7 @@
       </p:sp>
       <p:sp>
         <p:nvSpPr>
-          <p:cNvPr id="21" name="Text 19"/>
+          <p:cNvPr id="22" name="Text 20"/>
           <p:cNvSpPr txBox="1"/>
           <p:nvPr/>
         </p:nvSpPr>
@@ -7746,6 +6153,45 @@
           <a:lstStyle/>
           <a:p>
             <a:pPr indent="0" marL="0">
+              <a:buNone/>
+            </a:pPr>
+            <a:r>
+              <a:rPr lang="en-US" sz="1900" b="1" dirty="0">
+                <a:solidFill>
+                  <a:srgbClr val="EB6834"/>
+                </a:solidFill>
+                <a:latin typeface="Cambria" pitchFamily="34" charset="0"/>
+                <a:ea typeface="Cambria" pitchFamily="34" charset="-122"/>
+                <a:cs typeface="Cambria" pitchFamily="34" charset="-120"/>
+              </a:rPr>
+              <a:t>222.1</a:t>
+            </a:r>
+            <a:endParaRPr lang="en-US" sz="1900" dirty="0"/>
+          </a:p>
+        </p:txBody>
+      </p:sp>
+      <p:sp>
+        <p:nvSpPr>
+          <p:cNvPr id="23" name="Text 21"/>
+          <p:cNvSpPr txBox="1"/>
+          <p:nvPr/>
+        </p:nvSpPr>
+        <p:spPr>
+          <a:xfrm>
+            <a:off x="9883140" y="2258568"/>
+            <a:ext cx="1620012" cy="457200"/>
+          </a:xfrm>
+          <a:prstGeom prst="rect">
+            <a:avLst/>
+          </a:prstGeom>
+          <a:noFill/>
+          <a:ln/>
+        </p:spPr>
+        <p:txBody>
+          <a:bodyPr wrap="square" lIns="0" tIns="0" rIns="0" bIns="0" rtlCol="0" anchor="ctr"/>
+          <a:lstStyle/>
+          <a:p>
+            <a:pPr algn="r" indent="0" marL="0">
               <a:buNone/>
             </a:pPr>
             <a:r>
@@ -7765,46 +6211,7 @@
       </p:sp>
       <p:sp>
         <p:nvSpPr>
-          <p:cNvPr id="22" name="Text 20"/>
-          <p:cNvSpPr txBox="1"/>
-          <p:nvPr/>
-        </p:nvSpPr>
-        <p:spPr>
-          <a:xfrm>
-            <a:off x="9883140" y="2258568"/>
-            <a:ext cx="1620012" cy="457200"/>
-          </a:xfrm>
-          <a:prstGeom prst="rect">
-            <a:avLst/>
-          </a:prstGeom>
-          <a:noFill/>
-          <a:ln/>
-        </p:spPr>
-        <p:txBody>
-          <a:bodyPr wrap="square" lIns="0" tIns="0" rIns="0" bIns="0" rtlCol="0" anchor="ctr"/>
-          <a:lstStyle/>
-          <a:p>
-            <a:pPr algn="r" indent="0" marL="0">
-              <a:buNone/>
-            </a:pPr>
-            <a:r>
-              <a:rPr lang="en-US" sz="1900" b="1" dirty="0">
-                <a:solidFill>
-                  <a:srgbClr val="EDA100"/>
-                </a:solidFill>
-                <a:latin typeface="Cambria" pitchFamily="34" charset="0"/>
-                <a:ea typeface="Cambria" pitchFamily="34" charset="-122"/>
-                <a:cs typeface="Cambria" pitchFamily="34" charset="-120"/>
-              </a:rPr>
-              <a:t>229.4</a:t>
-            </a:r>
-            <a:endParaRPr lang="en-US" sz="1900" dirty="0"/>
-          </a:p>
-        </p:txBody>
-      </p:sp>
-      <p:sp>
-        <p:nvSpPr>
-          <p:cNvPr id="23" name="Text 21"/>
+          <p:cNvPr id="24" name="Text 22"/>
           <p:cNvSpPr txBox="1"/>
           <p:nvPr/>
         </p:nvSpPr>
@@ -7835,7 +6242,7 @@
                 <a:ea typeface="Calibri" pitchFamily="34" charset="-122"/>
                 <a:cs typeface="Calibri" pitchFamily="34" charset="-120"/>
               </a:rPr>
-              <a:t>糖質減の方がむしろ高い</a:t>
+              <a:t>ほぼ同水準（燃料供給は同等）</a:t>
             </a:r>
             <a:endParaRPr lang="en-US" sz="850" dirty="0"/>
           </a:p>
@@ -7843,7 +6250,7 @@
       </p:sp>
       <p:sp>
         <p:nvSpPr>
-          <p:cNvPr id="24" name="Shape 22"/>
+          <p:cNvPr id="25" name="Shape 23"/>
           <p:cNvSpPr/>
           <p:nvPr/>
         </p:nvSpPr>
@@ -7863,7 +6270,7 @@
       </p:sp>
       <p:sp>
         <p:nvSpPr>
-          <p:cNvPr id="25" name="Text 23"/>
+          <p:cNvPr id="26" name="Text 24"/>
           <p:cNvSpPr txBox="1"/>
           <p:nvPr/>
         </p:nvSpPr>
@@ -7902,7 +6309,7 @@
       </p:sp>
       <p:sp>
         <p:nvSpPr>
-          <p:cNvPr id="26" name="Shape 24"/>
+          <p:cNvPr id="27" name="Shape 25"/>
           <p:cNvSpPr/>
           <p:nvPr/>
         </p:nvSpPr>
@@ -7924,7 +6331,7 @@
       </p:sp>
       <p:sp>
         <p:nvSpPr>
-          <p:cNvPr id="27" name="Text 25"/>
+          <p:cNvPr id="28" name="Text 26"/>
           <p:cNvSpPr txBox="1"/>
           <p:nvPr/>
         </p:nvSpPr>
@@ -7963,7 +6370,7 @@
       </p:sp>
       <p:sp>
         <p:nvSpPr>
-          <p:cNvPr id="28" name="Text 26"/>
+          <p:cNvPr id="29" name="Text 27"/>
           <p:cNvSpPr txBox="1"/>
           <p:nvPr/>
         </p:nvSpPr>
@@ -7983,6 +6390,45 @@
           <a:lstStyle/>
           <a:p>
             <a:pPr indent="0" marL="0">
+              <a:buNone/>
+            </a:pPr>
+            <a:r>
+              <a:rPr lang="en-US" sz="1900" b="1" dirty="0">
+                <a:solidFill>
+                  <a:srgbClr val="EB6834"/>
+                </a:solidFill>
+                <a:latin typeface="Cambria" pitchFamily="34" charset="0"/>
+                <a:ea typeface="Cambria" pitchFamily="34" charset="-122"/>
+                <a:cs typeface="Cambria" pitchFamily="34" charset="-120"/>
+              </a:rPr>
+              <a:t>3.67</a:t>
+            </a:r>
+            <a:endParaRPr lang="en-US" sz="1900" dirty="0"/>
+          </a:p>
+        </p:txBody>
+      </p:sp>
+      <p:sp>
+        <p:nvSpPr>
+          <p:cNvPr id="30" name="Text 28"/>
+          <p:cNvSpPr txBox="1"/>
+          <p:nvPr/>
+        </p:nvSpPr>
+        <p:spPr>
+          <a:xfrm>
+            <a:off x="2305812" y="3538728"/>
+            <a:ext cx="1620012" cy="457200"/>
+          </a:xfrm>
+          <a:prstGeom prst="rect">
+            <a:avLst/>
+          </a:prstGeom>
+          <a:noFill/>
+          <a:ln/>
+        </p:spPr>
+        <p:txBody>
+          <a:bodyPr wrap="square" lIns="0" tIns="0" rIns="0" bIns="0" rtlCol="0" anchor="ctr"/>
+          <a:lstStyle/>
+          <a:p>
+            <a:pPr algn="r" indent="0" marL="0">
               <a:buNone/>
             </a:pPr>
             <a:r>
@@ -8002,46 +6448,7 @@
       </p:sp>
       <p:sp>
         <p:nvSpPr>
-          <p:cNvPr id="29" name="Text 27"/>
-          <p:cNvSpPr txBox="1"/>
-          <p:nvPr/>
-        </p:nvSpPr>
-        <p:spPr>
-          <a:xfrm>
-            <a:off x="2305812" y="3538728"/>
-            <a:ext cx="1620012" cy="457200"/>
-          </a:xfrm>
-          <a:prstGeom prst="rect">
-            <a:avLst/>
-          </a:prstGeom>
-          <a:noFill/>
-          <a:ln/>
-        </p:spPr>
-        <p:txBody>
-          <a:bodyPr wrap="square" lIns="0" tIns="0" rIns="0" bIns="0" rtlCol="0" anchor="ctr"/>
-          <a:lstStyle/>
-          <a:p>
-            <a:pPr algn="r" indent="0" marL="0">
-              <a:buNone/>
-            </a:pPr>
-            <a:r>
-              <a:rPr lang="en-US" sz="1900" b="1" dirty="0">
-                <a:solidFill>
-                  <a:srgbClr val="EDA100"/>
-                </a:solidFill>
-                <a:latin typeface="Cambria" pitchFamily="34" charset="0"/>
-                <a:ea typeface="Cambria" pitchFamily="34" charset="-122"/>
-                <a:cs typeface="Cambria" pitchFamily="34" charset="-120"/>
-              </a:rPr>
-              <a:t>9.00</a:t>
-            </a:r>
-            <a:endParaRPr lang="en-US" sz="1900" dirty="0"/>
-          </a:p>
-        </p:txBody>
-      </p:sp>
-      <p:sp>
-        <p:nvSpPr>
-          <p:cNvPr id="30" name="Shape 28"/>
+          <p:cNvPr id="31" name="Shape 29"/>
           <p:cNvSpPr/>
           <p:nvPr/>
         </p:nvSpPr>
@@ -8063,7 +6470,7 @@
       </p:sp>
       <p:sp>
         <p:nvSpPr>
-          <p:cNvPr id="31" name="Text 29"/>
+          <p:cNvPr id="32" name="Text 30"/>
           <p:cNvSpPr txBox="1"/>
           <p:nvPr/>
         </p:nvSpPr>
@@ -8102,7 +6509,7 @@
       </p:sp>
       <p:sp>
         <p:nvSpPr>
-          <p:cNvPr id="32" name="Text 30"/>
+          <p:cNvPr id="33" name="Text 31"/>
           <p:cNvSpPr txBox="1"/>
           <p:nvPr/>
         </p:nvSpPr>
@@ -8122,6 +6529,45 @@
           <a:lstStyle/>
           <a:p>
             <a:pPr indent="0" marL="0">
+              <a:buNone/>
+            </a:pPr>
+            <a:r>
+              <a:rPr lang="en-US" sz="1900" b="1" dirty="0">
+                <a:solidFill>
+                  <a:srgbClr val="EB6834"/>
+                </a:solidFill>
+                <a:latin typeface="Cambria" pitchFamily="34" charset="0"/>
+                <a:ea typeface="Cambria" pitchFamily="34" charset="-122"/>
+                <a:cs typeface="Cambria" pitchFamily="34" charset="-120"/>
+              </a:rPr>
+              <a:t>8.67</a:t>
+            </a:r>
+            <a:endParaRPr lang="en-US" sz="1900" dirty="0"/>
+          </a:p>
+        </p:txBody>
+      </p:sp>
+      <p:sp>
+        <p:nvSpPr>
+          <p:cNvPr id="34" name="Text 32"/>
+          <p:cNvSpPr txBox="1"/>
+          <p:nvPr/>
+        </p:nvSpPr>
+        <p:spPr>
+          <a:xfrm>
+            <a:off x="6094476" y="3538728"/>
+            <a:ext cx="1620012" cy="457200"/>
+          </a:xfrm>
+          <a:prstGeom prst="rect">
+            <a:avLst/>
+          </a:prstGeom>
+          <a:noFill/>
+          <a:ln/>
+        </p:spPr>
+        <p:txBody>
+          <a:bodyPr wrap="square" lIns="0" tIns="0" rIns="0" bIns="0" rtlCol="0" anchor="ctr"/>
+          <a:lstStyle/>
+          <a:p>
+            <a:pPr algn="r" indent="0" marL="0">
               <a:buNone/>
             </a:pPr>
             <a:r>
@@ -8141,46 +6587,7 @@
       </p:sp>
       <p:sp>
         <p:nvSpPr>
-          <p:cNvPr id="33" name="Text 31"/>
-          <p:cNvSpPr txBox="1"/>
-          <p:nvPr/>
-        </p:nvSpPr>
-        <p:spPr>
-          <a:xfrm>
-            <a:off x="6094476" y="3538728"/>
-            <a:ext cx="1620012" cy="457200"/>
-          </a:xfrm>
-          <a:prstGeom prst="rect">
-            <a:avLst/>
-          </a:prstGeom>
-          <a:noFill/>
-          <a:ln/>
-        </p:spPr>
-        <p:txBody>
-          <a:bodyPr wrap="square" lIns="0" tIns="0" rIns="0" bIns="0" rtlCol="0" anchor="ctr"/>
-          <a:lstStyle/>
-          <a:p>
-            <a:pPr algn="r" indent="0" marL="0">
-              <a:buNone/>
-            </a:pPr>
-            <a:r>
-              <a:rPr lang="en-US" sz="1900" b="1" dirty="0">
-                <a:solidFill>
-                  <a:srgbClr val="EDA100"/>
-                </a:solidFill>
-                <a:latin typeface="Cambria" pitchFamily="34" charset="0"/>
-                <a:ea typeface="Cambria" pitchFamily="34" charset="-122"/>
-                <a:cs typeface="Cambria" pitchFamily="34" charset="-120"/>
-              </a:rPr>
-              <a:t>5.33</a:t>
-            </a:r>
-            <a:endParaRPr lang="en-US" sz="1900" dirty="0"/>
-          </a:p>
-        </p:txBody>
-      </p:sp>
-      <p:sp>
-        <p:nvSpPr>
-          <p:cNvPr id="34" name="Shape 32"/>
+          <p:cNvPr id="35" name="Shape 33"/>
           <p:cNvSpPr/>
           <p:nvPr/>
         </p:nvSpPr>
@@ -8202,7 +6609,7 @@
       </p:sp>
       <p:sp>
         <p:nvSpPr>
-          <p:cNvPr id="35" name="Text 33"/>
+          <p:cNvPr id="36" name="Text 34"/>
           <p:cNvSpPr txBox="1"/>
           <p:nvPr/>
         </p:nvSpPr>
@@ -8241,7 +6648,7 @@
       </p:sp>
       <p:sp>
         <p:nvSpPr>
-          <p:cNvPr id="36" name="Text 34"/>
+          <p:cNvPr id="37" name="Text 35"/>
           <p:cNvSpPr txBox="1"/>
           <p:nvPr/>
         </p:nvSpPr>
@@ -8261,6 +6668,45 @@
           <a:lstStyle/>
           <a:p>
             <a:pPr indent="0" marL="0">
+              <a:buNone/>
+            </a:pPr>
+            <a:r>
+              <a:rPr lang="en-US" sz="1900" b="1" dirty="0">
+                <a:solidFill>
+                  <a:srgbClr val="EB6834"/>
+                </a:solidFill>
+                <a:latin typeface="Cambria" pitchFamily="34" charset="0"/>
+                <a:ea typeface="Cambria" pitchFamily="34" charset="-122"/>
+                <a:cs typeface="Cambria" pitchFamily="34" charset="-120"/>
+              </a:rPr>
+              <a:t>1・1</a:t>
+            </a:r>
+            <a:endParaRPr lang="en-US" sz="1900" dirty="0"/>
+          </a:p>
+        </p:txBody>
+      </p:sp>
+      <p:sp>
+        <p:nvSpPr>
+          <p:cNvPr id="38" name="Text 36"/>
+          <p:cNvSpPr txBox="1"/>
+          <p:nvPr/>
+        </p:nvSpPr>
+        <p:spPr>
+          <a:xfrm>
+            <a:off x="9883140" y="3538728"/>
+            <a:ext cx="1620012" cy="457200"/>
+          </a:xfrm>
+          <a:prstGeom prst="rect">
+            <a:avLst/>
+          </a:prstGeom>
+          <a:noFill/>
+          <a:ln/>
+        </p:spPr>
+        <p:txBody>
+          <a:bodyPr wrap="square" lIns="0" tIns="0" rIns="0" bIns="0" rtlCol="0" anchor="ctr"/>
+          <a:lstStyle/>
+          <a:p>
+            <a:pPr algn="r" indent="0" marL="0">
               <a:buNone/>
             </a:pPr>
             <a:r>
@@ -8280,46 +6726,7 @@
       </p:sp>
       <p:sp>
         <p:nvSpPr>
-          <p:cNvPr id="37" name="Text 35"/>
-          <p:cNvSpPr txBox="1"/>
-          <p:nvPr/>
-        </p:nvSpPr>
-        <p:spPr>
-          <a:xfrm>
-            <a:off x="9883140" y="3538728"/>
-            <a:ext cx="1620012" cy="457200"/>
-          </a:xfrm>
-          <a:prstGeom prst="rect">
-            <a:avLst/>
-          </a:prstGeom>
-          <a:noFill/>
-          <a:ln/>
-        </p:spPr>
-        <p:txBody>
-          <a:bodyPr wrap="square" lIns="0" tIns="0" rIns="0" bIns="0" rtlCol="0" anchor="ctr"/>
-          <a:lstStyle/>
-          <a:p>
-            <a:pPr algn="r" indent="0" marL="0">
-              <a:buNone/>
-            </a:pPr>
-            <a:r>
-              <a:rPr lang="en-US" sz="1900" b="1" dirty="0">
-                <a:solidFill>
-                  <a:srgbClr val="EDA100"/>
-                </a:solidFill>
-                <a:latin typeface="Cambria" pitchFamily="34" charset="0"/>
-                <a:ea typeface="Cambria" pitchFamily="34" charset="-122"/>
-                <a:cs typeface="Cambria" pitchFamily="34" charset="-120"/>
-              </a:rPr>
-              <a:t>1・1</a:t>
-            </a:r>
-            <a:endParaRPr lang="en-US" sz="1900" dirty="0"/>
-          </a:p>
-        </p:txBody>
-      </p:sp>
-      <p:sp>
-        <p:nvSpPr>
-          <p:cNvPr id="38" name="Shape 36"/>
+          <p:cNvPr id="39" name="Shape 37"/>
           <p:cNvSpPr/>
           <p:nvPr/>
         </p:nvSpPr>
@@ -8339,7 +6746,7 @@
       </p:sp>
       <p:sp>
         <p:nvSpPr>
-          <p:cNvPr id="39" name="Text 37"/>
+          <p:cNvPr id="40" name="Text 38"/>
           <p:cNvSpPr txBox="1"/>
           <p:nvPr/>
         </p:nvSpPr>
@@ -8478,7 +6885,7 @@
                           <a:ea typeface="Calibri" pitchFamily="34" charset="-122"/>
                           <a:cs typeface="Calibri" pitchFamily="34" charset="-120"/>
                         </a:rPr>
-                        <a:t>おにぎり＋スムージー</a:t>
+                        <a:t>スムージー摂取</a:t>
                       </a:r>
                       <a:endParaRPr lang="en-US" sz="1050" dirty="0">
                         <a:latin typeface="Calibri" charset="0"/>
@@ -8546,7 +6953,7 @@
                           <a:ea typeface="Calibri" pitchFamily="34" charset="-122"/>
                           <a:cs typeface="Calibri" pitchFamily="34" charset="-120"/>
                         </a:rPr>
-                        <a:t>おにぎり＋糖質減</a:t>
+                        <a:t>おにぎり＋スムージー</a:t>
                       </a:r>
                       <a:endParaRPr lang="en-US" sz="1050" dirty="0">
                         <a:latin typeface="Calibri" charset="0"/>
@@ -8752,7 +7159,7 @@
                           <a:ea typeface="Calibri" pitchFamily="34" charset="-122"/>
                           <a:cs typeface="Calibri" pitchFamily="34" charset="-120"/>
                         </a:rPr>
-                        <a:t>2.67</a:t>
+                        <a:t>2.33</a:t>
                       </a:r>
                       <a:endParaRPr lang="en-US" sz="1050" dirty="0">
                         <a:latin typeface="Calibri" charset="0"/>
@@ -8958,7 +7365,7 @@
                           <a:ea typeface="Calibri" pitchFamily="34" charset="-122"/>
                           <a:cs typeface="Calibri" pitchFamily="34" charset="-120"/>
                         </a:rPr>
-                        <a:t>2.67</a:t>
+                        <a:t>2.00</a:t>
                       </a:r>
                       <a:endParaRPr lang="en-US" sz="1050" dirty="0">
                         <a:latin typeface="Calibri" charset="0"/>
@@ -9096,7 +7503,7 @@
                           <a:ea typeface="Calibri" pitchFamily="34" charset="-122"/>
                           <a:cs typeface="Calibri" pitchFamily="34" charset="-120"/>
                         </a:rPr>
-                        <a:t>5.50</a:t>
+                        <a:t>5.67</a:t>
                       </a:r>
                       <a:endParaRPr lang="en-US" sz="1050" dirty="0">
                         <a:latin typeface="Calibri" charset="0"/>
@@ -9164,7 +7571,7 @@
                           <a:ea typeface="Calibri" pitchFamily="34" charset="-122"/>
                           <a:cs typeface="Calibri" pitchFamily="34" charset="-120"/>
                         </a:rPr>
-                        <a:t>6.33</a:t>
+                        <a:t>5.50</a:t>
                       </a:r>
                       <a:endParaRPr lang="en-US" sz="1050" dirty="0">
                         <a:latin typeface="Calibri" charset="0"/>
@@ -9302,7 +7709,7 @@
                           <a:ea typeface="Calibri" pitchFamily="34" charset="-122"/>
                           <a:cs typeface="Calibri" pitchFamily="34" charset="-120"/>
                         </a:rPr>
-                        <a:t>3.83</a:t>
+                        <a:t>3.67</a:t>
                       </a:r>
                       <a:endParaRPr lang="en-US" sz="1050" dirty="0">
                         <a:latin typeface="Calibri" charset="0"/>
@@ -9370,7 +7777,7 @@
                           <a:ea typeface="Calibri" pitchFamily="34" charset="-122"/>
                           <a:cs typeface="Calibri" pitchFamily="34" charset="-120"/>
                         </a:rPr>
-                        <a:t>2.33</a:t>
+                        <a:t>3.83</a:t>
                       </a:r>
                       <a:endParaRPr lang="en-US" sz="1050" dirty="0">
                         <a:latin typeface="Calibri" charset="0"/>
@@ -9508,7 +7915,7 @@
                           <a:ea typeface="Calibri" pitchFamily="34" charset="-122"/>
                           <a:cs typeface="Calibri" pitchFamily="34" charset="-120"/>
                         </a:rPr>
-                        <a:t>3.50</a:t>
+                        <a:t>3.67</a:t>
                       </a:r>
                       <a:endParaRPr lang="en-US" sz="1050" dirty="0">
                         <a:latin typeface="Calibri" charset="0"/>
@@ -9576,7 +7983,7 @@
                           <a:ea typeface="Calibri" pitchFamily="34" charset="-122"/>
                           <a:cs typeface="Calibri" pitchFamily="34" charset="-120"/>
                         </a:rPr>
-                        <a:t>3.33</a:t>
+                        <a:t>3.50</a:t>
                       </a:r>
                       <a:endParaRPr lang="en-US" sz="1050" dirty="0">
                         <a:latin typeface="Calibri" charset="0"/>
@@ -9714,6 +8121,2951 @@
                           <a:ea typeface="Calibri" pitchFamily="34" charset="-122"/>
                           <a:cs typeface="Calibri" pitchFamily="34" charset="-120"/>
                         </a:rPr>
+                        <a:t>2.67</a:t>
+                      </a:r>
+                      <a:endParaRPr lang="en-US" sz="1050" dirty="0">
+                        <a:latin typeface="Calibri" charset="0"/>
+                        <a:ea typeface="Calibri" charset="0"/>
+                        <a:cs typeface="Calibri" charset="0"/>
+                      </a:endParaRPr>
+                    </a:p>
+                  </a:txBody>
+                  <a:tcPr marL="91440" marR="91440" marT="45720" marB="45720" anchor="ctr">
+                    <a:lnL w="6350" cap="flat" cmpd="sng" algn="ctr">
+                      <a:solidFill>
+                        <a:srgbClr val="E3E1DB"/>
+                      </a:solidFill>
+                      <a:prstDash val="solid"/>
+                      <a:round/>
+                      <a:headEnd type="none" w="med" len="med"/>
+                      <a:tailEnd type="none" w="med" len="med"/>
+                    </a:lnL>
+                    <a:lnR w="6350" cap="flat" cmpd="sng" algn="ctr">
+                      <a:solidFill>
+                        <a:srgbClr val="E3E1DB"/>
+                      </a:solidFill>
+                      <a:prstDash val="solid"/>
+                      <a:round/>
+                      <a:headEnd type="none" w="med" len="med"/>
+                      <a:tailEnd type="none" w="med" len="med"/>
+                    </a:lnR>
+                    <a:lnT w="6350" cap="flat" cmpd="sng" algn="ctr">
+                      <a:solidFill>
+                        <a:srgbClr val="E3E1DB"/>
+                      </a:solidFill>
+                      <a:prstDash val="solid"/>
+                      <a:round/>
+                      <a:headEnd type="none" w="med" len="med"/>
+                      <a:tailEnd type="none" w="med" len="med"/>
+                    </a:lnT>
+                    <a:lnB w="6350" cap="flat" cmpd="sng" algn="ctr">
+                      <a:solidFill>
+                        <a:srgbClr val="E3E1DB"/>
+                      </a:solidFill>
+                      <a:prstDash val="solid"/>
+                      <a:round/>
+                      <a:headEnd type="none" w="med" len="med"/>
+                      <a:tailEnd type="none" w="med" len="med"/>
+                    </a:lnB>
+                    <a:solidFill>
+                      <a:srgbClr val="FFFFFF"/>
+                    </a:solidFill>
+                  </a:tcPr>
+                </a:tc>
+                <a:tc>
+                  <a:txBody>
+                    <a:bodyPr/>
+                    <a:lstStyle/>
+                    <a:p>
+                      <a:pPr indent="0" marL="0">
+                        <a:buNone/>
+                      </a:pPr>
+                      <a:r>
+                        <a:rPr lang="en-US" sz="1050" dirty="0">
+                          <a:solidFill>
+                            <a:srgbClr val="1A1A1A"/>
+                          </a:solidFill>
+                          <a:latin typeface="Calibri" pitchFamily="34" charset="0"/>
+                          <a:ea typeface="Calibri" pitchFamily="34" charset="-122"/>
+                          <a:cs typeface="Calibri" pitchFamily="34" charset="-120"/>
+                        </a:rPr>
+                        <a:t>3.17</a:t>
+                      </a:r>
+                      <a:endParaRPr lang="en-US" sz="1050" dirty="0">
+                        <a:latin typeface="Calibri" charset="0"/>
+                        <a:ea typeface="Calibri" charset="0"/>
+                        <a:cs typeface="Calibri" charset="0"/>
+                      </a:endParaRPr>
+                    </a:p>
+                  </a:txBody>
+                  <a:tcPr marL="91440" marR="91440" marT="45720" marB="45720" anchor="ctr">
+                    <a:lnL w="6350" cap="flat" cmpd="sng" algn="ctr">
+                      <a:solidFill>
+                        <a:srgbClr val="E3E1DB"/>
+                      </a:solidFill>
+                      <a:prstDash val="solid"/>
+                      <a:round/>
+                      <a:headEnd type="none" w="med" len="med"/>
+                      <a:tailEnd type="none" w="med" len="med"/>
+                    </a:lnL>
+                    <a:lnR w="6350" cap="flat" cmpd="sng" algn="ctr">
+                      <a:solidFill>
+                        <a:srgbClr val="E3E1DB"/>
+                      </a:solidFill>
+                      <a:prstDash val="solid"/>
+                      <a:round/>
+                      <a:headEnd type="none" w="med" len="med"/>
+                      <a:tailEnd type="none" w="med" len="med"/>
+                    </a:lnR>
+                    <a:lnT w="6350" cap="flat" cmpd="sng" algn="ctr">
+                      <a:solidFill>
+                        <a:srgbClr val="E3E1DB"/>
+                      </a:solidFill>
+                      <a:prstDash val="solid"/>
+                      <a:round/>
+                      <a:headEnd type="none" w="med" len="med"/>
+                      <a:tailEnd type="none" w="med" len="med"/>
+                    </a:lnT>
+                    <a:lnB w="6350" cap="flat" cmpd="sng" algn="ctr">
+                      <a:solidFill>
+                        <a:srgbClr val="E3E1DB"/>
+                      </a:solidFill>
+                      <a:prstDash val="solid"/>
+                      <a:round/>
+                      <a:headEnd type="none" w="med" len="med"/>
+                      <a:tailEnd type="none" w="med" len="med"/>
+                    </a:lnB>
+                    <a:solidFill>
+                      <a:srgbClr val="FFFFFF"/>
+                    </a:solidFill>
+                  </a:tcPr>
+                </a:tc>
+              </a:tr>
+            </a:tbl>
+          </a:graphicData>
+        </a:graphic>
+      </p:graphicFrame>
+      <p:sp>
+        <p:nvSpPr>
+          <p:cNvPr id="42" name="Text 39"/>
+          <p:cNvSpPr txBox="1"/>
+          <p:nvPr/>
+        </p:nvSpPr>
+        <p:spPr>
+          <a:xfrm>
+            <a:off x="7772400" y="4526280"/>
+            <a:ext cx="4416552" cy="1280160"/>
+          </a:xfrm>
+          <a:prstGeom prst="rect">
+            <a:avLst/>
+          </a:prstGeom>
+          <a:noFill/>
+          <a:ln/>
+        </p:spPr>
+        <p:txBody>
+          <a:bodyPr wrap="square" lIns="0" tIns="0" rIns="0" bIns="0" rtlCol="0" anchor="ctr"/>
+          <a:lstStyle/>
+          <a:p>
+            <a:pPr indent="0" marL="0">
+              <a:buNone/>
+            </a:pPr>
+            <a:r>
+              <a:rPr lang="en-US" sz="1000" i="1" dirty="0">
+                <a:solidFill>
+                  <a:srgbClr val="5C6570"/>
+                </a:solidFill>
+                <a:latin typeface="Calibri" pitchFamily="34" charset="0"/>
+                <a:ea typeface="Calibri" pitchFamily="34" charset="-122"/>
+                <a:cs typeface="Calibri" pitchFamily="34" charset="-120"/>
+              </a:rPr>
+              <a:t>練習時間はスムージー60分/日・おにぎり+スムージー80分/日とやや近く、①よりは比較しやすい。起床時コンディション・睡眠の質は同水準。</a:t>
+            </a:r>
+            <a:endParaRPr lang="en-US" sz="1000" dirty="0"/>
+          </a:p>
+        </p:txBody>
+      </p:sp>
+      <p:sp>
+        <p:nvSpPr>
+          <p:cNvPr id="43" name="Shape 40"/>
+          <p:cNvSpPr/>
+          <p:nvPr/>
+        </p:nvSpPr>
+        <p:spPr>
+          <a:xfrm>
+            <a:off x="548640" y="5852160"/>
+            <a:ext cx="11091672" cy="868680"/>
+          </a:xfrm>
+          <a:prstGeom prst="roundRect">
+            <a:avLst>
+              <a:gd name="adj" fmla="val 10526"/>
+            </a:avLst>
+          </a:prstGeom>
+          <a:solidFill>
+            <a:srgbClr val="EAF7F0"/>
+          </a:solidFill>
+          <a:ln/>
+        </p:spPr>
+      </p:sp>
+      <p:sp>
+        <p:nvSpPr>
+          <p:cNvPr id="44" name="Text 41"/>
+          <p:cNvSpPr txBox="1"/>
+          <p:nvPr/>
+        </p:nvSpPr>
+        <p:spPr>
+          <a:xfrm>
+            <a:off x="777240" y="5907024"/>
+            <a:ext cx="10634472" cy="758952"/>
+          </a:xfrm>
+          <a:prstGeom prst="rect">
+            <a:avLst/>
+          </a:prstGeom>
+          <a:noFill/>
+          <a:ln/>
+        </p:spPr>
+        <p:txBody>
+          <a:bodyPr wrap="square" lIns="0" tIns="0" rIns="0" bIns="0" rtlCol="0" anchor="ctr"/>
+          <a:lstStyle/>
+          <a:p>
+            <a:pPr indent="0" marL="0">
+              <a:buNone/>
+            </a:pPr>
+            <a:r>
+              <a:rPr lang="en-US" sz="1100" b="1" dirty="0">
+                <a:solidFill>
+                  <a:srgbClr val="0F5C3D"/>
+                </a:solidFill>
+                <a:latin typeface="Calibri" pitchFamily="34" charset="0"/>
+                <a:ea typeface="Calibri" pitchFamily="34" charset="-122"/>
+                <a:cs typeface="Calibri" pitchFamily="34" charset="-120"/>
+              </a:rPr>
+              <a:t>✓ 総合評価：おにぎりを同時摂取すると、同水準の血糖燃料供給を保ったままΔピーク・CVが小さくなり、波形がなだらかになる。満腹感は上がるが消化器症状は軽微。夜間コンディションもわずかに良好な傾向で、単独液状化よりバランスが良い。</a:t>
+            </a:r>
+            <a:endParaRPr lang="en-US" sz="1100" dirty="0"/>
+          </a:p>
+        </p:txBody>
+      </p:sp>
+    </p:spTree>
+  </p:cSld>
+  <p:clrMapOvr>
+    <a:masterClrMapping/>
+  </p:clrMapOvr>
+</p:sld>
+</file>
+
+<file path=ppt/slides/slide5.xml><?xml version="1.0" encoding="utf-8"?>
+<p:sld xmlns:a="http://schemas.openxmlformats.org/drawingml/2006/main" xmlns:r="http://schemas.openxmlformats.org/officeDocument/2006/relationships" xmlns:p="http://schemas.openxmlformats.org/presentationml/2006/main">
+  <p:cSld name="Slide 5">
+    <p:bg>
+      <p:bgPr>
+        <a:solidFill>
+          <a:srgbClr val="FFFFFF"/>
+        </a:solidFill>
+      </p:bgPr>
+    </p:bg>
+    <p:spTree>
+      <p:nvGrpSpPr>
+        <p:cNvPr id="1" name=""/>
+        <p:cNvGrpSpPr/>
+        <p:nvPr/>
+      </p:nvGrpSpPr>
+      <p:grpSpPr>
+        <a:xfrm>
+          <a:off x="0" y="0"/>
+          <a:ext cx="0" cy="0"/>
+          <a:chOff x="0" y="0"/>
+          <a:chExt cx="0" cy="0"/>
+        </a:xfrm>
+      </p:grpSpPr>
+      <p:sp>
+        <p:nvSpPr>
+          <p:cNvPr id="2" name="Text 0"/>
+          <p:cNvSpPr txBox="1"/>
+          <p:nvPr/>
+        </p:nvSpPr>
+        <p:spPr>
+          <a:xfrm>
+            <a:off x="548640" y="384048"/>
+            <a:ext cx="11091672" cy="310896"/>
+          </a:xfrm>
+          <a:prstGeom prst="rect">
+            <a:avLst/>
+          </a:prstGeom>
+          <a:noFill/>
+          <a:ln/>
+        </p:spPr>
+        <p:txBody>
+          <a:bodyPr wrap="square" rtlCol="0" anchor="ctr"/>
+          <a:lstStyle/>
+          <a:p>
+            <a:pPr indent="0" marL="0">
+              <a:buNone/>
+            </a:pPr>
+            <a:r>
+              <a:rPr lang="en-US" sz="1250" b="1" spc="100" kern="0" dirty="0">
+                <a:solidFill>
+                  <a:srgbClr val="1C7293"/>
+                </a:solidFill>
+                <a:latin typeface="Calibri" pitchFamily="34" charset="0"/>
+                <a:ea typeface="Calibri" pitchFamily="34" charset="-122"/>
+                <a:cs typeface="Calibri" pitchFamily="34" charset="-120"/>
+              </a:rPr>
+              <a:t>COMPARISON ③</a:t>
+            </a:r>
+            <a:endParaRPr lang="en-US" sz="1250" dirty="0"/>
+          </a:p>
+        </p:txBody>
+      </p:sp>
+      <p:sp>
+        <p:nvSpPr>
+          <p:cNvPr id="3" name="Text 1"/>
+          <p:cNvSpPr txBox="1"/>
+          <p:nvPr/>
+        </p:nvSpPr>
+        <p:spPr>
+          <a:xfrm>
+            <a:off x="548640" y="676656"/>
+            <a:ext cx="11091672" cy="548640"/>
+          </a:xfrm>
+          <a:prstGeom prst="rect">
+            <a:avLst/>
+          </a:prstGeom>
+          <a:noFill/>
+          <a:ln/>
+        </p:spPr>
+        <p:txBody>
+          <a:bodyPr wrap="square" rtlCol="0" anchor="ctr"/>
+          <a:lstStyle/>
+          <a:p>
+            <a:pPr indent="0" marL="0">
+              <a:buNone/>
+            </a:pPr>
+            <a:r>
+              <a:rPr lang="en-US" sz="2500" b="1" dirty="0">
+                <a:solidFill>
+                  <a:srgbClr val="21295C"/>
+                </a:solidFill>
+                <a:latin typeface="Cambria" pitchFamily="34" charset="0"/>
+                <a:ea typeface="Cambria" pitchFamily="34" charset="-122"/>
+                <a:cs typeface="Cambria" pitchFamily="34" charset="-120"/>
+              </a:rPr>
+              <a:t>おにぎり＋スムージー vs おにぎり＋糖質減</a:t>
+            </a:r>
+            <a:endParaRPr lang="en-US" sz="2500" dirty="0"/>
+          </a:p>
+        </p:txBody>
+      </p:sp>
+      <p:sp>
+        <p:nvSpPr>
+          <p:cNvPr id="4" name="Shape 2"/>
+          <p:cNvSpPr/>
+          <p:nvPr/>
+        </p:nvSpPr>
+        <p:spPr>
+          <a:xfrm>
+            <a:off x="7434072" y="438912"/>
+            <a:ext cx="4206240" cy="365760"/>
+          </a:xfrm>
+          <a:prstGeom prst="roundRect">
+            <a:avLst>
+              <a:gd name="adj" fmla="val 20000"/>
+            </a:avLst>
+          </a:prstGeom>
+          <a:solidFill>
+            <a:srgbClr val="EAF7F0"/>
+          </a:solidFill>
+          <a:ln w="9525">
+            <a:solidFill>
+              <a:srgbClr val="0F5C3D"/>
+            </a:solidFill>
+            <a:prstDash val="solid"/>
+          </a:ln>
+        </p:spPr>
+      </p:sp>
+      <p:sp>
+        <p:nvSpPr>
+          <p:cNvPr id="5" name="Text 3"/>
+          <p:cNvSpPr txBox="1"/>
+          <p:nvPr/>
+        </p:nvSpPr>
+        <p:spPr>
+          <a:xfrm>
+            <a:off x="7525512" y="438912"/>
+            <a:ext cx="4023360" cy="365760"/>
+          </a:xfrm>
+          <a:prstGeom prst="rect">
+            <a:avLst/>
+          </a:prstGeom>
+          <a:noFill/>
+          <a:ln/>
+        </p:spPr>
+        <p:txBody>
+          <a:bodyPr wrap="square" lIns="0" tIns="0" rIns="0" bIns="0" rtlCol="0" anchor="ctr"/>
+          <a:lstStyle/>
+          <a:p>
+            <a:pPr algn="ctr" indent="0" marL="0">
+              <a:buNone/>
+            </a:pPr>
+            <a:r>
+              <a:rPr lang="en-US" sz="1050" b="1" dirty="0">
+                <a:solidFill>
+                  <a:srgbClr val="0F5C3D"/>
+                </a:solidFill>
+                <a:latin typeface="Calibri" pitchFamily="34" charset="0"/>
+                <a:ea typeface="Calibri" pitchFamily="34" charset="-122"/>
+                <a:cs typeface="Calibri" pitchFamily="34" charset="-120"/>
+              </a:rPr>
+              <a:t>✓ 両条件ともシフト後で信頼できる</a:t>
+            </a:r>
+            <a:endParaRPr lang="en-US" sz="1050" dirty="0"/>
+          </a:p>
+        </p:txBody>
+      </p:sp>
+      <p:sp>
+        <p:nvSpPr>
+          <p:cNvPr id="6" name="Shape 4"/>
+          <p:cNvSpPr/>
+          <p:nvPr/>
+        </p:nvSpPr>
+        <p:spPr>
+          <a:xfrm>
+            <a:off x="548640" y="1399032"/>
+            <a:ext cx="146304" cy="146304"/>
+          </a:xfrm>
+          <a:prstGeom prst="rect">
+            <a:avLst/>
+          </a:prstGeom>
+          <a:solidFill>
+            <a:srgbClr val="1BAF7A"/>
+          </a:solidFill>
+          <a:ln/>
+        </p:spPr>
+      </p:sp>
+      <p:sp>
+        <p:nvSpPr>
+          <p:cNvPr id="7" name="Text 5"/>
+          <p:cNvSpPr txBox="1"/>
+          <p:nvPr/>
+        </p:nvSpPr>
+        <p:spPr>
+          <a:xfrm>
+            <a:off x="749808" y="1335024"/>
+            <a:ext cx="2743200" cy="274320"/>
+          </a:xfrm>
+          <a:prstGeom prst="rect">
+            <a:avLst/>
+          </a:prstGeom>
+          <a:noFill/>
+          <a:ln/>
+        </p:spPr>
+        <p:txBody>
+          <a:bodyPr wrap="square" lIns="0" tIns="0" rIns="0" bIns="0" rtlCol="0" anchor="ctr"/>
+          <a:lstStyle/>
+          <a:p>
+            <a:pPr indent="0" marL="0">
+              <a:buNone/>
+            </a:pPr>
+            <a:r>
+              <a:rPr lang="en-US" sz="1150" b="1" dirty="0">
+                <a:solidFill>
+                  <a:srgbClr val="1A1A1A"/>
+                </a:solidFill>
+                <a:latin typeface="Calibri" pitchFamily="34" charset="0"/>
+                <a:ea typeface="Calibri" pitchFamily="34" charset="-122"/>
+                <a:cs typeface="Calibri" pitchFamily="34" charset="-120"/>
+              </a:rPr>
+              <a:t>おにぎり＋スムージー</a:t>
+            </a:r>
+            <a:endParaRPr lang="en-US" sz="1150" dirty="0"/>
+          </a:p>
+        </p:txBody>
+      </p:sp>
+      <p:sp>
+        <p:nvSpPr>
+          <p:cNvPr id="8" name="Shape 6"/>
+          <p:cNvSpPr/>
+          <p:nvPr/>
+        </p:nvSpPr>
+        <p:spPr>
+          <a:xfrm>
+            <a:off x="4389120" y="1399032"/>
+            <a:ext cx="146304" cy="146304"/>
+          </a:xfrm>
+          <a:prstGeom prst="rect">
+            <a:avLst/>
+          </a:prstGeom>
+          <a:solidFill>
+            <a:srgbClr val="EDA100"/>
+          </a:solidFill>
+          <a:ln/>
+        </p:spPr>
+      </p:sp>
+      <p:sp>
+        <p:nvSpPr>
+          <p:cNvPr id="9" name="Text 7"/>
+          <p:cNvSpPr txBox="1"/>
+          <p:nvPr/>
+        </p:nvSpPr>
+        <p:spPr>
+          <a:xfrm>
+            <a:off x="4590288" y="1335024"/>
+            <a:ext cx="2743200" cy="274320"/>
+          </a:xfrm>
+          <a:prstGeom prst="rect">
+            <a:avLst/>
+          </a:prstGeom>
+          <a:noFill/>
+          <a:ln/>
+        </p:spPr>
+        <p:txBody>
+          <a:bodyPr wrap="square" lIns="0" tIns="0" rIns="0" bIns="0" rtlCol="0" anchor="ctr"/>
+          <a:lstStyle/>
+          <a:p>
+            <a:pPr indent="0" marL="0">
+              <a:buNone/>
+            </a:pPr>
+            <a:r>
+              <a:rPr lang="en-US" sz="1150" b="1" dirty="0">
+                <a:solidFill>
+                  <a:srgbClr val="1A1A1A"/>
+                </a:solidFill>
+                <a:latin typeface="Calibri" pitchFamily="34" charset="0"/>
+                <a:ea typeface="Calibri" pitchFamily="34" charset="-122"/>
+                <a:cs typeface="Calibri" pitchFamily="34" charset="-120"/>
+              </a:rPr>
+              <a:t>おにぎり＋糖質減</a:t>
+            </a:r>
+            <a:endParaRPr lang="en-US" sz="1150" dirty="0"/>
+          </a:p>
+        </p:txBody>
+      </p:sp>
+      <p:sp>
+        <p:nvSpPr>
+          <p:cNvPr id="10" name="Shape 8"/>
+          <p:cNvSpPr/>
+          <p:nvPr/>
+        </p:nvSpPr>
+        <p:spPr>
+          <a:xfrm>
+            <a:off x="548640" y="1719072"/>
+            <a:ext cx="91440" cy="146304"/>
+          </a:xfrm>
+          <a:prstGeom prst="rect">
+            <a:avLst/>
+          </a:prstGeom>
+          <a:solidFill>
+            <a:srgbClr val="065A82"/>
+          </a:solidFill>
+          <a:ln/>
+        </p:spPr>
+      </p:sp>
+      <p:sp>
+        <p:nvSpPr>
+          <p:cNvPr id="11" name="Text 9"/>
+          <p:cNvSpPr txBox="1"/>
+          <p:nvPr/>
+        </p:nvSpPr>
+        <p:spPr>
+          <a:xfrm>
+            <a:off x="731520" y="1655064"/>
+            <a:ext cx="5486400" cy="274320"/>
+          </a:xfrm>
+          <a:prstGeom prst="rect">
+            <a:avLst/>
+          </a:prstGeom>
+          <a:noFill/>
+          <a:ln/>
+        </p:spPr>
+        <p:txBody>
+          <a:bodyPr wrap="square" lIns="0" tIns="0" rIns="0" bIns="0" rtlCol="0" anchor="ctr"/>
+          <a:lstStyle/>
+          <a:p>
+            <a:pPr indent="0" marL="0">
+              <a:buNone/>
+            </a:pPr>
+            <a:r>
+              <a:rPr lang="en-US" sz="1250" b="1" dirty="0">
+                <a:solidFill>
+                  <a:srgbClr val="21295C"/>
+                </a:solidFill>
+                <a:latin typeface="Calibri" pitchFamily="34" charset="0"/>
+                <a:ea typeface="Calibri" pitchFamily="34" charset="-122"/>
+                <a:cs typeface="Calibri" pitchFamily="34" charset="-120"/>
+              </a:rPr>
+              <a:t>血糖値</a:t>
+            </a:r>
+            <a:endParaRPr lang="en-US" sz="1250" dirty="0"/>
+          </a:p>
+        </p:txBody>
+      </p:sp>
+      <p:sp>
+        <p:nvSpPr>
+          <p:cNvPr id="12" name="Shape 10"/>
+          <p:cNvSpPr/>
+          <p:nvPr/>
+        </p:nvSpPr>
+        <p:spPr>
+          <a:xfrm>
+            <a:off x="548640" y="1947672"/>
+            <a:ext cx="3514344" cy="868680"/>
+          </a:xfrm>
+          <a:prstGeom prst="roundRect">
+            <a:avLst>
+              <a:gd name="adj" fmla="val 8421"/>
+            </a:avLst>
+          </a:prstGeom>
+          <a:solidFill>
+            <a:srgbClr val="F4F7F9"/>
+          </a:solidFill>
+          <a:ln/>
+        </p:spPr>
+      </p:sp>
+      <p:sp>
+        <p:nvSpPr>
+          <p:cNvPr id="13" name="Text 11"/>
+          <p:cNvSpPr txBox="1"/>
+          <p:nvPr/>
+        </p:nvSpPr>
+        <p:spPr>
+          <a:xfrm>
+            <a:off x="685800" y="2002536"/>
+            <a:ext cx="3240024" cy="237744"/>
+          </a:xfrm>
+          <a:prstGeom prst="rect">
+            <a:avLst/>
+          </a:prstGeom>
+          <a:noFill/>
+          <a:ln/>
+        </p:spPr>
+        <p:txBody>
+          <a:bodyPr wrap="square" lIns="0" tIns="0" rIns="0" bIns="0" rtlCol="0" anchor="ctr"/>
+          <a:lstStyle/>
+          <a:p>
+            <a:pPr indent="0" marL="0">
+              <a:buNone/>
+            </a:pPr>
+            <a:r>
+              <a:rPr lang="en-US" sz="1050" b="1" dirty="0">
+                <a:solidFill>
+                  <a:srgbClr val="21295C"/>
+                </a:solidFill>
+                <a:latin typeface="Calibri" pitchFamily="34" charset="0"/>
+                <a:ea typeface="Calibri" pitchFamily="34" charset="-122"/>
+                <a:cs typeface="Calibri" pitchFamily="34" charset="-120"/>
+              </a:rPr>
+              <a:t>iAUC 2h (mg/dL・分)</a:t>
+            </a:r>
+            <a:endParaRPr lang="en-US" sz="1050" dirty="0"/>
+          </a:p>
+        </p:txBody>
+      </p:sp>
+      <p:sp>
+        <p:nvSpPr>
+          <p:cNvPr id="14" name="Text 12"/>
+          <p:cNvSpPr txBox="1"/>
+          <p:nvPr/>
+        </p:nvSpPr>
+        <p:spPr>
+          <a:xfrm>
+            <a:off x="685800" y="2258568"/>
+            <a:ext cx="1620012" cy="457200"/>
+          </a:xfrm>
+          <a:prstGeom prst="rect">
+            <a:avLst/>
+          </a:prstGeom>
+          <a:noFill/>
+          <a:ln/>
+        </p:spPr>
+        <p:txBody>
+          <a:bodyPr wrap="square" lIns="0" tIns="0" rIns="0" bIns="0" rtlCol="0" anchor="ctr"/>
+          <a:lstStyle/>
+          <a:p>
+            <a:pPr indent="0" marL="0">
+              <a:buNone/>
+            </a:pPr>
+            <a:r>
+              <a:rPr lang="en-US" sz="1900" b="1" dirty="0">
+                <a:solidFill>
+                  <a:srgbClr val="1BAF7A"/>
+                </a:solidFill>
+                <a:latin typeface="Cambria" pitchFamily="34" charset="0"/>
+                <a:ea typeface="Cambria" pitchFamily="34" charset="-122"/>
+                <a:cs typeface="Cambria" pitchFamily="34" charset="-120"/>
+              </a:rPr>
+              <a:t>5,230</a:t>
+            </a:r>
+            <a:endParaRPr lang="en-US" sz="1900" dirty="0"/>
+          </a:p>
+        </p:txBody>
+      </p:sp>
+      <p:sp>
+        <p:nvSpPr>
+          <p:cNvPr id="15" name="Text 13"/>
+          <p:cNvSpPr txBox="1"/>
+          <p:nvPr/>
+        </p:nvSpPr>
+        <p:spPr>
+          <a:xfrm>
+            <a:off x="2305812" y="2258568"/>
+            <a:ext cx="1620012" cy="457200"/>
+          </a:xfrm>
+          <a:prstGeom prst="rect">
+            <a:avLst/>
+          </a:prstGeom>
+          <a:noFill/>
+          <a:ln/>
+        </p:spPr>
+        <p:txBody>
+          <a:bodyPr wrap="square" lIns="0" tIns="0" rIns="0" bIns="0" rtlCol="0" anchor="ctr"/>
+          <a:lstStyle/>
+          <a:p>
+            <a:pPr algn="r" indent="0" marL="0">
+              <a:buNone/>
+            </a:pPr>
+            <a:r>
+              <a:rPr lang="en-US" sz="1900" b="1" dirty="0">
+                <a:solidFill>
+                  <a:srgbClr val="EDA100"/>
+                </a:solidFill>
+                <a:latin typeface="Cambria" pitchFamily="34" charset="0"/>
+                <a:ea typeface="Cambria" pitchFamily="34" charset="-122"/>
+                <a:cs typeface="Cambria" pitchFamily="34" charset="-120"/>
+              </a:rPr>
+              <a:t>3,168</a:t>
+            </a:r>
+            <a:endParaRPr lang="en-US" sz="1900" dirty="0"/>
+          </a:p>
+        </p:txBody>
+      </p:sp>
+      <p:sp>
+        <p:nvSpPr>
+          <p:cNvPr id="16" name="Text 14"/>
+          <p:cNvSpPr txBox="1"/>
+          <p:nvPr/>
+        </p:nvSpPr>
+        <p:spPr>
+          <a:xfrm>
+            <a:off x="685800" y="2606040"/>
+            <a:ext cx="3240024" cy="182880"/>
+          </a:xfrm>
+          <a:prstGeom prst="rect">
+            <a:avLst/>
+          </a:prstGeom>
+          <a:noFill/>
+          <a:ln/>
+        </p:spPr>
+        <p:txBody>
+          <a:bodyPr wrap="square" lIns="0" tIns="0" rIns="0" bIns="0" rtlCol="0" anchor="ctr"/>
+          <a:lstStyle/>
+          <a:p>
+            <a:pPr indent="0" marL="0">
+              <a:buNone/>
+            </a:pPr>
+            <a:r>
+              <a:rPr lang="en-US" sz="850" dirty="0">
+                <a:solidFill>
+                  <a:srgbClr val="5C6570"/>
+                </a:solidFill>
+                <a:latin typeface="Calibri" pitchFamily="34" charset="0"/>
+                <a:ea typeface="Calibri" pitchFamily="34" charset="-122"/>
+                <a:cs typeface="Calibri" pitchFamily="34" charset="-120"/>
+              </a:rPr>
+              <a:t>糖質減で約39%減</a:t>
+            </a:r>
+            <a:endParaRPr lang="en-US" sz="850" dirty="0"/>
+          </a:p>
+        </p:txBody>
+      </p:sp>
+      <p:sp>
+        <p:nvSpPr>
+          <p:cNvPr id="17" name="Shape 15"/>
+          <p:cNvSpPr/>
+          <p:nvPr/>
+        </p:nvSpPr>
+        <p:spPr>
+          <a:xfrm>
+            <a:off x="4337304" y="1947672"/>
+            <a:ext cx="3514344" cy="868680"/>
+          </a:xfrm>
+          <a:prstGeom prst="roundRect">
+            <a:avLst>
+              <a:gd name="adj" fmla="val 8421"/>
+            </a:avLst>
+          </a:prstGeom>
+          <a:solidFill>
+            <a:srgbClr val="F4F7F9"/>
+          </a:solidFill>
+          <a:ln/>
+        </p:spPr>
+      </p:sp>
+      <p:sp>
+        <p:nvSpPr>
+          <p:cNvPr id="18" name="Text 16"/>
+          <p:cNvSpPr txBox="1"/>
+          <p:nvPr/>
+        </p:nvSpPr>
+        <p:spPr>
+          <a:xfrm>
+            <a:off x="4474464" y="2002536"/>
+            <a:ext cx="3240024" cy="237744"/>
+          </a:xfrm>
+          <a:prstGeom prst="rect">
+            <a:avLst/>
+          </a:prstGeom>
+          <a:noFill/>
+          <a:ln/>
+        </p:spPr>
+        <p:txBody>
+          <a:bodyPr wrap="square" lIns="0" tIns="0" rIns="0" bIns="0" rtlCol="0" anchor="ctr"/>
+          <a:lstStyle/>
+          <a:p>
+            <a:pPr indent="0" marL="0">
+              <a:buNone/>
+            </a:pPr>
+            <a:r>
+              <a:rPr lang="en-US" sz="1050" b="1" dirty="0">
+                <a:solidFill>
+                  <a:srgbClr val="21295C"/>
+                </a:solidFill>
+                <a:latin typeface="Calibri" pitchFamily="34" charset="0"/>
+                <a:ea typeface="Calibri" pitchFamily="34" charset="-122"/>
+                <a:cs typeface="Calibri" pitchFamily="34" charset="-120"/>
+              </a:rPr>
+              <a:t>変動係数 CV</a:t>
+            </a:r>
+            <a:endParaRPr lang="en-US" sz="1050" dirty="0"/>
+          </a:p>
+        </p:txBody>
+      </p:sp>
+      <p:sp>
+        <p:nvSpPr>
+          <p:cNvPr id="19" name="Text 17"/>
+          <p:cNvSpPr txBox="1"/>
+          <p:nvPr/>
+        </p:nvSpPr>
+        <p:spPr>
+          <a:xfrm>
+            <a:off x="4474464" y="2258568"/>
+            <a:ext cx="1620012" cy="457200"/>
+          </a:xfrm>
+          <a:prstGeom prst="rect">
+            <a:avLst/>
+          </a:prstGeom>
+          <a:noFill/>
+          <a:ln/>
+        </p:spPr>
+        <p:txBody>
+          <a:bodyPr wrap="square" lIns="0" tIns="0" rIns="0" bIns="0" rtlCol="0" anchor="ctr"/>
+          <a:lstStyle/>
+          <a:p>
+            <a:pPr indent="0" marL="0">
+              <a:buNone/>
+            </a:pPr>
+            <a:r>
+              <a:rPr lang="en-US" sz="1900" b="1" dirty="0">
+                <a:solidFill>
+                  <a:srgbClr val="1BAF7A"/>
+                </a:solidFill>
+                <a:latin typeface="Cambria" pitchFamily="34" charset="0"/>
+                <a:ea typeface="Cambria" pitchFamily="34" charset="-122"/>
+                <a:cs typeface="Cambria" pitchFamily="34" charset="-120"/>
+              </a:rPr>
+              <a:t>10.1%</a:t>
+            </a:r>
+            <a:endParaRPr lang="en-US" sz="1900" dirty="0"/>
+          </a:p>
+        </p:txBody>
+      </p:sp>
+      <p:sp>
+        <p:nvSpPr>
+          <p:cNvPr id="20" name="Text 18"/>
+          <p:cNvSpPr txBox="1"/>
+          <p:nvPr/>
+        </p:nvSpPr>
+        <p:spPr>
+          <a:xfrm>
+            <a:off x="6094476" y="2258568"/>
+            <a:ext cx="1620012" cy="457200"/>
+          </a:xfrm>
+          <a:prstGeom prst="rect">
+            <a:avLst/>
+          </a:prstGeom>
+          <a:noFill/>
+          <a:ln/>
+        </p:spPr>
+        <p:txBody>
+          <a:bodyPr wrap="square" lIns="0" tIns="0" rIns="0" bIns="0" rtlCol="0" anchor="ctr"/>
+          <a:lstStyle/>
+          <a:p>
+            <a:pPr algn="r" indent="0" marL="0">
+              <a:buNone/>
+            </a:pPr>
+            <a:r>
+              <a:rPr lang="en-US" sz="1900" b="1" dirty="0">
+                <a:solidFill>
+                  <a:srgbClr val="EDA100"/>
+                </a:solidFill>
+                <a:latin typeface="Cambria" pitchFamily="34" charset="0"/>
+                <a:ea typeface="Cambria" pitchFamily="34" charset="-122"/>
+                <a:cs typeface="Cambria" pitchFamily="34" charset="-120"/>
+              </a:rPr>
+              <a:t>11.8%</a:t>
+            </a:r>
+            <a:endParaRPr lang="en-US" sz="1900" dirty="0"/>
+          </a:p>
+        </p:txBody>
+      </p:sp>
+      <p:sp>
+        <p:nvSpPr>
+          <p:cNvPr id="21" name="Shape 19"/>
+          <p:cNvSpPr/>
+          <p:nvPr/>
+        </p:nvSpPr>
+        <p:spPr>
+          <a:xfrm>
+            <a:off x="8125968" y="1947672"/>
+            <a:ext cx="3514344" cy="868680"/>
+          </a:xfrm>
+          <a:prstGeom prst="roundRect">
+            <a:avLst>
+              <a:gd name="adj" fmla="val 8421"/>
+            </a:avLst>
+          </a:prstGeom>
+          <a:solidFill>
+            <a:srgbClr val="F4F7F9"/>
+          </a:solidFill>
+          <a:ln/>
+        </p:spPr>
+      </p:sp>
+      <p:sp>
+        <p:nvSpPr>
+          <p:cNvPr id="22" name="Text 20"/>
+          <p:cNvSpPr txBox="1"/>
+          <p:nvPr/>
+        </p:nvSpPr>
+        <p:spPr>
+          <a:xfrm>
+            <a:off x="8263128" y="2002536"/>
+            <a:ext cx="3240024" cy="237744"/>
+          </a:xfrm>
+          <a:prstGeom prst="rect">
+            <a:avLst/>
+          </a:prstGeom>
+          <a:noFill/>
+          <a:ln/>
+        </p:spPr>
+        <p:txBody>
+          <a:bodyPr wrap="square" lIns="0" tIns="0" rIns="0" bIns="0" rtlCol="0" anchor="ctr"/>
+          <a:lstStyle/>
+          <a:p>
+            <a:pPr indent="0" marL="0">
+              <a:buNone/>
+            </a:pPr>
+            <a:r>
+              <a:rPr lang="en-US" sz="1050" b="1" dirty="0">
+                <a:solidFill>
+                  <a:srgbClr val="21295C"/>
+                </a:solidFill>
+                <a:latin typeface="Calibri" pitchFamily="34" charset="0"/>
+                <a:ea typeface="Calibri" pitchFamily="34" charset="-122"/>
+                <a:cs typeface="Calibri" pitchFamily="34" charset="-120"/>
+              </a:rPr>
+              <a:t>練習中(11-14h)平均血糖</a:t>
+            </a:r>
+            <a:endParaRPr lang="en-US" sz="1050" dirty="0"/>
+          </a:p>
+        </p:txBody>
+      </p:sp>
+      <p:sp>
+        <p:nvSpPr>
+          <p:cNvPr id="23" name="Text 21"/>
+          <p:cNvSpPr txBox="1"/>
+          <p:nvPr/>
+        </p:nvSpPr>
+        <p:spPr>
+          <a:xfrm>
+            <a:off x="8263128" y="2258568"/>
+            <a:ext cx="1620012" cy="457200"/>
+          </a:xfrm>
+          <a:prstGeom prst="rect">
+            <a:avLst/>
+          </a:prstGeom>
+          <a:noFill/>
+          <a:ln/>
+        </p:spPr>
+        <p:txBody>
+          <a:bodyPr wrap="square" lIns="0" tIns="0" rIns="0" bIns="0" rtlCol="0" anchor="ctr"/>
+          <a:lstStyle/>
+          <a:p>
+            <a:pPr indent="0" marL="0">
+              <a:buNone/>
+            </a:pPr>
+            <a:r>
+              <a:rPr lang="en-US" sz="1900" b="1" dirty="0">
+                <a:solidFill>
+                  <a:srgbClr val="1BAF7A"/>
+                </a:solidFill>
+                <a:latin typeface="Cambria" pitchFamily="34" charset="0"/>
+                <a:ea typeface="Cambria" pitchFamily="34" charset="-122"/>
+                <a:cs typeface="Cambria" pitchFamily="34" charset="-120"/>
+              </a:rPr>
+              <a:t>220.1</a:t>
+            </a:r>
+            <a:endParaRPr lang="en-US" sz="1900" dirty="0"/>
+          </a:p>
+        </p:txBody>
+      </p:sp>
+      <p:sp>
+        <p:nvSpPr>
+          <p:cNvPr id="24" name="Text 22"/>
+          <p:cNvSpPr txBox="1"/>
+          <p:nvPr/>
+        </p:nvSpPr>
+        <p:spPr>
+          <a:xfrm>
+            <a:off x="9883140" y="2258568"/>
+            <a:ext cx="1620012" cy="457200"/>
+          </a:xfrm>
+          <a:prstGeom prst="rect">
+            <a:avLst/>
+          </a:prstGeom>
+          <a:noFill/>
+          <a:ln/>
+        </p:spPr>
+        <p:txBody>
+          <a:bodyPr wrap="square" lIns="0" tIns="0" rIns="0" bIns="0" rtlCol="0" anchor="ctr"/>
+          <a:lstStyle/>
+          <a:p>
+            <a:pPr algn="r" indent="0" marL="0">
+              <a:buNone/>
+            </a:pPr>
+            <a:r>
+              <a:rPr lang="en-US" sz="1900" b="1" dirty="0">
+                <a:solidFill>
+                  <a:srgbClr val="EDA100"/>
+                </a:solidFill>
+                <a:latin typeface="Cambria" pitchFamily="34" charset="0"/>
+                <a:ea typeface="Cambria" pitchFamily="34" charset="-122"/>
+                <a:cs typeface="Cambria" pitchFamily="34" charset="-120"/>
+              </a:rPr>
+              <a:t>229.4</a:t>
+            </a:r>
+            <a:endParaRPr lang="en-US" sz="1900" dirty="0"/>
+          </a:p>
+        </p:txBody>
+      </p:sp>
+      <p:sp>
+        <p:nvSpPr>
+          <p:cNvPr id="25" name="Text 23"/>
+          <p:cNvSpPr txBox="1"/>
+          <p:nvPr/>
+        </p:nvSpPr>
+        <p:spPr>
+          <a:xfrm>
+            <a:off x="8263128" y="2606040"/>
+            <a:ext cx="3240024" cy="182880"/>
+          </a:xfrm>
+          <a:prstGeom prst="rect">
+            <a:avLst/>
+          </a:prstGeom>
+          <a:noFill/>
+          <a:ln/>
+        </p:spPr>
+        <p:txBody>
+          <a:bodyPr wrap="square" lIns="0" tIns="0" rIns="0" bIns="0" rtlCol="0" anchor="ctr"/>
+          <a:lstStyle/>
+          <a:p>
+            <a:pPr indent="0" marL="0">
+              <a:buNone/>
+            </a:pPr>
+            <a:r>
+              <a:rPr lang="en-US" sz="850" dirty="0">
+                <a:solidFill>
+                  <a:srgbClr val="5C6570"/>
+                </a:solidFill>
+                <a:latin typeface="Calibri" pitchFamily="34" charset="0"/>
+                <a:ea typeface="Calibri" pitchFamily="34" charset="-122"/>
+                <a:cs typeface="Calibri" pitchFamily="34" charset="-120"/>
+              </a:rPr>
+              <a:t>糖質減の方がむしろ高い</a:t>
+            </a:r>
+            <a:endParaRPr lang="en-US" sz="850" dirty="0"/>
+          </a:p>
+        </p:txBody>
+      </p:sp>
+      <p:sp>
+        <p:nvSpPr>
+          <p:cNvPr id="26" name="Shape 24"/>
+          <p:cNvSpPr/>
+          <p:nvPr/>
+        </p:nvSpPr>
+        <p:spPr>
+          <a:xfrm>
+            <a:off x="548640" y="2999232"/>
+            <a:ext cx="91440" cy="146304"/>
+          </a:xfrm>
+          <a:prstGeom prst="rect">
+            <a:avLst/>
+          </a:prstGeom>
+          <a:solidFill>
+            <a:srgbClr val="1C7293"/>
+          </a:solidFill>
+          <a:ln/>
+        </p:spPr>
+      </p:sp>
+      <p:sp>
+        <p:nvSpPr>
+          <p:cNvPr id="27" name="Text 25"/>
+          <p:cNvSpPr txBox="1"/>
+          <p:nvPr/>
+        </p:nvSpPr>
+        <p:spPr>
+          <a:xfrm>
+            <a:off x="731520" y="2935224"/>
+            <a:ext cx="5486400" cy="274320"/>
+          </a:xfrm>
+          <a:prstGeom prst="rect">
+            <a:avLst/>
+          </a:prstGeom>
+          <a:noFill/>
+          <a:ln/>
+        </p:spPr>
+        <p:txBody>
+          <a:bodyPr wrap="square" lIns="0" tIns="0" rIns="0" bIns="0" rtlCol="0" anchor="ctr"/>
+          <a:lstStyle/>
+          <a:p>
+            <a:pPr indent="0" marL="0">
+              <a:buNone/>
+            </a:pPr>
+            <a:r>
+              <a:rPr lang="en-US" sz="1250" b="1" dirty="0">
+                <a:solidFill>
+                  <a:srgbClr val="21295C"/>
+                </a:solidFill>
+                <a:latin typeface="Calibri" pitchFamily="34" charset="0"/>
+                <a:ea typeface="Calibri" pitchFamily="34" charset="-122"/>
+                <a:cs typeface="Calibri" pitchFamily="34" charset="-120"/>
+              </a:rPr>
+              <a:t>自覚コンディション（食後アンケート）</a:t>
+            </a:r>
+            <a:endParaRPr lang="en-US" sz="1250" dirty="0"/>
+          </a:p>
+        </p:txBody>
+      </p:sp>
+      <p:sp>
+        <p:nvSpPr>
+          <p:cNvPr id="28" name="Shape 26"/>
+          <p:cNvSpPr/>
+          <p:nvPr/>
+        </p:nvSpPr>
+        <p:spPr>
+          <a:xfrm>
+            <a:off x="548640" y="3227832"/>
+            <a:ext cx="3514344" cy="868680"/>
+          </a:xfrm>
+          <a:prstGeom prst="roundRect">
+            <a:avLst>
+              <a:gd name="adj" fmla="val 8421"/>
+            </a:avLst>
+          </a:prstGeom>
+          <a:solidFill>
+            <a:srgbClr val="F4F7F9"/>
+          </a:solidFill>
+          <a:ln/>
+        </p:spPr>
+      </p:sp>
+      <p:sp>
+        <p:nvSpPr>
+          <p:cNvPr id="29" name="Text 27"/>
+          <p:cNvSpPr txBox="1"/>
+          <p:nvPr/>
+        </p:nvSpPr>
+        <p:spPr>
+          <a:xfrm>
+            <a:off x="685800" y="3282696"/>
+            <a:ext cx="3240024" cy="237744"/>
+          </a:xfrm>
+          <a:prstGeom prst="rect">
+            <a:avLst/>
+          </a:prstGeom>
+          <a:noFill/>
+          <a:ln/>
+        </p:spPr>
+        <p:txBody>
+          <a:bodyPr wrap="square" lIns="0" tIns="0" rIns="0" bIns="0" rtlCol="0" anchor="ctr"/>
+          <a:lstStyle/>
+          <a:p>
+            <a:pPr indent="0" marL="0">
+              <a:buNone/>
+            </a:pPr>
+            <a:r>
+              <a:rPr lang="en-US" sz="1050" b="1" dirty="0">
+                <a:solidFill>
+                  <a:srgbClr val="21295C"/>
+                </a:solidFill>
+                <a:latin typeface="Calibri" pitchFamily="34" charset="0"/>
+                <a:ea typeface="Calibri" pitchFamily="34" charset="-122"/>
+                <a:cs typeface="Calibri" pitchFamily="34" charset="-120"/>
+              </a:rPr>
+              <a:t>満腹感ピーク(8:30)</a:t>
+            </a:r>
+            <a:endParaRPr lang="en-US" sz="1050" dirty="0"/>
+          </a:p>
+        </p:txBody>
+      </p:sp>
+      <p:sp>
+        <p:nvSpPr>
+          <p:cNvPr id="30" name="Text 28"/>
+          <p:cNvSpPr txBox="1"/>
+          <p:nvPr/>
+        </p:nvSpPr>
+        <p:spPr>
+          <a:xfrm>
+            <a:off x="685800" y="3538728"/>
+            <a:ext cx="1620012" cy="457200"/>
+          </a:xfrm>
+          <a:prstGeom prst="rect">
+            <a:avLst/>
+          </a:prstGeom>
+          <a:noFill/>
+          <a:ln/>
+        </p:spPr>
+        <p:txBody>
+          <a:bodyPr wrap="square" lIns="0" tIns="0" rIns="0" bIns="0" rtlCol="0" anchor="ctr"/>
+          <a:lstStyle/>
+          <a:p>
+            <a:pPr indent="0" marL="0">
+              <a:buNone/>
+            </a:pPr>
+            <a:r>
+              <a:rPr lang="en-US" sz="1900" b="1" dirty="0">
+                <a:solidFill>
+                  <a:srgbClr val="1BAF7A"/>
+                </a:solidFill>
+                <a:latin typeface="Cambria" pitchFamily="34" charset="0"/>
+                <a:ea typeface="Cambria" pitchFamily="34" charset="-122"/>
+                <a:cs typeface="Cambria" pitchFamily="34" charset="-120"/>
+              </a:rPr>
+              <a:t>7.67</a:t>
+            </a:r>
+            <a:endParaRPr lang="en-US" sz="1900" dirty="0"/>
+          </a:p>
+        </p:txBody>
+      </p:sp>
+      <p:sp>
+        <p:nvSpPr>
+          <p:cNvPr id="31" name="Text 29"/>
+          <p:cNvSpPr txBox="1"/>
+          <p:nvPr/>
+        </p:nvSpPr>
+        <p:spPr>
+          <a:xfrm>
+            <a:off x="2305812" y="3538728"/>
+            <a:ext cx="1620012" cy="457200"/>
+          </a:xfrm>
+          <a:prstGeom prst="rect">
+            <a:avLst/>
+          </a:prstGeom>
+          <a:noFill/>
+          <a:ln/>
+        </p:spPr>
+        <p:txBody>
+          <a:bodyPr wrap="square" lIns="0" tIns="0" rIns="0" bIns="0" rtlCol="0" anchor="ctr"/>
+          <a:lstStyle/>
+          <a:p>
+            <a:pPr algn="r" indent="0" marL="0">
+              <a:buNone/>
+            </a:pPr>
+            <a:r>
+              <a:rPr lang="en-US" sz="1900" b="1" dirty="0">
+                <a:solidFill>
+                  <a:srgbClr val="EDA100"/>
+                </a:solidFill>
+                <a:latin typeface="Cambria" pitchFamily="34" charset="0"/>
+                <a:ea typeface="Cambria" pitchFamily="34" charset="-122"/>
+                <a:cs typeface="Cambria" pitchFamily="34" charset="-120"/>
+              </a:rPr>
+              <a:t>9.00</a:t>
+            </a:r>
+            <a:endParaRPr lang="en-US" sz="1900" dirty="0"/>
+          </a:p>
+        </p:txBody>
+      </p:sp>
+      <p:sp>
+        <p:nvSpPr>
+          <p:cNvPr id="32" name="Shape 30"/>
+          <p:cNvSpPr/>
+          <p:nvPr/>
+        </p:nvSpPr>
+        <p:spPr>
+          <a:xfrm>
+            <a:off x="4337304" y="3227832"/>
+            <a:ext cx="3514344" cy="868680"/>
+          </a:xfrm>
+          <a:prstGeom prst="roundRect">
+            <a:avLst>
+              <a:gd name="adj" fmla="val 8421"/>
+            </a:avLst>
+          </a:prstGeom>
+          <a:solidFill>
+            <a:srgbClr val="F4F7F9"/>
+          </a:solidFill>
+          <a:ln/>
+        </p:spPr>
+      </p:sp>
+      <p:sp>
+        <p:nvSpPr>
+          <p:cNvPr id="33" name="Text 31"/>
+          <p:cNvSpPr txBox="1"/>
+          <p:nvPr/>
+        </p:nvSpPr>
+        <p:spPr>
+          <a:xfrm>
+            <a:off x="4474464" y="3282696"/>
+            <a:ext cx="3240024" cy="237744"/>
+          </a:xfrm>
+          <a:prstGeom prst="rect">
+            <a:avLst/>
+          </a:prstGeom>
+          <a:noFill/>
+          <a:ln/>
+        </p:spPr>
+        <p:txBody>
+          <a:bodyPr wrap="square" lIns="0" tIns="0" rIns="0" bIns="0" rtlCol="0" anchor="ctr"/>
+          <a:lstStyle/>
+          <a:p>
+            <a:pPr indent="0" marL="0">
+              <a:buNone/>
+            </a:pPr>
+            <a:r>
+              <a:rPr lang="en-US" sz="1050" b="1" dirty="0">
+                <a:solidFill>
+                  <a:srgbClr val="21295C"/>
+                </a:solidFill>
+                <a:latin typeface="Calibri" pitchFamily="34" charset="0"/>
+                <a:ea typeface="Calibri" pitchFamily="34" charset="-122"/>
+                <a:cs typeface="Calibri" pitchFamily="34" charset="-120"/>
+              </a:rPr>
+              <a:t>食欲(10:00)</a:t>
+            </a:r>
+            <a:endParaRPr lang="en-US" sz="1050" dirty="0"/>
+          </a:p>
+        </p:txBody>
+      </p:sp>
+      <p:sp>
+        <p:nvSpPr>
+          <p:cNvPr id="34" name="Text 32"/>
+          <p:cNvSpPr txBox="1"/>
+          <p:nvPr/>
+        </p:nvSpPr>
+        <p:spPr>
+          <a:xfrm>
+            <a:off x="4474464" y="3538728"/>
+            <a:ext cx="1620012" cy="457200"/>
+          </a:xfrm>
+          <a:prstGeom prst="rect">
+            <a:avLst/>
+          </a:prstGeom>
+          <a:noFill/>
+          <a:ln/>
+        </p:spPr>
+        <p:txBody>
+          <a:bodyPr wrap="square" lIns="0" tIns="0" rIns="0" bIns="0" rtlCol="0" anchor="ctr"/>
+          <a:lstStyle/>
+          <a:p>
+            <a:pPr indent="0" marL="0">
+              <a:buNone/>
+            </a:pPr>
+            <a:r>
+              <a:rPr lang="en-US" sz="1900" b="1" dirty="0">
+                <a:solidFill>
+                  <a:srgbClr val="1BAF7A"/>
+                </a:solidFill>
+                <a:latin typeface="Cambria" pitchFamily="34" charset="0"/>
+                <a:ea typeface="Cambria" pitchFamily="34" charset="-122"/>
+                <a:cs typeface="Cambria" pitchFamily="34" charset="-120"/>
+              </a:rPr>
+              <a:t>5.67</a:t>
+            </a:r>
+            <a:endParaRPr lang="en-US" sz="1900" dirty="0"/>
+          </a:p>
+        </p:txBody>
+      </p:sp>
+      <p:sp>
+        <p:nvSpPr>
+          <p:cNvPr id="35" name="Text 33"/>
+          <p:cNvSpPr txBox="1"/>
+          <p:nvPr/>
+        </p:nvSpPr>
+        <p:spPr>
+          <a:xfrm>
+            <a:off x="6094476" y="3538728"/>
+            <a:ext cx="1620012" cy="457200"/>
+          </a:xfrm>
+          <a:prstGeom prst="rect">
+            <a:avLst/>
+          </a:prstGeom>
+          <a:noFill/>
+          <a:ln/>
+        </p:spPr>
+        <p:txBody>
+          <a:bodyPr wrap="square" lIns="0" tIns="0" rIns="0" bIns="0" rtlCol="0" anchor="ctr"/>
+          <a:lstStyle/>
+          <a:p>
+            <a:pPr algn="r" indent="0" marL="0">
+              <a:buNone/>
+            </a:pPr>
+            <a:r>
+              <a:rPr lang="en-US" sz="1900" b="1" dirty="0">
+                <a:solidFill>
+                  <a:srgbClr val="EDA100"/>
+                </a:solidFill>
+                <a:latin typeface="Cambria" pitchFamily="34" charset="0"/>
+                <a:ea typeface="Cambria" pitchFamily="34" charset="-122"/>
+                <a:cs typeface="Cambria" pitchFamily="34" charset="-120"/>
+              </a:rPr>
+              <a:t>5.33</a:t>
+            </a:r>
+            <a:endParaRPr lang="en-US" sz="1900" dirty="0"/>
+          </a:p>
+        </p:txBody>
+      </p:sp>
+      <p:sp>
+        <p:nvSpPr>
+          <p:cNvPr id="36" name="Shape 34"/>
+          <p:cNvSpPr/>
+          <p:nvPr/>
+        </p:nvSpPr>
+        <p:spPr>
+          <a:xfrm>
+            <a:off x="8125968" y="3227832"/>
+            <a:ext cx="3514344" cy="868680"/>
+          </a:xfrm>
+          <a:prstGeom prst="roundRect">
+            <a:avLst>
+              <a:gd name="adj" fmla="val 8421"/>
+            </a:avLst>
+          </a:prstGeom>
+          <a:solidFill>
+            <a:srgbClr val="F4F7F9"/>
+          </a:solidFill>
+          <a:ln/>
+        </p:spPr>
+      </p:sp>
+      <p:sp>
+        <p:nvSpPr>
+          <p:cNvPr id="37" name="Text 35"/>
+          <p:cNvSpPr txBox="1"/>
+          <p:nvPr/>
+        </p:nvSpPr>
+        <p:spPr>
+          <a:xfrm>
+            <a:off x="8263128" y="3282696"/>
+            <a:ext cx="3240024" cy="237744"/>
+          </a:xfrm>
+          <a:prstGeom prst="rect">
+            <a:avLst/>
+          </a:prstGeom>
+          <a:noFill/>
+          <a:ln/>
+        </p:spPr>
+        <p:txBody>
+          <a:bodyPr wrap="square" lIns="0" tIns="0" rIns="0" bIns="0" rtlCol="0" anchor="ctr"/>
+          <a:lstStyle/>
+          <a:p>
+            <a:pPr indent="0" marL="0">
+              <a:buNone/>
+            </a:pPr>
+            <a:r>
+              <a:rPr lang="en-US" sz="1050" b="1" dirty="0">
+                <a:solidFill>
+                  <a:srgbClr val="21295C"/>
+                </a:solidFill>
+                <a:latin typeface="Calibri" pitchFamily="34" charset="0"/>
+                <a:ea typeface="Calibri" pitchFamily="34" charset="-122"/>
+                <a:cs typeface="Calibri" pitchFamily="34" charset="-120"/>
+              </a:rPr>
+              <a:t>頭痛・吐き気</a:t>
+            </a:r>
+            <a:endParaRPr lang="en-US" sz="1050" dirty="0"/>
+          </a:p>
+        </p:txBody>
+      </p:sp>
+      <p:sp>
+        <p:nvSpPr>
+          <p:cNvPr id="38" name="Text 36"/>
+          <p:cNvSpPr txBox="1"/>
+          <p:nvPr/>
+        </p:nvSpPr>
+        <p:spPr>
+          <a:xfrm>
+            <a:off x="8263128" y="3538728"/>
+            <a:ext cx="1620012" cy="457200"/>
+          </a:xfrm>
+          <a:prstGeom prst="rect">
+            <a:avLst/>
+          </a:prstGeom>
+          <a:noFill/>
+          <a:ln/>
+        </p:spPr>
+        <p:txBody>
+          <a:bodyPr wrap="square" lIns="0" tIns="0" rIns="0" bIns="0" rtlCol="0" anchor="ctr"/>
+          <a:lstStyle/>
+          <a:p>
+            <a:pPr indent="0" marL="0">
+              <a:buNone/>
+            </a:pPr>
+            <a:r>
+              <a:rPr lang="en-US" sz="1900" b="1" dirty="0">
+                <a:solidFill>
+                  <a:srgbClr val="1BAF7A"/>
+                </a:solidFill>
+                <a:latin typeface="Cambria" pitchFamily="34" charset="0"/>
+                <a:ea typeface="Cambria" pitchFamily="34" charset="-122"/>
+                <a:cs typeface="Cambria" pitchFamily="34" charset="-120"/>
+              </a:rPr>
+              <a:t>1・(9:30のみ2)</a:t>
+            </a:r>
+            <a:endParaRPr lang="en-US" sz="1900" dirty="0"/>
+          </a:p>
+        </p:txBody>
+      </p:sp>
+      <p:sp>
+        <p:nvSpPr>
+          <p:cNvPr id="39" name="Text 37"/>
+          <p:cNvSpPr txBox="1"/>
+          <p:nvPr/>
+        </p:nvSpPr>
+        <p:spPr>
+          <a:xfrm>
+            <a:off x="9883140" y="3538728"/>
+            <a:ext cx="1620012" cy="457200"/>
+          </a:xfrm>
+          <a:prstGeom prst="rect">
+            <a:avLst/>
+          </a:prstGeom>
+          <a:noFill/>
+          <a:ln/>
+        </p:spPr>
+        <p:txBody>
+          <a:bodyPr wrap="square" lIns="0" tIns="0" rIns="0" bIns="0" rtlCol="0" anchor="ctr"/>
+          <a:lstStyle/>
+          <a:p>
+            <a:pPr algn="r" indent="0" marL="0">
+              <a:buNone/>
+            </a:pPr>
+            <a:r>
+              <a:rPr lang="en-US" sz="1900" b="1" dirty="0">
+                <a:solidFill>
+                  <a:srgbClr val="EDA100"/>
+                </a:solidFill>
+                <a:latin typeface="Cambria" pitchFamily="34" charset="0"/>
+                <a:ea typeface="Cambria" pitchFamily="34" charset="-122"/>
+                <a:cs typeface="Cambria" pitchFamily="34" charset="-120"/>
+              </a:rPr>
+              <a:t>1・1</a:t>
+            </a:r>
+            <a:endParaRPr lang="en-US" sz="1900" dirty="0"/>
+          </a:p>
+        </p:txBody>
+      </p:sp>
+      <p:sp>
+        <p:nvSpPr>
+          <p:cNvPr id="40" name="Shape 38"/>
+          <p:cNvSpPr/>
+          <p:nvPr/>
+        </p:nvSpPr>
+        <p:spPr>
+          <a:xfrm>
+            <a:off x="548640" y="4279392"/>
+            <a:ext cx="91440" cy="146304"/>
+          </a:xfrm>
+          <a:prstGeom prst="rect">
+            <a:avLst/>
+          </a:prstGeom>
+          <a:solidFill>
+            <a:srgbClr val="EDA100"/>
+          </a:solidFill>
+          <a:ln/>
+        </p:spPr>
+      </p:sp>
+      <p:sp>
+        <p:nvSpPr>
+          <p:cNvPr id="41" name="Text 39"/>
+          <p:cNvSpPr txBox="1"/>
+          <p:nvPr/>
+        </p:nvSpPr>
+        <p:spPr>
+          <a:xfrm>
+            <a:off x="731520" y="4215384"/>
+            <a:ext cx="5486400" cy="274320"/>
+          </a:xfrm>
+          <a:prstGeom prst="rect">
+            <a:avLst/>
+          </a:prstGeom>
+          <a:noFill/>
+          <a:ln/>
+        </p:spPr>
+        <p:txBody>
+          <a:bodyPr wrap="square" lIns="0" tIns="0" rIns="0" bIns="0" rtlCol="0" anchor="ctr"/>
+          <a:lstStyle/>
+          <a:p>
+            <a:pPr indent="0" marL="0">
+              <a:buNone/>
+            </a:pPr>
+            <a:r>
+              <a:rPr lang="en-US" sz="1250" b="1" dirty="0">
+                <a:solidFill>
+                  <a:srgbClr val="21295C"/>
+                </a:solidFill>
+                <a:latin typeface="Calibri" pitchFamily="34" charset="0"/>
+                <a:ea typeface="Calibri" pitchFamily="34" charset="-122"/>
+                <a:cs typeface="Calibri" pitchFamily="34" charset="-120"/>
+              </a:rPr>
+              <a:t>毎日のコンディション（夜のアプリ記録）</a:t>
+            </a:r>
+            <a:endParaRPr lang="en-US" sz="1250" dirty="0"/>
+          </a:p>
+        </p:txBody>
+      </p:sp>
+      <p:graphicFrame>
+        <p:nvGraphicFramePr>
+          <p:cNvPr id="6" name="Table 0"/>
+          <p:cNvGraphicFramePr>
+            <a:graphicFrameLocks noGrp="1"/>
+          </p:cNvGraphicFramePr>
+          <p:nvPr>
+            <p:extLst>
+              <p:ext uri="{D42A27DB-BD31-4B8C-83A1-F6EECF244321}">
+                <p14:modId xmlns:p14="http://schemas.microsoft.com/office/powerpoint/2010/main" val="1579011935"/>
+              </p:ext>
+            </p:extLst>
+          </p:nvPr>
+        </p:nvGraphicFramePr>
+        <p:xfrm>
+          <a:off x="548640" y="4507992"/>
+          <a:ext cx="6949440" cy="1188720"/>
+        </p:xfrm>
+        <a:graphic>
+          <a:graphicData uri="http://schemas.openxmlformats.org/drawingml/2006/table">
+            <a:tbl>
+              <a:tblPr/>
+              <a:tblGrid>
+                <a:gridCol w="2377440"/>
+                <a:gridCol w="2286000"/>
+                <a:gridCol w="2286000"/>
+              </a:tblGrid>
+              <a:tr h="169164">
+                <a:tc>
+                  <a:txBody>
+                    <a:bodyPr/>
+                    <a:lstStyle/>
+                    <a:p>
+                      <a:pPr indent="0" marL="0">
+                        <a:buNone/>
+                      </a:pPr>
+                      <a:endParaRPr lang="en-US" sz="1050" dirty="0">
+                        <a:latin typeface="Calibri" charset="0"/>
+                        <a:ea typeface="Calibri" charset="0"/>
+                        <a:cs typeface="Calibri" charset="0"/>
+                      </a:endParaRPr>
+                    </a:p>
+                  </a:txBody>
+                  <a:tcPr marL="91440" marR="91440" marT="45720" marB="45720" anchor="ctr">
+                    <a:lnL w="6350" cap="flat" cmpd="sng" algn="ctr">
+                      <a:solidFill>
+                        <a:srgbClr val="E3E1DB"/>
+                      </a:solidFill>
+                      <a:prstDash val="solid"/>
+                      <a:round/>
+                      <a:headEnd type="none" w="med" len="med"/>
+                      <a:tailEnd type="none" w="med" len="med"/>
+                    </a:lnL>
+                    <a:lnR w="6350" cap="flat" cmpd="sng" algn="ctr">
+                      <a:solidFill>
+                        <a:srgbClr val="E3E1DB"/>
+                      </a:solidFill>
+                      <a:prstDash val="solid"/>
+                      <a:round/>
+                      <a:headEnd type="none" w="med" len="med"/>
+                      <a:tailEnd type="none" w="med" len="med"/>
+                    </a:lnR>
+                    <a:lnT w="6350" cap="flat" cmpd="sng" algn="ctr">
+                      <a:solidFill>
+                        <a:srgbClr val="E3E1DB"/>
+                      </a:solidFill>
+                      <a:prstDash val="solid"/>
+                      <a:round/>
+                      <a:headEnd type="none" w="med" len="med"/>
+                      <a:tailEnd type="none" w="med" len="med"/>
+                    </a:lnT>
+                    <a:lnB w="6350" cap="flat" cmpd="sng" algn="ctr">
+                      <a:solidFill>
+                        <a:srgbClr val="E3E1DB"/>
+                      </a:solidFill>
+                      <a:prstDash val="solid"/>
+                      <a:round/>
+                      <a:headEnd type="none" w="med" len="med"/>
+                      <a:tailEnd type="none" w="med" len="med"/>
+                    </a:lnB>
+                    <a:solidFill>
+                      <a:srgbClr val="21295C"/>
+                    </a:solidFill>
+                  </a:tcPr>
+                </a:tc>
+                <a:tc>
+                  <a:txBody>
+                    <a:bodyPr/>
+                    <a:lstStyle/>
+                    <a:p>
+                      <a:pPr indent="0" marL="0">
+                        <a:buNone/>
+                      </a:pPr>
+                      <a:r>
+                        <a:rPr lang="en-US" sz="1050" b="1" dirty="0">
+                          <a:solidFill>
+                            <a:srgbClr val="FFFFFF"/>
+                          </a:solidFill>
+                          <a:latin typeface="Calibri" pitchFamily="34" charset="0"/>
+                          <a:ea typeface="Calibri" pitchFamily="34" charset="-122"/>
+                          <a:cs typeface="Calibri" pitchFamily="34" charset="-120"/>
+                        </a:rPr>
+                        <a:t>おにぎり＋スムージー</a:t>
+                      </a:r>
+                      <a:endParaRPr lang="en-US" sz="1050" dirty="0">
+                        <a:latin typeface="Calibri" charset="0"/>
+                        <a:ea typeface="Calibri" charset="0"/>
+                        <a:cs typeface="Calibri" charset="0"/>
+                      </a:endParaRPr>
+                    </a:p>
+                  </a:txBody>
+                  <a:tcPr marL="91440" marR="91440" marT="45720" marB="45720" anchor="ctr">
+                    <a:lnL w="6350" cap="flat" cmpd="sng" algn="ctr">
+                      <a:solidFill>
+                        <a:srgbClr val="E3E1DB"/>
+                      </a:solidFill>
+                      <a:prstDash val="solid"/>
+                      <a:round/>
+                      <a:headEnd type="none" w="med" len="med"/>
+                      <a:tailEnd type="none" w="med" len="med"/>
+                    </a:lnL>
+                    <a:lnR w="6350" cap="flat" cmpd="sng" algn="ctr">
+                      <a:solidFill>
+                        <a:srgbClr val="E3E1DB"/>
+                      </a:solidFill>
+                      <a:prstDash val="solid"/>
+                      <a:round/>
+                      <a:headEnd type="none" w="med" len="med"/>
+                      <a:tailEnd type="none" w="med" len="med"/>
+                    </a:lnR>
+                    <a:lnT w="6350" cap="flat" cmpd="sng" algn="ctr">
+                      <a:solidFill>
+                        <a:srgbClr val="E3E1DB"/>
+                      </a:solidFill>
+                      <a:prstDash val="solid"/>
+                      <a:round/>
+                      <a:headEnd type="none" w="med" len="med"/>
+                      <a:tailEnd type="none" w="med" len="med"/>
+                    </a:lnT>
+                    <a:lnB w="6350" cap="flat" cmpd="sng" algn="ctr">
+                      <a:solidFill>
+                        <a:srgbClr val="E3E1DB"/>
+                      </a:solidFill>
+                      <a:prstDash val="solid"/>
+                      <a:round/>
+                      <a:headEnd type="none" w="med" len="med"/>
+                      <a:tailEnd type="none" w="med" len="med"/>
+                    </a:lnB>
+                    <a:solidFill>
+                      <a:srgbClr val="21295C"/>
+                    </a:solidFill>
+                  </a:tcPr>
+                </a:tc>
+                <a:tc>
+                  <a:txBody>
+                    <a:bodyPr/>
+                    <a:lstStyle/>
+                    <a:p>
+                      <a:pPr indent="0" marL="0">
+                        <a:buNone/>
+                      </a:pPr>
+                      <a:r>
+                        <a:rPr lang="en-US" sz="1050" b="1" dirty="0">
+                          <a:solidFill>
+                            <a:srgbClr val="FFFFFF"/>
+                          </a:solidFill>
+                          <a:latin typeface="Calibri" pitchFamily="34" charset="0"/>
+                          <a:ea typeface="Calibri" pitchFamily="34" charset="-122"/>
+                          <a:cs typeface="Calibri" pitchFamily="34" charset="-120"/>
+                        </a:rPr>
+                        <a:t>おにぎり＋糖質減</a:t>
+                      </a:r>
+                      <a:endParaRPr lang="en-US" sz="1050" dirty="0">
+                        <a:latin typeface="Calibri" charset="0"/>
+                        <a:ea typeface="Calibri" charset="0"/>
+                        <a:cs typeface="Calibri" charset="0"/>
+                      </a:endParaRPr>
+                    </a:p>
+                  </a:txBody>
+                  <a:tcPr marL="91440" marR="91440" marT="45720" marB="45720" anchor="ctr">
+                    <a:lnL w="6350" cap="flat" cmpd="sng" algn="ctr">
+                      <a:solidFill>
+                        <a:srgbClr val="E3E1DB"/>
+                      </a:solidFill>
+                      <a:prstDash val="solid"/>
+                      <a:round/>
+                      <a:headEnd type="none" w="med" len="med"/>
+                      <a:tailEnd type="none" w="med" len="med"/>
+                    </a:lnL>
+                    <a:lnR w="6350" cap="flat" cmpd="sng" algn="ctr">
+                      <a:solidFill>
+                        <a:srgbClr val="E3E1DB"/>
+                      </a:solidFill>
+                      <a:prstDash val="solid"/>
+                      <a:round/>
+                      <a:headEnd type="none" w="med" len="med"/>
+                      <a:tailEnd type="none" w="med" len="med"/>
+                    </a:lnR>
+                    <a:lnT w="6350" cap="flat" cmpd="sng" algn="ctr">
+                      <a:solidFill>
+                        <a:srgbClr val="E3E1DB"/>
+                      </a:solidFill>
+                      <a:prstDash val="solid"/>
+                      <a:round/>
+                      <a:headEnd type="none" w="med" len="med"/>
+                      <a:tailEnd type="none" w="med" len="med"/>
+                    </a:lnT>
+                    <a:lnB w="6350" cap="flat" cmpd="sng" algn="ctr">
+                      <a:solidFill>
+                        <a:srgbClr val="E3E1DB"/>
+                      </a:solidFill>
+                      <a:prstDash val="solid"/>
+                      <a:round/>
+                      <a:headEnd type="none" w="med" len="med"/>
+                      <a:tailEnd type="none" w="med" len="med"/>
+                    </a:lnB>
+                    <a:solidFill>
+                      <a:srgbClr val="21295C"/>
+                    </a:solidFill>
+                  </a:tcPr>
+                </a:tc>
+              </a:tr>
+              <a:tr h="169164">
+                <a:tc>
+                  <a:txBody>
+                    <a:bodyPr/>
+                    <a:lstStyle/>
+                    <a:p>
+                      <a:pPr indent="0" marL="0">
+                        <a:buNone/>
+                      </a:pPr>
+                      <a:r>
+                        <a:rPr lang="en-US" sz="1050" b="1" dirty="0">
+                          <a:solidFill>
+                            <a:srgbClr val="21295C"/>
+                          </a:solidFill>
+                          <a:latin typeface="Calibri" pitchFamily="34" charset="0"/>
+                          <a:ea typeface="Calibri" pitchFamily="34" charset="-122"/>
+                          <a:cs typeface="Calibri" pitchFamily="34" charset="-120"/>
+                        </a:rPr>
+                        <a:t>起床時コンディション</a:t>
+                      </a:r>
+                      <a:endParaRPr lang="en-US" sz="1050" dirty="0">
+                        <a:latin typeface="Calibri" charset="0"/>
+                        <a:ea typeface="Calibri" charset="0"/>
+                        <a:cs typeface="Calibri" charset="0"/>
+                      </a:endParaRPr>
+                    </a:p>
+                  </a:txBody>
+                  <a:tcPr marL="91440" marR="91440" marT="45720" marB="45720" anchor="ctr">
+                    <a:lnL w="6350" cap="flat" cmpd="sng" algn="ctr">
+                      <a:solidFill>
+                        <a:srgbClr val="E3E1DB"/>
+                      </a:solidFill>
+                      <a:prstDash val="solid"/>
+                      <a:round/>
+                      <a:headEnd type="none" w="med" len="med"/>
+                      <a:tailEnd type="none" w="med" len="med"/>
+                    </a:lnL>
+                    <a:lnR w="6350" cap="flat" cmpd="sng" algn="ctr">
+                      <a:solidFill>
+                        <a:srgbClr val="E3E1DB"/>
+                      </a:solidFill>
+                      <a:prstDash val="solid"/>
+                      <a:round/>
+                      <a:headEnd type="none" w="med" len="med"/>
+                      <a:tailEnd type="none" w="med" len="med"/>
+                    </a:lnR>
+                    <a:lnT w="6350" cap="flat" cmpd="sng" algn="ctr">
+                      <a:solidFill>
+                        <a:srgbClr val="E3E1DB"/>
+                      </a:solidFill>
+                      <a:prstDash val="solid"/>
+                      <a:round/>
+                      <a:headEnd type="none" w="med" len="med"/>
+                      <a:tailEnd type="none" w="med" len="med"/>
+                    </a:lnT>
+                    <a:lnB w="6350" cap="flat" cmpd="sng" algn="ctr">
+                      <a:solidFill>
+                        <a:srgbClr val="E3E1DB"/>
+                      </a:solidFill>
+                      <a:prstDash val="solid"/>
+                      <a:round/>
+                      <a:headEnd type="none" w="med" len="med"/>
+                      <a:tailEnd type="none" w="med" len="med"/>
+                    </a:lnB>
+                    <a:solidFill>
+                      <a:srgbClr val="F4F7F9"/>
+                    </a:solidFill>
+                  </a:tcPr>
+                </a:tc>
+                <a:tc>
+                  <a:txBody>
+                    <a:bodyPr/>
+                    <a:lstStyle/>
+                    <a:p>
+                      <a:pPr indent="0" marL="0">
+                        <a:buNone/>
+                      </a:pPr>
+                      <a:r>
+                        <a:rPr lang="en-US" sz="1050" dirty="0">
+                          <a:solidFill>
+                            <a:srgbClr val="1A1A1A"/>
+                          </a:solidFill>
+                          <a:latin typeface="Calibri" pitchFamily="34" charset="0"/>
+                          <a:ea typeface="Calibri" pitchFamily="34" charset="-122"/>
+                          <a:cs typeface="Calibri" pitchFamily="34" charset="-120"/>
+                        </a:rPr>
+                        <a:t>2.33</a:t>
+                      </a:r>
+                      <a:endParaRPr lang="en-US" sz="1050" dirty="0">
+                        <a:latin typeface="Calibri" charset="0"/>
+                        <a:ea typeface="Calibri" charset="0"/>
+                        <a:cs typeface="Calibri" charset="0"/>
+                      </a:endParaRPr>
+                    </a:p>
+                  </a:txBody>
+                  <a:tcPr marL="91440" marR="91440" marT="45720" marB="45720" anchor="ctr">
+                    <a:lnL w="6350" cap="flat" cmpd="sng" algn="ctr">
+                      <a:solidFill>
+                        <a:srgbClr val="E3E1DB"/>
+                      </a:solidFill>
+                      <a:prstDash val="solid"/>
+                      <a:round/>
+                      <a:headEnd type="none" w="med" len="med"/>
+                      <a:tailEnd type="none" w="med" len="med"/>
+                    </a:lnL>
+                    <a:lnR w="6350" cap="flat" cmpd="sng" algn="ctr">
+                      <a:solidFill>
+                        <a:srgbClr val="E3E1DB"/>
+                      </a:solidFill>
+                      <a:prstDash val="solid"/>
+                      <a:round/>
+                      <a:headEnd type="none" w="med" len="med"/>
+                      <a:tailEnd type="none" w="med" len="med"/>
+                    </a:lnR>
+                    <a:lnT w="6350" cap="flat" cmpd="sng" algn="ctr">
+                      <a:solidFill>
+                        <a:srgbClr val="E3E1DB"/>
+                      </a:solidFill>
+                      <a:prstDash val="solid"/>
+                      <a:round/>
+                      <a:headEnd type="none" w="med" len="med"/>
+                      <a:tailEnd type="none" w="med" len="med"/>
+                    </a:lnT>
+                    <a:lnB w="6350" cap="flat" cmpd="sng" algn="ctr">
+                      <a:solidFill>
+                        <a:srgbClr val="E3E1DB"/>
+                      </a:solidFill>
+                      <a:prstDash val="solid"/>
+                      <a:round/>
+                      <a:headEnd type="none" w="med" len="med"/>
+                      <a:tailEnd type="none" w="med" len="med"/>
+                    </a:lnB>
+                    <a:solidFill>
+                      <a:srgbClr val="F4F7F9"/>
+                    </a:solidFill>
+                  </a:tcPr>
+                </a:tc>
+                <a:tc>
+                  <a:txBody>
+                    <a:bodyPr/>
+                    <a:lstStyle/>
+                    <a:p>
+                      <a:pPr indent="0" marL="0">
+                        <a:buNone/>
+                      </a:pPr>
+                      <a:r>
+                        <a:rPr lang="en-US" sz="1050" dirty="0">
+                          <a:solidFill>
+                            <a:srgbClr val="1A1A1A"/>
+                          </a:solidFill>
+                          <a:latin typeface="Calibri" pitchFamily="34" charset="0"/>
+                          <a:ea typeface="Calibri" pitchFamily="34" charset="-122"/>
+                          <a:cs typeface="Calibri" pitchFamily="34" charset="-120"/>
+                        </a:rPr>
+                        <a:t>2.67</a:t>
+                      </a:r>
+                      <a:endParaRPr lang="en-US" sz="1050" dirty="0">
+                        <a:latin typeface="Calibri" charset="0"/>
+                        <a:ea typeface="Calibri" charset="0"/>
+                        <a:cs typeface="Calibri" charset="0"/>
+                      </a:endParaRPr>
+                    </a:p>
+                  </a:txBody>
+                  <a:tcPr marL="91440" marR="91440" marT="45720" marB="45720" anchor="ctr">
+                    <a:lnL w="6350" cap="flat" cmpd="sng" algn="ctr">
+                      <a:solidFill>
+                        <a:srgbClr val="E3E1DB"/>
+                      </a:solidFill>
+                      <a:prstDash val="solid"/>
+                      <a:round/>
+                      <a:headEnd type="none" w="med" len="med"/>
+                      <a:tailEnd type="none" w="med" len="med"/>
+                    </a:lnL>
+                    <a:lnR w="6350" cap="flat" cmpd="sng" algn="ctr">
+                      <a:solidFill>
+                        <a:srgbClr val="E3E1DB"/>
+                      </a:solidFill>
+                      <a:prstDash val="solid"/>
+                      <a:round/>
+                      <a:headEnd type="none" w="med" len="med"/>
+                      <a:tailEnd type="none" w="med" len="med"/>
+                    </a:lnR>
+                    <a:lnT w="6350" cap="flat" cmpd="sng" algn="ctr">
+                      <a:solidFill>
+                        <a:srgbClr val="E3E1DB"/>
+                      </a:solidFill>
+                      <a:prstDash val="solid"/>
+                      <a:round/>
+                      <a:headEnd type="none" w="med" len="med"/>
+                      <a:tailEnd type="none" w="med" len="med"/>
+                    </a:lnT>
+                    <a:lnB w="6350" cap="flat" cmpd="sng" algn="ctr">
+                      <a:solidFill>
+                        <a:srgbClr val="E3E1DB"/>
+                      </a:solidFill>
+                      <a:prstDash val="solid"/>
+                      <a:round/>
+                      <a:headEnd type="none" w="med" len="med"/>
+                      <a:tailEnd type="none" w="med" len="med"/>
+                    </a:lnB>
+                    <a:solidFill>
+                      <a:srgbClr val="F4F7F9"/>
+                    </a:solidFill>
+                  </a:tcPr>
+                </a:tc>
+              </a:tr>
+              <a:tr h="169164">
+                <a:tc>
+                  <a:txBody>
+                    <a:bodyPr/>
+                    <a:lstStyle/>
+                    <a:p>
+                      <a:pPr indent="0" marL="0">
+                        <a:buNone/>
+                      </a:pPr>
+                      <a:r>
+                        <a:rPr lang="en-US" sz="1050" b="1" dirty="0">
+                          <a:solidFill>
+                            <a:srgbClr val="21295C"/>
+                          </a:solidFill>
+                          <a:latin typeface="Calibri" pitchFamily="34" charset="0"/>
+                          <a:ea typeface="Calibri" pitchFamily="34" charset="-122"/>
+                          <a:cs typeface="Calibri" pitchFamily="34" charset="-120"/>
+                        </a:rPr>
+                        <a:t>睡眠の質</a:t>
+                      </a:r>
+                      <a:endParaRPr lang="en-US" sz="1050" dirty="0">
+                        <a:latin typeface="Calibri" charset="0"/>
+                        <a:ea typeface="Calibri" charset="0"/>
+                        <a:cs typeface="Calibri" charset="0"/>
+                      </a:endParaRPr>
+                    </a:p>
+                  </a:txBody>
+                  <a:tcPr marL="91440" marR="91440" marT="45720" marB="45720" anchor="ctr">
+                    <a:lnL w="6350" cap="flat" cmpd="sng" algn="ctr">
+                      <a:solidFill>
+                        <a:srgbClr val="E3E1DB"/>
+                      </a:solidFill>
+                      <a:prstDash val="solid"/>
+                      <a:round/>
+                      <a:headEnd type="none" w="med" len="med"/>
+                      <a:tailEnd type="none" w="med" len="med"/>
+                    </a:lnL>
+                    <a:lnR w="6350" cap="flat" cmpd="sng" algn="ctr">
+                      <a:solidFill>
+                        <a:srgbClr val="E3E1DB"/>
+                      </a:solidFill>
+                      <a:prstDash val="solid"/>
+                      <a:round/>
+                      <a:headEnd type="none" w="med" len="med"/>
+                      <a:tailEnd type="none" w="med" len="med"/>
+                    </a:lnR>
+                    <a:lnT w="6350" cap="flat" cmpd="sng" algn="ctr">
+                      <a:solidFill>
+                        <a:srgbClr val="E3E1DB"/>
+                      </a:solidFill>
+                      <a:prstDash val="solid"/>
+                      <a:round/>
+                      <a:headEnd type="none" w="med" len="med"/>
+                      <a:tailEnd type="none" w="med" len="med"/>
+                    </a:lnT>
+                    <a:lnB w="6350" cap="flat" cmpd="sng" algn="ctr">
+                      <a:solidFill>
+                        <a:srgbClr val="E3E1DB"/>
+                      </a:solidFill>
+                      <a:prstDash val="solid"/>
+                      <a:round/>
+                      <a:headEnd type="none" w="med" len="med"/>
+                      <a:tailEnd type="none" w="med" len="med"/>
+                    </a:lnB>
+                    <a:solidFill>
+                      <a:srgbClr val="FFFFFF"/>
+                    </a:solidFill>
+                  </a:tcPr>
+                </a:tc>
+                <a:tc>
+                  <a:txBody>
+                    <a:bodyPr/>
+                    <a:lstStyle/>
+                    <a:p>
+                      <a:pPr indent="0" marL="0">
+                        <a:buNone/>
+                      </a:pPr>
+                      <a:r>
+                        <a:rPr lang="en-US" sz="1050" dirty="0">
+                          <a:solidFill>
+                            <a:srgbClr val="1A1A1A"/>
+                          </a:solidFill>
+                          <a:latin typeface="Calibri" pitchFamily="34" charset="0"/>
+                          <a:ea typeface="Calibri" pitchFamily="34" charset="-122"/>
+                          <a:cs typeface="Calibri" pitchFamily="34" charset="-120"/>
+                        </a:rPr>
+                        <a:t>2.00</a:t>
+                      </a:r>
+                      <a:endParaRPr lang="en-US" sz="1050" dirty="0">
+                        <a:latin typeface="Calibri" charset="0"/>
+                        <a:ea typeface="Calibri" charset="0"/>
+                        <a:cs typeface="Calibri" charset="0"/>
+                      </a:endParaRPr>
+                    </a:p>
+                  </a:txBody>
+                  <a:tcPr marL="91440" marR="91440" marT="45720" marB="45720" anchor="ctr">
+                    <a:lnL w="6350" cap="flat" cmpd="sng" algn="ctr">
+                      <a:solidFill>
+                        <a:srgbClr val="E3E1DB"/>
+                      </a:solidFill>
+                      <a:prstDash val="solid"/>
+                      <a:round/>
+                      <a:headEnd type="none" w="med" len="med"/>
+                      <a:tailEnd type="none" w="med" len="med"/>
+                    </a:lnL>
+                    <a:lnR w="6350" cap="flat" cmpd="sng" algn="ctr">
+                      <a:solidFill>
+                        <a:srgbClr val="E3E1DB"/>
+                      </a:solidFill>
+                      <a:prstDash val="solid"/>
+                      <a:round/>
+                      <a:headEnd type="none" w="med" len="med"/>
+                      <a:tailEnd type="none" w="med" len="med"/>
+                    </a:lnR>
+                    <a:lnT w="6350" cap="flat" cmpd="sng" algn="ctr">
+                      <a:solidFill>
+                        <a:srgbClr val="E3E1DB"/>
+                      </a:solidFill>
+                      <a:prstDash val="solid"/>
+                      <a:round/>
+                      <a:headEnd type="none" w="med" len="med"/>
+                      <a:tailEnd type="none" w="med" len="med"/>
+                    </a:lnT>
+                    <a:lnB w="6350" cap="flat" cmpd="sng" algn="ctr">
+                      <a:solidFill>
+                        <a:srgbClr val="E3E1DB"/>
+                      </a:solidFill>
+                      <a:prstDash val="solid"/>
+                      <a:round/>
+                      <a:headEnd type="none" w="med" len="med"/>
+                      <a:tailEnd type="none" w="med" len="med"/>
+                    </a:lnB>
+                    <a:solidFill>
+                      <a:srgbClr val="FFFFFF"/>
+                    </a:solidFill>
+                  </a:tcPr>
+                </a:tc>
+                <a:tc>
+                  <a:txBody>
+                    <a:bodyPr/>
+                    <a:lstStyle/>
+                    <a:p>
+                      <a:pPr indent="0" marL="0">
+                        <a:buNone/>
+                      </a:pPr>
+                      <a:r>
+                        <a:rPr lang="en-US" sz="1050" dirty="0">
+                          <a:solidFill>
+                            <a:srgbClr val="1A1A1A"/>
+                          </a:solidFill>
+                          <a:latin typeface="Calibri" pitchFamily="34" charset="0"/>
+                          <a:ea typeface="Calibri" pitchFamily="34" charset="-122"/>
+                          <a:cs typeface="Calibri" pitchFamily="34" charset="-120"/>
+                        </a:rPr>
+                        <a:t>2.67</a:t>
+                      </a:r>
+                      <a:endParaRPr lang="en-US" sz="1050" dirty="0">
+                        <a:latin typeface="Calibri" charset="0"/>
+                        <a:ea typeface="Calibri" charset="0"/>
+                        <a:cs typeface="Calibri" charset="0"/>
+                      </a:endParaRPr>
+                    </a:p>
+                  </a:txBody>
+                  <a:tcPr marL="91440" marR="91440" marT="45720" marB="45720" anchor="ctr">
+                    <a:lnL w="6350" cap="flat" cmpd="sng" algn="ctr">
+                      <a:solidFill>
+                        <a:srgbClr val="E3E1DB"/>
+                      </a:solidFill>
+                      <a:prstDash val="solid"/>
+                      <a:round/>
+                      <a:headEnd type="none" w="med" len="med"/>
+                      <a:tailEnd type="none" w="med" len="med"/>
+                    </a:lnL>
+                    <a:lnR w="6350" cap="flat" cmpd="sng" algn="ctr">
+                      <a:solidFill>
+                        <a:srgbClr val="E3E1DB"/>
+                      </a:solidFill>
+                      <a:prstDash val="solid"/>
+                      <a:round/>
+                      <a:headEnd type="none" w="med" len="med"/>
+                      <a:tailEnd type="none" w="med" len="med"/>
+                    </a:lnR>
+                    <a:lnT w="6350" cap="flat" cmpd="sng" algn="ctr">
+                      <a:solidFill>
+                        <a:srgbClr val="E3E1DB"/>
+                      </a:solidFill>
+                      <a:prstDash val="solid"/>
+                      <a:round/>
+                      <a:headEnd type="none" w="med" len="med"/>
+                      <a:tailEnd type="none" w="med" len="med"/>
+                    </a:lnT>
+                    <a:lnB w="6350" cap="flat" cmpd="sng" algn="ctr">
+                      <a:solidFill>
+                        <a:srgbClr val="E3E1DB"/>
+                      </a:solidFill>
+                      <a:prstDash val="solid"/>
+                      <a:round/>
+                      <a:headEnd type="none" w="med" len="med"/>
+                      <a:tailEnd type="none" w="med" len="med"/>
+                    </a:lnB>
+                    <a:solidFill>
+                      <a:srgbClr val="FFFFFF"/>
+                    </a:solidFill>
+                  </a:tcPr>
+                </a:tc>
+              </a:tr>
+              <a:tr h="169164">
+                <a:tc>
+                  <a:txBody>
+                    <a:bodyPr/>
+                    <a:lstStyle/>
+                    <a:p>
+                      <a:pPr indent="0" marL="0">
+                        <a:buNone/>
+                      </a:pPr>
+                      <a:r>
+                        <a:rPr lang="en-US" sz="1050" b="1" dirty="0">
+                          <a:solidFill>
+                            <a:srgbClr val="21295C"/>
+                          </a:solidFill>
+                          <a:latin typeface="Calibri" pitchFamily="34" charset="0"/>
+                          <a:ea typeface="Calibri" pitchFamily="34" charset="-122"/>
+                          <a:cs typeface="Calibri" pitchFamily="34" charset="-120"/>
+                        </a:rPr>
+                        <a:t>RPE</a:t>
+                      </a:r>
+                      <a:endParaRPr lang="en-US" sz="1050" dirty="0">
+                        <a:latin typeface="Calibri" charset="0"/>
+                        <a:ea typeface="Calibri" charset="0"/>
+                        <a:cs typeface="Calibri" charset="0"/>
+                      </a:endParaRPr>
+                    </a:p>
+                  </a:txBody>
+                  <a:tcPr marL="91440" marR="91440" marT="45720" marB="45720" anchor="ctr">
+                    <a:lnL w="6350" cap="flat" cmpd="sng" algn="ctr">
+                      <a:solidFill>
+                        <a:srgbClr val="E3E1DB"/>
+                      </a:solidFill>
+                      <a:prstDash val="solid"/>
+                      <a:round/>
+                      <a:headEnd type="none" w="med" len="med"/>
+                      <a:tailEnd type="none" w="med" len="med"/>
+                    </a:lnL>
+                    <a:lnR w="6350" cap="flat" cmpd="sng" algn="ctr">
+                      <a:solidFill>
+                        <a:srgbClr val="E3E1DB"/>
+                      </a:solidFill>
+                      <a:prstDash val="solid"/>
+                      <a:round/>
+                      <a:headEnd type="none" w="med" len="med"/>
+                      <a:tailEnd type="none" w="med" len="med"/>
+                    </a:lnR>
+                    <a:lnT w="6350" cap="flat" cmpd="sng" algn="ctr">
+                      <a:solidFill>
+                        <a:srgbClr val="E3E1DB"/>
+                      </a:solidFill>
+                      <a:prstDash val="solid"/>
+                      <a:round/>
+                      <a:headEnd type="none" w="med" len="med"/>
+                      <a:tailEnd type="none" w="med" len="med"/>
+                    </a:lnT>
+                    <a:lnB w="6350" cap="flat" cmpd="sng" algn="ctr">
+                      <a:solidFill>
+                        <a:srgbClr val="E3E1DB"/>
+                      </a:solidFill>
+                      <a:prstDash val="solid"/>
+                      <a:round/>
+                      <a:headEnd type="none" w="med" len="med"/>
+                      <a:tailEnd type="none" w="med" len="med"/>
+                    </a:lnB>
+                    <a:solidFill>
+                      <a:srgbClr val="F4F7F9"/>
+                    </a:solidFill>
+                  </a:tcPr>
+                </a:tc>
+                <a:tc>
+                  <a:txBody>
+                    <a:bodyPr/>
+                    <a:lstStyle/>
+                    <a:p>
+                      <a:pPr indent="0" marL="0">
+                        <a:buNone/>
+                      </a:pPr>
+                      <a:r>
+                        <a:rPr lang="en-US" sz="1050" dirty="0">
+                          <a:solidFill>
+                            <a:srgbClr val="1A1A1A"/>
+                          </a:solidFill>
+                          <a:latin typeface="Calibri" pitchFamily="34" charset="0"/>
+                          <a:ea typeface="Calibri" pitchFamily="34" charset="-122"/>
+                          <a:cs typeface="Calibri" pitchFamily="34" charset="-120"/>
+                        </a:rPr>
+                        <a:t>5.50</a:t>
+                      </a:r>
+                      <a:endParaRPr lang="en-US" sz="1050" dirty="0">
+                        <a:latin typeface="Calibri" charset="0"/>
+                        <a:ea typeface="Calibri" charset="0"/>
+                        <a:cs typeface="Calibri" charset="0"/>
+                      </a:endParaRPr>
+                    </a:p>
+                  </a:txBody>
+                  <a:tcPr marL="91440" marR="91440" marT="45720" marB="45720" anchor="ctr">
+                    <a:lnL w="6350" cap="flat" cmpd="sng" algn="ctr">
+                      <a:solidFill>
+                        <a:srgbClr val="E3E1DB"/>
+                      </a:solidFill>
+                      <a:prstDash val="solid"/>
+                      <a:round/>
+                      <a:headEnd type="none" w="med" len="med"/>
+                      <a:tailEnd type="none" w="med" len="med"/>
+                    </a:lnL>
+                    <a:lnR w="6350" cap="flat" cmpd="sng" algn="ctr">
+                      <a:solidFill>
+                        <a:srgbClr val="E3E1DB"/>
+                      </a:solidFill>
+                      <a:prstDash val="solid"/>
+                      <a:round/>
+                      <a:headEnd type="none" w="med" len="med"/>
+                      <a:tailEnd type="none" w="med" len="med"/>
+                    </a:lnR>
+                    <a:lnT w="6350" cap="flat" cmpd="sng" algn="ctr">
+                      <a:solidFill>
+                        <a:srgbClr val="E3E1DB"/>
+                      </a:solidFill>
+                      <a:prstDash val="solid"/>
+                      <a:round/>
+                      <a:headEnd type="none" w="med" len="med"/>
+                      <a:tailEnd type="none" w="med" len="med"/>
+                    </a:lnT>
+                    <a:lnB w="6350" cap="flat" cmpd="sng" algn="ctr">
+                      <a:solidFill>
+                        <a:srgbClr val="E3E1DB"/>
+                      </a:solidFill>
+                      <a:prstDash val="solid"/>
+                      <a:round/>
+                      <a:headEnd type="none" w="med" len="med"/>
+                      <a:tailEnd type="none" w="med" len="med"/>
+                    </a:lnB>
+                    <a:solidFill>
+                      <a:srgbClr val="F4F7F9"/>
+                    </a:solidFill>
+                  </a:tcPr>
+                </a:tc>
+                <a:tc>
+                  <a:txBody>
+                    <a:bodyPr/>
+                    <a:lstStyle/>
+                    <a:p>
+                      <a:pPr indent="0" marL="0">
+                        <a:buNone/>
+                      </a:pPr>
+                      <a:r>
+                        <a:rPr lang="en-US" sz="1050" dirty="0">
+                          <a:solidFill>
+                            <a:srgbClr val="1A1A1A"/>
+                          </a:solidFill>
+                          <a:latin typeface="Calibri" pitchFamily="34" charset="0"/>
+                          <a:ea typeface="Calibri" pitchFamily="34" charset="-122"/>
+                          <a:cs typeface="Calibri" pitchFamily="34" charset="-120"/>
+                        </a:rPr>
+                        <a:t>6.33</a:t>
+                      </a:r>
+                      <a:endParaRPr lang="en-US" sz="1050" dirty="0">
+                        <a:latin typeface="Calibri" charset="0"/>
+                        <a:ea typeface="Calibri" charset="0"/>
+                        <a:cs typeface="Calibri" charset="0"/>
+                      </a:endParaRPr>
+                    </a:p>
+                  </a:txBody>
+                  <a:tcPr marL="91440" marR="91440" marT="45720" marB="45720" anchor="ctr">
+                    <a:lnL w="6350" cap="flat" cmpd="sng" algn="ctr">
+                      <a:solidFill>
+                        <a:srgbClr val="E3E1DB"/>
+                      </a:solidFill>
+                      <a:prstDash val="solid"/>
+                      <a:round/>
+                      <a:headEnd type="none" w="med" len="med"/>
+                      <a:tailEnd type="none" w="med" len="med"/>
+                    </a:lnL>
+                    <a:lnR w="6350" cap="flat" cmpd="sng" algn="ctr">
+                      <a:solidFill>
+                        <a:srgbClr val="E3E1DB"/>
+                      </a:solidFill>
+                      <a:prstDash val="solid"/>
+                      <a:round/>
+                      <a:headEnd type="none" w="med" len="med"/>
+                      <a:tailEnd type="none" w="med" len="med"/>
+                    </a:lnR>
+                    <a:lnT w="6350" cap="flat" cmpd="sng" algn="ctr">
+                      <a:solidFill>
+                        <a:srgbClr val="E3E1DB"/>
+                      </a:solidFill>
+                      <a:prstDash val="solid"/>
+                      <a:round/>
+                      <a:headEnd type="none" w="med" len="med"/>
+                      <a:tailEnd type="none" w="med" len="med"/>
+                    </a:lnT>
+                    <a:lnB w="6350" cap="flat" cmpd="sng" algn="ctr">
+                      <a:solidFill>
+                        <a:srgbClr val="E3E1DB"/>
+                      </a:solidFill>
+                      <a:prstDash val="solid"/>
+                      <a:round/>
+                      <a:headEnd type="none" w="med" len="med"/>
+                      <a:tailEnd type="none" w="med" len="med"/>
+                    </a:lnB>
+                    <a:solidFill>
+                      <a:srgbClr val="F4F7F9"/>
+                    </a:solidFill>
+                  </a:tcPr>
+                </a:tc>
+              </a:tr>
+              <a:tr h="169164">
+                <a:tc>
+                  <a:txBody>
+                    <a:bodyPr/>
+                    <a:lstStyle/>
+                    <a:p>
+                      <a:pPr indent="0" marL="0">
+                        <a:buNone/>
+                      </a:pPr>
+                      <a:r>
+                        <a:rPr lang="en-US" sz="1050" b="1" dirty="0">
+                          <a:solidFill>
+                            <a:srgbClr val="21295C"/>
+                          </a:solidFill>
+                          <a:latin typeface="Calibri" pitchFamily="34" charset="0"/>
+                          <a:ea typeface="Calibri" pitchFamily="34" charset="-122"/>
+                          <a:cs typeface="Calibri" pitchFamily="34" charset="-120"/>
+                        </a:rPr>
+                        <a:t>持久力</a:t>
+                      </a:r>
+                      <a:endParaRPr lang="en-US" sz="1050" dirty="0">
+                        <a:latin typeface="Calibri" charset="0"/>
+                        <a:ea typeface="Calibri" charset="0"/>
+                        <a:cs typeface="Calibri" charset="0"/>
+                      </a:endParaRPr>
+                    </a:p>
+                  </a:txBody>
+                  <a:tcPr marL="91440" marR="91440" marT="45720" marB="45720" anchor="ctr">
+                    <a:lnL w="6350" cap="flat" cmpd="sng" algn="ctr">
+                      <a:solidFill>
+                        <a:srgbClr val="E3E1DB"/>
+                      </a:solidFill>
+                      <a:prstDash val="solid"/>
+                      <a:round/>
+                      <a:headEnd type="none" w="med" len="med"/>
+                      <a:tailEnd type="none" w="med" len="med"/>
+                    </a:lnL>
+                    <a:lnR w="6350" cap="flat" cmpd="sng" algn="ctr">
+                      <a:solidFill>
+                        <a:srgbClr val="E3E1DB"/>
+                      </a:solidFill>
+                      <a:prstDash val="solid"/>
+                      <a:round/>
+                      <a:headEnd type="none" w="med" len="med"/>
+                      <a:tailEnd type="none" w="med" len="med"/>
+                    </a:lnR>
+                    <a:lnT w="6350" cap="flat" cmpd="sng" algn="ctr">
+                      <a:solidFill>
+                        <a:srgbClr val="E3E1DB"/>
+                      </a:solidFill>
+                      <a:prstDash val="solid"/>
+                      <a:round/>
+                      <a:headEnd type="none" w="med" len="med"/>
+                      <a:tailEnd type="none" w="med" len="med"/>
+                    </a:lnT>
+                    <a:lnB w="6350" cap="flat" cmpd="sng" algn="ctr">
+                      <a:solidFill>
+                        <a:srgbClr val="E3E1DB"/>
+                      </a:solidFill>
+                      <a:prstDash val="solid"/>
+                      <a:round/>
+                      <a:headEnd type="none" w="med" len="med"/>
+                      <a:tailEnd type="none" w="med" len="med"/>
+                    </a:lnB>
+                    <a:solidFill>
+                      <a:srgbClr val="FFFFFF"/>
+                    </a:solidFill>
+                  </a:tcPr>
+                </a:tc>
+                <a:tc>
+                  <a:txBody>
+                    <a:bodyPr/>
+                    <a:lstStyle/>
+                    <a:p>
+                      <a:pPr indent="0" marL="0">
+                        <a:buNone/>
+                      </a:pPr>
+                      <a:r>
+                        <a:rPr lang="en-US" sz="1050" dirty="0">
+                          <a:solidFill>
+                            <a:srgbClr val="1A1A1A"/>
+                          </a:solidFill>
+                          <a:latin typeface="Calibri" pitchFamily="34" charset="0"/>
+                          <a:ea typeface="Calibri" pitchFamily="34" charset="-122"/>
+                          <a:cs typeface="Calibri" pitchFamily="34" charset="-120"/>
+                        </a:rPr>
+                        <a:t>3.83</a:t>
+                      </a:r>
+                      <a:endParaRPr lang="en-US" sz="1050" dirty="0">
+                        <a:latin typeface="Calibri" charset="0"/>
+                        <a:ea typeface="Calibri" charset="0"/>
+                        <a:cs typeface="Calibri" charset="0"/>
+                      </a:endParaRPr>
+                    </a:p>
+                  </a:txBody>
+                  <a:tcPr marL="91440" marR="91440" marT="45720" marB="45720" anchor="ctr">
+                    <a:lnL w="6350" cap="flat" cmpd="sng" algn="ctr">
+                      <a:solidFill>
+                        <a:srgbClr val="E3E1DB"/>
+                      </a:solidFill>
+                      <a:prstDash val="solid"/>
+                      <a:round/>
+                      <a:headEnd type="none" w="med" len="med"/>
+                      <a:tailEnd type="none" w="med" len="med"/>
+                    </a:lnL>
+                    <a:lnR w="6350" cap="flat" cmpd="sng" algn="ctr">
+                      <a:solidFill>
+                        <a:srgbClr val="E3E1DB"/>
+                      </a:solidFill>
+                      <a:prstDash val="solid"/>
+                      <a:round/>
+                      <a:headEnd type="none" w="med" len="med"/>
+                      <a:tailEnd type="none" w="med" len="med"/>
+                    </a:lnR>
+                    <a:lnT w="6350" cap="flat" cmpd="sng" algn="ctr">
+                      <a:solidFill>
+                        <a:srgbClr val="E3E1DB"/>
+                      </a:solidFill>
+                      <a:prstDash val="solid"/>
+                      <a:round/>
+                      <a:headEnd type="none" w="med" len="med"/>
+                      <a:tailEnd type="none" w="med" len="med"/>
+                    </a:lnT>
+                    <a:lnB w="6350" cap="flat" cmpd="sng" algn="ctr">
+                      <a:solidFill>
+                        <a:srgbClr val="E3E1DB"/>
+                      </a:solidFill>
+                      <a:prstDash val="solid"/>
+                      <a:round/>
+                      <a:headEnd type="none" w="med" len="med"/>
+                      <a:tailEnd type="none" w="med" len="med"/>
+                    </a:lnB>
+                    <a:solidFill>
+                      <a:srgbClr val="FFFFFF"/>
+                    </a:solidFill>
+                  </a:tcPr>
+                </a:tc>
+                <a:tc>
+                  <a:txBody>
+                    <a:bodyPr/>
+                    <a:lstStyle/>
+                    <a:p>
+                      <a:pPr indent="0" marL="0">
+                        <a:buNone/>
+                      </a:pPr>
+                      <a:r>
+                        <a:rPr lang="en-US" sz="1050" dirty="0">
+                          <a:solidFill>
+                            <a:srgbClr val="1A1A1A"/>
+                          </a:solidFill>
+                          <a:latin typeface="Calibri" pitchFamily="34" charset="0"/>
+                          <a:ea typeface="Calibri" pitchFamily="34" charset="-122"/>
+                          <a:cs typeface="Calibri" pitchFamily="34" charset="-120"/>
+                        </a:rPr>
+                        <a:t>2.33</a:t>
+                      </a:r>
+                      <a:endParaRPr lang="en-US" sz="1050" dirty="0">
+                        <a:latin typeface="Calibri" charset="0"/>
+                        <a:ea typeface="Calibri" charset="0"/>
+                        <a:cs typeface="Calibri" charset="0"/>
+                      </a:endParaRPr>
+                    </a:p>
+                  </a:txBody>
+                  <a:tcPr marL="91440" marR="91440" marT="45720" marB="45720" anchor="ctr">
+                    <a:lnL w="6350" cap="flat" cmpd="sng" algn="ctr">
+                      <a:solidFill>
+                        <a:srgbClr val="E3E1DB"/>
+                      </a:solidFill>
+                      <a:prstDash val="solid"/>
+                      <a:round/>
+                      <a:headEnd type="none" w="med" len="med"/>
+                      <a:tailEnd type="none" w="med" len="med"/>
+                    </a:lnL>
+                    <a:lnR w="6350" cap="flat" cmpd="sng" algn="ctr">
+                      <a:solidFill>
+                        <a:srgbClr val="E3E1DB"/>
+                      </a:solidFill>
+                      <a:prstDash val="solid"/>
+                      <a:round/>
+                      <a:headEnd type="none" w="med" len="med"/>
+                      <a:tailEnd type="none" w="med" len="med"/>
+                    </a:lnR>
+                    <a:lnT w="6350" cap="flat" cmpd="sng" algn="ctr">
+                      <a:solidFill>
+                        <a:srgbClr val="E3E1DB"/>
+                      </a:solidFill>
+                      <a:prstDash val="solid"/>
+                      <a:round/>
+                      <a:headEnd type="none" w="med" len="med"/>
+                      <a:tailEnd type="none" w="med" len="med"/>
+                    </a:lnT>
+                    <a:lnB w="6350" cap="flat" cmpd="sng" algn="ctr">
+                      <a:solidFill>
+                        <a:srgbClr val="E3E1DB"/>
+                      </a:solidFill>
+                      <a:prstDash val="solid"/>
+                      <a:round/>
+                      <a:headEnd type="none" w="med" len="med"/>
+                      <a:tailEnd type="none" w="med" len="med"/>
+                    </a:lnB>
+                    <a:solidFill>
+                      <a:srgbClr val="FFFFFF"/>
+                    </a:solidFill>
+                  </a:tcPr>
+                </a:tc>
+              </a:tr>
+              <a:tr h="169164">
+                <a:tc>
+                  <a:txBody>
+                    <a:bodyPr/>
+                    <a:lstStyle/>
+                    <a:p>
+                      <a:pPr indent="0" marL="0">
+                        <a:buNone/>
+                      </a:pPr>
+                      <a:r>
+                        <a:rPr lang="en-US" sz="1050" b="1" dirty="0">
+                          <a:solidFill>
+                            <a:srgbClr val="21295C"/>
+                          </a:solidFill>
+                          <a:latin typeface="Calibri" pitchFamily="34" charset="0"/>
+                          <a:ea typeface="Calibri" pitchFamily="34" charset="-122"/>
+                          <a:cs typeface="Calibri" pitchFamily="34" charset="-120"/>
+                        </a:rPr>
+                        <a:t>爆発力</a:t>
+                      </a:r>
+                      <a:endParaRPr lang="en-US" sz="1050" dirty="0">
+                        <a:latin typeface="Calibri" charset="0"/>
+                        <a:ea typeface="Calibri" charset="0"/>
+                        <a:cs typeface="Calibri" charset="0"/>
+                      </a:endParaRPr>
+                    </a:p>
+                  </a:txBody>
+                  <a:tcPr marL="91440" marR="91440" marT="45720" marB="45720" anchor="ctr">
+                    <a:lnL w="6350" cap="flat" cmpd="sng" algn="ctr">
+                      <a:solidFill>
+                        <a:srgbClr val="E3E1DB"/>
+                      </a:solidFill>
+                      <a:prstDash val="solid"/>
+                      <a:round/>
+                      <a:headEnd type="none" w="med" len="med"/>
+                      <a:tailEnd type="none" w="med" len="med"/>
+                    </a:lnL>
+                    <a:lnR w="6350" cap="flat" cmpd="sng" algn="ctr">
+                      <a:solidFill>
+                        <a:srgbClr val="E3E1DB"/>
+                      </a:solidFill>
+                      <a:prstDash val="solid"/>
+                      <a:round/>
+                      <a:headEnd type="none" w="med" len="med"/>
+                      <a:tailEnd type="none" w="med" len="med"/>
+                    </a:lnR>
+                    <a:lnT w="6350" cap="flat" cmpd="sng" algn="ctr">
+                      <a:solidFill>
+                        <a:srgbClr val="E3E1DB"/>
+                      </a:solidFill>
+                      <a:prstDash val="solid"/>
+                      <a:round/>
+                      <a:headEnd type="none" w="med" len="med"/>
+                      <a:tailEnd type="none" w="med" len="med"/>
+                    </a:lnT>
+                    <a:lnB w="6350" cap="flat" cmpd="sng" algn="ctr">
+                      <a:solidFill>
+                        <a:srgbClr val="E3E1DB"/>
+                      </a:solidFill>
+                      <a:prstDash val="solid"/>
+                      <a:round/>
+                      <a:headEnd type="none" w="med" len="med"/>
+                      <a:tailEnd type="none" w="med" len="med"/>
+                    </a:lnB>
+                    <a:solidFill>
+                      <a:srgbClr val="F4F7F9"/>
+                    </a:solidFill>
+                  </a:tcPr>
+                </a:tc>
+                <a:tc>
+                  <a:txBody>
+                    <a:bodyPr/>
+                    <a:lstStyle/>
+                    <a:p>
+                      <a:pPr indent="0" marL="0">
+                        <a:buNone/>
+                      </a:pPr>
+                      <a:r>
+                        <a:rPr lang="en-US" sz="1050" dirty="0">
+                          <a:solidFill>
+                            <a:srgbClr val="1A1A1A"/>
+                          </a:solidFill>
+                          <a:latin typeface="Calibri" pitchFamily="34" charset="0"/>
+                          <a:ea typeface="Calibri" pitchFamily="34" charset="-122"/>
+                          <a:cs typeface="Calibri" pitchFamily="34" charset="-120"/>
+                        </a:rPr>
+                        <a:t>3.50</a:t>
+                      </a:r>
+                      <a:endParaRPr lang="en-US" sz="1050" dirty="0">
+                        <a:latin typeface="Calibri" charset="0"/>
+                        <a:ea typeface="Calibri" charset="0"/>
+                        <a:cs typeface="Calibri" charset="0"/>
+                      </a:endParaRPr>
+                    </a:p>
+                  </a:txBody>
+                  <a:tcPr marL="91440" marR="91440" marT="45720" marB="45720" anchor="ctr">
+                    <a:lnL w="6350" cap="flat" cmpd="sng" algn="ctr">
+                      <a:solidFill>
+                        <a:srgbClr val="E3E1DB"/>
+                      </a:solidFill>
+                      <a:prstDash val="solid"/>
+                      <a:round/>
+                      <a:headEnd type="none" w="med" len="med"/>
+                      <a:tailEnd type="none" w="med" len="med"/>
+                    </a:lnL>
+                    <a:lnR w="6350" cap="flat" cmpd="sng" algn="ctr">
+                      <a:solidFill>
+                        <a:srgbClr val="E3E1DB"/>
+                      </a:solidFill>
+                      <a:prstDash val="solid"/>
+                      <a:round/>
+                      <a:headEnd type="none" w="med" len="med"/>
+                      <a:tailEnd type="none" w="med" len="med"/>
+                    </a:lnR>
+                    <a:lnT w="6350" cap="flat" cmpd="sng" algn="ctr">
+                      <a:solidFill>
+                        <a:srgbClr val="E3E1DB"/>
+                      </a:solidFill>
+                      <a:prstDash val="solid"/>
+                      <a:round/>
+                      <a:headEnd type="none" w="med" len="med"/>
+                      <a:tailEnd type="none" w="med" len="med"/>
+                    </a:lnT>
+                    <a:lnB w="6350" cap="flat" cmpd="sng" algn="ctr">
+                      <a:solidFill>
+                        <a:srgbClr val="E3E1DB"/>
+                      </a:solidFill>
+                      <a:prstDash val="solid"/>
+                      <a:round/>
+                      <a:headEnd type="none" w="med" len="med"/>
+                      <a:tailEnd type="none" w="med" len="med"/>
+                    </a:lnB>
+                    <a:solidFill>
+                      <a:srgbClr val="F4F7F9"/>
+                    </a:solidFill>
+                  </a:tcPr>
+                </a:tc>
+                <a:tc>
+                  <a:txBody>
+                    <a:bodyPr/>
+                    <a:lstStyle/>
+                    <a:p>
+                      <a:pPr indent="0" marL="0">
+                        <a:buNone/>
+                      </a:pPr>
+                      <a:r>
+                        <a:rPr lang="en-US" sz="1050" dirty="0">
+                          <a:solidFill>
+                            <a:srgbClr val="1A1A1A"/>
+                          </a:solidFill>
+                          <a:latin typeface="Calibri" pitchFamily="34" charset="0"/>
+                          <a:ea typeface="Calibri" pitchFamily="34" charset="-122"/>
+                          <a:cs typeface="Calibri" pitchFamily="34" charset="-120"/>
+                        </a:rPr>
+                        <a:t>3.33</a:t>
+                      </a:r>
+                      <a:endParaRPr lang="en-US" sz="1050" dirty="0">
+                        <a:latin typeface="Calibri" charset="0"/>
+                        <a:ea typeface="Calibri" charset="0"/>
+                        <a:cs typeface="Calibri" charset="0"/>
+                      </a:endParaRPr>
+                    </a:p>
+                  </a:txBody>
+                  <a:tcPr marL="91440" marR="91440" marT="45720" marB="45720" anchor="ctr">
+                    <a:lnL w="6350" cap="flat" cmpd="sng" algn="ctr">
+                      <a:solidFill>
+                        <a:srgbClr val="E3E1DB"/>
+                      </a:solidFill>
+                      <a:prstDash val="solid"/>
+                      <a:round/>
+                      <a:headEnd type="none" w="med" len="med"/>
+                      <a:tailEnd type="none" w="med" len="med"/>
+                    </a:lnL>
+                    <a:lnR w="6350" cap="flat" cmpd="sng" algn="ctr">
+                      <a:solidFill>
+                        <a:srgbClr val="E3E1DB"/>
+                      </a:solidFill>
+                      <a:prstDash val="solid"/>
+                      <a:round/>
+                      <a:headEnd type="none" w="med" len="med"/>
+                      <a:tailEnd type="none" w="med" len="med"/>
+                    </a:lnR>
+                    <a:lnT w="6350" cap="flat" cmpd="sng" algn="ctr">
+                      <a:solidFill>
+                        <a:srgbClr val="E3E1DB"/>
+                      </a:solidFill>
+                      <a:prstDash val="solid"/>
+                      <a:round/>
+                      <a:headEnd type="none" w="med" len="med"/>
+                      <a:tailEnd type="none" w="med" len="med"/>
+                    </a:lnT>
+                    <a:lnB w="6350" cap="flat" cmpd="sng" algn="ctr">
+                      <a:solidFill>
+                        <a:srgbClr val="E3E1DB"/>
+                      </a:solidFill>
+                      <a:prstDash val="solid"/>
+                      <a:round/>
+                      <a:headEnd type="none" w="med" len="med"/>
+                      <a:tailEnd type="none" w="med" len="med"/>
+                    </a:lnB>
+                    <a:solidFill>
+                      <a:srgbClr val="F4F7F9"/>
+                    </a:solidFill>
+                  </a:tcPr>
+                </a:tc>
+              </a:tr>
+              <a:tr h="169164">
+                <a:tc>
+                  <a:txBody>
+                    <a:bodyPr/>
+                    <a:lstStyle/>
+                    <a:p>
+                      <a:pPr indent="0" marL="0">
+                        <a:buNone/>
+                      </a:pPr>
+                      <a:r>
+                        <a:rPr lang="en-US" sz="1050" b="1" dirty="0">
+                          <a:solidFill>
+                            <a:srgbClr val="21295C"/>
+                          </a:solidFill>
+                          <a:latin typeface="Calibri" pitchFamily="34" charset="0"/>
+                          <a:ea typeface="Calibri" pitchFamily="34" charset="-122"/>
+                          <a:cs typeface="Calibri" pitchFamily="34" charset="-120"/>
+                        </a:rPr>
+                        <a:t>運動後疲労</a:t>
+                      </a:r>
+                      <a:endParaRPr lang="en-US" sz="1050" dirty="0">
+                        <a:latin typeface="Calibri" charset="0"/>
+                        <a:ea typeface="Calibri" charset="0"/>
+                        <a:cs typeface="Calibri" charset="0"/>
+                      </a:endParaRPr>
+                    </a:p>
+                  </a:txBody>
+                  <a:tcPr marL="91440" marR="91440" marT="45720" marB="45720" anchor="ctr">
+                    <a:lnL w="6350" cap="flat" cmpd="sng" algn="ctr">
+                      <a:solidFill>
+                        <a:srgbClr val="E3E1DB"/>
+                      </a:solidFill>
+                      <a:prstDash val="solid"/>
+                      <a:round/>
+                      <a:headEnd type="none" w="med" len="med"/>
+                      <a:tailEnd type="none" w="med" len="med"/>
+                    </a:lnL>
+                    <a:lnR w="6350" cap="flat" cmpd="sng" algn="ctr">
+                      <a:solidFill>
+                        <a:srgbClr val="E3E1DB"/>
+                      </a:solidFill>
+                      <a:prstDash val="solid"/>
+                      <a:round/>
+                      <a:headEnd type="none" w="med" len="med"/>
+                      <a:tailEnd type="none" w="med" len="med"/>
+                    </a:lnR>
+                    <a:lnT w="6350" cap="flat" cmpd="sng" algn="ctr">
+                      <a:solidFill>
+                        <a:srgbClr val="E3E1DB"/>
+                      </a:solidFill>
+                      <a:prstDash val="solid"/>
+                      <a:round/>
+                      <a:headEnd type="none" w="med" len="med"/>
+                      <a:tailEnd type="none" w="med" len="med"/>
+                    </a:lnT>
+                    <a:lnB w="6350" cap="flat" cmpd="sng" algn="ctr">
+                      <a:solidFill>
+                        <a:srgbClr val="E3E1DB"/>
+                      </a:solidFill>
+                      <a:prstDash val="solid"/>
+                      <a:round/>
+                      <a:headEnd type="none" w="med" len="med"/>
+                      <a:tailEnd type="none" w="med" len="med"/>
+                    </a:lnB>
+                    <a:solidFill>
+                      <a:srgbClr val="FFFFFF"/>
+                    </a:solidFill>
+                  </a:tcPr>
+                </a:tc>
+                <a:tc>
+                  <a:txBody>
+                    <a:bodyPr/>
+                    <a:lstStyle/>
+                    <a:p>
+                      <a:pPr indent="0" marL="0">
+                        <a:buNone/>
+                      </a:pPr>
+                      <a:r>
+                        <a:rPr lang="en-US" sz="1050" dirty="0">
+                          <a:solidFill>
+                            <a:srgbClr val="1A1A1A"/>
+                          </a:solidFill>
+                          <a:latin typeface="Calibri" pitchFamily="34" charset="0"/>
+                          <a:ea typeface="Calibri" pitchFamily="34" charset="-122"/>
+                          <a:cs typeface="Calibri" pitchFamily="34" charset="-120"/>
+                        </a:rPr>
                         <a:t>3.17</a:t>
                       </a:r>
                       <a:endParaRPr lang="en-US" sz="1050" dirty="0">
@@ -9840,7 +11192,7 @@
       </p:graphicFrame>
       <p:sp>
         <p:nvSpPr>
-          <p:cNvPr id="41" name="Text 38"/>
+          <p:cNvPr id="43" name="Text 40"/>
           <p:cNvSpPr txBox="1"/>
           <p:nvPr/>
         </p:nvSpPr>
@@ -9879,7 +11231,7 @@
       </p:sp>
       <p:sp>
         <p:nvSpPr>
-          <p:cNvPr id="42" name="Shape 39"/>
+          <p:cNvPr id="44" name="Shape 41"/>
           <p:cNvSpPr/>
           <p:nvPr/>
         </p:nvSpPr>
@@ -9901,7 +11253,7 @@
       </p:sp>
       <p:sp>
         <p:nvSpPr>
-          <p:cNvPr id="43" name="Text 40"/>
+          <p:cNvPr id="45" name="Text 42"/>
           <p:cNvSpPr txBox="1"/>
           <p:nvPr/>
         </p:nvSpPr>
